--- a/notes/09-Machine_Data.pptx
+++ b/notes/09-Machine_Data.pptx
@@ -28,21 +28,21 @@
     <p:sldId id="1347" r:id="rId19"/>
     <p:sldId id="1353" r:id="rId20"/>
     <p:sldId id="1296" r:id="rId21"/>
-    <p:sldId id="1301" r:id="rId22"/>
-    <p:sldId id="1304" r:id="rId23"/>
-    <p:sldId id="1302" r:id="rId24"/>
-    <p:sldId id="1303" r:id="rId25"/>
-    <p:sldId id="1305" r:id="rId26"/>
-    <p:sldId id="1306" r:id="rId27"/>
-    <p:sldId id="1307" r:id="rId28"/>
-    <p:sldId id="1337" r:id="rId29"/>
-    <p:sldId id="1312" r:id="rId30"/>
-    <p:sldId id="1315" r:id="rId31"/>
-    <p:sldId id="1317" r:id="rId32"/>
-    <p:sldId id="1318" r:id="rId33"/>
-    <p:sldId id="1320" r:id="rId34"/>
-    <p:sldId id="1321" r:id="rId35"/>
-    <p:sldId id="1324" r:id="rId36"/>
+    <p:sldId id="1324" r:id="rId22"/>
+    <p:sldId id="1301" r:id="rId23"/>
+    <p:sldId id="1304" r:id="rId24"/>
+    <p:sldId id="1302" r:id="rId25"/>
+    <p:sldId id="1303" r:id="rId26"/>
+    <p:sldId id="1305" r:id="rId27"/>
+    <p:sldId id="1306" r:id="rId28"/>
+    <p:sldId id="1307" r:id="rId29"/>
+    <p:sldId id="1337" r:id="rId30"/>
+    <p:sldId id="1312" r:id="rId31"/>
+    <p:sldId id="1315" r:id="rId32"/>
+    <p:sldId id="1317" r:id="rId33"/>
+    <p:sldId id="1318" r:id="rId34"/>
+    <p:sldId id="1320" r:id="rId35"/>
+    <p:sldId id="1321" r:id="rId36"/>
     <p:sldId id="1340" r:id="rId37"/>
     <p:sldId id="1339" r:id="rId38"/>
     <p:sldId id="1341" r:id="rId39"/>
@@ -169,14 +169,6 @@
 </p:presentation>
 </file>
 
-<file path=ppt/revisionInfo.xml><?xml version="1.0" encoding="utf-8"?>
-<p1510:revInfo xmlns:a="http://schemas.openxmlformats.org/drawingml/2006/main" xmlns:r="http://schemas.openxmlformats.org/officeDocument/2006/relationships" xmlns:p1510="http://schemas.microsoft.com/office/powerpoint/2015/10/main">
-  <p1510:revLst>
-    <p1510:client id="{B3DAED7E-3B53-4D3C-8D40-8D849C2F64FB}" v="115" dt="2020-10-28T19:51:36.353"/>
-  </p1510:revLst>
-</p1510:revInfo>
-</file>
-
 <file path=ppt/handoutMasters/handoutMaster1.xml><?xml version="1.0" encoding="utf-8"?>
 <p:handoutMaster xmlns:a="http://schemas.openxmlformats.org/drawingml/2006/main" xmlns:r="http://schemas.openxmlformats.org/officeDocument/2006/relationships" xmlns:p="http://schemas.openxmlformats.org/presentationml/2006/main">
   <p:cSld>
@@ -259,7 +251,7 @@
           <a:p>
             <a:fld id="{C9615FF3-9FA2-1C4A-AAEA-4750F890D655}" type="datetimeFigureOut">
               <a:rPr lang="en-US" smtClean="0"/>
-              <a:t>10/28/2020</a:t>
+              <a:t>10/21/26</a:t>
             </a:fld>
             <a:endParaRPr lang="en-US"/>
           </a:p>
@@ -425,7 +417,7 @@
           <a:p>
             <a:fld id="{52180D89-5C43-EF4A-AA48-38E879565468}" type="datetimeFigureOut">
               <a:rPr lang="en-US" smtClean="0"/>
-              <a:t>10/28/2020</a:t>
+              <a:t>10/21/26</a:t>
             </a:fld>
             <a:endParaRPr lang="en-US"/>
           </a:p>
@@ -919,7 +911,7 @@
                 <a:cs typeface="ＭＳ Ｐゴシック" pitchFamily="-96" charset="-128"/>
               </a:rPr>
               <a:pPr/>
-              <a:t>26</a:t>
+              <a:t>27</a:t>
             </a:fld>
             <a:endParaRPr lang="en-US">
               <a:latin typeface="Times New Roman" pitchFamily="-96" charset="0"/>
@@ -1016,7 +1008,7 @@
                 <a:cs typeface="ＭＳ Ｐゴシック" pitchFamily="-96" charset="-128"/>
               </a:rPr>
               <a:pPr/>
-              <a:t>27</a:t>
+              <a:t>28</a:t>
             </a:fld>
             <a:endParaRPr lang="en-US">
               <a:latin typeface="Times New Roman" pitchFamily="-96" charset="0"/>
@@ -1113,7 +1105,7 @@
                 <a:cs typeface="ＭＳ Ｐゴシック" pitchFamily="-96" charset="-128"/>
               </a:rPr>
               <a:pPr/>
-              <a:t>28</a:t>
+              <a:t>29</a:t>
             </a:fld>
             <a:endParaRPr lang="en-US">
               <a:latin typeface="Times New Roman" pitchFamily="-96" charset="0"/>
@@ -1210,7 +1202,7 @@
                 <a:cs typeface="ＭＳ Ｐゴシック" pitchFamily="-96" charset="-128"/>
               </a:rPr>
               <a:pPr/>
-              <a:t>29</a:t>
+              <a:t>30</a:t>
             </a:fld>
             <a:endParaRPr lang="en-US">
               <a:latin typeface="Times New Roman" pitchFamily="-96" charset="0"/>
@@ -1307,7 +1299,7 @@
                 <a:cs typeface="ＭＳ Ｐゴシック" pitchFamily="-96" charset="-128"/>
               </a:rPr>
               <a:pPr/>
-              <a:t>30</a:t>
+              <a:t>31</a:t>
             </a:fld>
             <a:endParaRPr lang="en-US">
               <a:latin typeface="Times New Roman" pitchFamily="-96" charset="0"/>
@@ -1404,7 +1396,7 @@
                 <a:cs typeface="ＭＳ Ｐゴシック" pitchFamily="-96" charset="-128"/>
               </a:rPr>
               <a:pPr/>
-              <a:t>31</a:t>
+              <a:t>32</a:t>
             </a:fld>
             <a:endParaRPr lang="en-US">
               <a:latin typeface="Times New Roman" pitchFamily="-96" charset="0"/>
@@ -2643,7 +2635,7 @@
           <a:p>
             <a:fld id="{212D147F-079F-4846-994D-0DB4A1A045D4}" type="datetime1">
               <a:rPr lang="zh-CN" altLang="en-US" smtClean="0"/>
-              <a:t>2020/10/28</a:t>
+              <a:t>2026/10/21</a:t>
             </a:fld>
             <a:endParaRPr lang="en-US"/>
           </a:p>
@@ -2807,7 +2799,7 @@
           <a:p>
             <a:fld id="{17491736-879B-FE48-95EC-EDE8A01D99DB}" type="datetime1">
               <a:rPr lang="zh-CN" altLang="en-US" smtClean="0"/>
-              <a:t>2020/10/28</a:t>
+              <a:t>2026/10/21</a:t>
             </a:fld>
             <a:endParaRPr lang="en-US"/>
           </a:p>
@@ -2981,7 +2973,7 @@
           <a:p>
             <a:fld id="{B977160F-44E5-DA43-A440-B77513F80BF6}" type="datetime1">
               <a:rPr lang="zh-CN" altLang="en-US" smtClean="0"/>
-              <a:t>2020/10/28</a:t>
+              <a:t>2026/10/21</a:t>
             </a:fld>
             <a:endParaRPr lang="en-US"/>
           </a:p>
@@ -3177,7 +3169,7 @@
           <a:p>
             <a:fld id="{AE880671-2720-6742-BF3B-130F38BFD6C2}" type="datetime1">
               <a:rPr lang="zh-CN" altLang="en-US" smtClean="0"/>
-              <a:t>2020/10/28</a:t>
+              <a:t>2026/10/21</a:t>
             </a:fld>
             <a:endParaRPr lang="en-US"/>
           </a:p>
@@ -3418,7 +3410,7 @@
           <a:p>
             <a:fld id="{0C2FF912-C460-F747-A5A7-E580342BDBD8}" type="datetime1">
               <a:rPr lang="zh-CN" altLang="en-US" smtClean="0"/>
-              <a:t>2020/10/28</a:t>
+              <a:t>2026/10/21</a:t>
             </a:fld>
             <a:endParaRPr lang="en-US"/>
           </a:p>
@@ -3699,7 +3691,7 @@
           <a:p>
             <a:fld id="{1EEB1225-B413-9941-B6FE-722B9F1A3838}" type="datetime1">
               <a:rPr lang="zh-CN" altLang="en-US" smtClean="0"/>
-              <a:t>2020/10/28</a:t>
+              <a:t>2026/10/21</a:t>
             </a:fld>
             <a:endParaRPr lang="en-US"/>
           </a:p>
@@ -4114,7 +4106,7 @@
           <a:p>
             <a:fld id="{3E24F182-DE75-D141-B72A-8599E29248A5}" type="datetime1">
               <a:rPr lang="zh-CN" altLang="en-US" smtClean="0"/>
-              <a:t>2020/10/28</a:t>
+              <a:t>2026/10/21</a:t>
             </a:fld>
             <a:endParaRPr lang="en-US"/>
           </a:p>
@@ -4227,7 +4219,7 @@
           <a:p>
             <a:fld id="{8E8C2D7A-8A1B-DA48-9B0B-0DEE102746F0}" type="datetime1">
               <a:rPr lang="zh-CN" altLang="en-US" smtClean="0"/>
-              <a:t>2020/10/28</a:t>
+              <a:t>2026/10/21</a:t>
             </a:fld>
             <a:endParaRPr lang="en-US"/>
           </a:p>
@@ -4318,7 +4310,7 @@
           <a:p>
             <a:fld id="{4153C787-59C9-0445-8F38-642A8469076F}" type="datetime1">
               <a:rPr lang="zh-CN" altLang="en-US" smtClean="0"/>
-              <a:t>2020/10/28</a:t>
+              <a:t>2026/10/21</a:t>
             </a:fld>
             <a:endParaRPr lang="en-US"/>
           </a:p>
@@ -4589,7 +4581,7 @@
           <a:p>
             <a:fld id="{44D50209-807A-E542-A52E-D898C2D2B27F}" type="datetime1">
               <a:rPr lang="zh-CN" altLang="en-US" smtClean="0"/>
-              <a:t>2020/10/28</a:t>
+              <a:t>2026/10/21</a:t>
             </a:fld>
             <a:endParaRPr lang="en-US"/>
           </a:p>
@@ -4840,7 +4832,7 @@
           <a:p>
             <a:fld id="{4EC27158-6770-8C48-8082-76913598A291}" type="datetime1">
               <a:rPr lang="zh-CN" altLang="en-US" smtClean="0"/>
-              <a:t>2020/10/28</a:t>
+              <a:t>2026/10/21</a:t>
             </a:fld>
             <a:endParaRPr lang="en-US"/>
           </a:p>
@@ -5049,7 +5041,7 @@
           <a:p>
             <a:fld id="{6619FEBD-E571-1443-AA22-BB9E67C15179}" type="datetime1">
               <a:rPr lang="zh-CN" altLang="en-US" smtClean="0"/>
-              <a:t>2020/10/28</a:t>
+              <a:t>2026/10/21</a:t>
             </a:fld>
             <a:endParaRPr lang="en-US"/>
           </a:p>
@@ -11604,38 +11596,77 @@
       </p:grpSpPr>
       <p:sp>
         <p:nvSpPr>
-          <p:cNvPr id="72706" name="Rectangle 3"/>
+          <p:cNvPr id="2" name="标题 1"/>
           <p:cNvSpPr>
-            <a:spLocks noGrp="1" noChangeArrowheads="1"/>
+            <a:spLocks noGrp="1"/>
           </p:cNvSpPr>
           <p:nvPr>
             <p:ph type="title"/>
           </p:nvPr>
         </p:nvSpPr>
-        <p:spPr>
-          <a:xfrm>
-            <a:off x="304800" y="417513"/>
-            <a:ext cx="8382000" cy="573087"/>
-          </a:xfrm>
-        </p:spPr>
+        <p:spPr/>
         <p:txBody>
-          <a:bodyPr>
-            <a:normAutofit fontScale="90000"/>
-          </a:bodyPr>
+          <a:bodyPr/>
           <a:lstStyle/>
           <a:p>
             <a:r>
-              <a:rPr lang="en-US" dirty="0">
-                <a:latin typeface="Calibri" pitchFamily="-96" charset="0"/>
-              </a:rPr>
-              <a:t>Binary Puzzle 1</a:t>
-            </a:r>
+              <a:rPr kumimoji="1" lang="en-US" altLang="zh-CN" dirty="0"/>
+              <a:t>Accessing Program Data: struct</a:t>
+            </a:r>
+            <a:endParaRPr kumimoji="1" lang="zh-CN" altLang="en-US" dirty="0"/>
           </a:p>
         </p:txBody>
       </p:sp>
       <p:sp>
         <p:nvSpPr>
-          <p:cNvPr id="7" name="Rectangle 2"/>
+          <p:cNvPr id="6" name="Content Placeholder 5">
+            <a:extLst>
+              <a:ext uri="{FF2B5EF4-FFF2-40B4-BE49-F238E27FC236}">
+                <a16:creationId xmlns:a16="http://schemas.microsoft.com/office/drawing/2014/main" id="{9BFE19AC-E636-419B-878C-0049D9BC0336}"/>
+              </a:ext>
+            </a:extLst>
+          </p:cNvPr>
+          <p:cNvSpPr>
+            <a:spLocks noGrp="1"/>
+          </p:cNvSpPr>
+          <p:nvPr>
+            <p:ph idx="1"/>
+          </p:nvPr>
+        </p:nvSpPr>
+        <p:spPr>
+          <a:xfrm>
+            <a:off x="457200" y="1600201"/>
+            <a:ext cx="8424886" cy="1547358"/>
+          </a:xfrm>
+        </p:spPr>
+        <p:txBody>
+          <a:bodyPr/>
+          <a:lstStyle/>
+          <a:p>
+            <a:r>
+              <a:rPr lang="en-US" dirty="0"/>
+              <a:t>Struct is stored in the memory </a:t>
+            </a:r>
+          </a:p>
+          <a:p>
+            <a:pPr lvl="1"/>
+            <a:r>
+              <a:rPr lang="en-US" dirty="0"/>
+              <a:t>Fields are contiguous in the order they are declared in struct</a:t>
+            </a:r>
+          </a:p>
+          <a:p>
+            <a:pPr lvl="1"/>
+            <a:r>
+              <a:rPr lang="en-US" dirty="0"/>
+              <a:t>There may be padding (gaps) between fields </a:t>
+            </a:r>
+          </a:p>
+        </p:txBody>
+      </p:sp>
+      <p:sp>
+        <p:nvSpPr>
+          <p:cNvPr id="4" name="Rectangle 2"/>
           <p:cNvSpPr>
             <a:spLocks noChangeArrowheads="1"/>
           </p:cNvSpPr>
@@ -11643,19 +11674,15 @@
         </p:nvSpPr>
         <p:spPr bwMode="auto">
           <a:xfrm>
-            <a:off x="584446" y="1357298"/>
-            <a:ext cx="6651850" cy="920765"/>
+            <a:off x="538525" y="3425717"/>
+            <a:ext cx="3296295" cy="1474763"/>
           </a:xfrm>
           <a:prstGeom prst="rect">
             <a:avLst/>
           </a:prstGeom>
-          <a:solidFill>
-            <a:srgbClr val="F6F5BD"/>
-          </a:solidFill>
+          <a:noFill/>
           <a:ln w="12700">
-            <a:solidFill>
-              <a:schemeClr val="tx1"/>
-            </a:solidFill>
+            <a:noFill/>
             <a:miter lim="800000"/>
             <a:headEnd/>
             <a:tailEnd/>
@@ -11672,86 +11699,439 @@
           <a:p>
             <a:pPr eaLnBrk="0" hangingPunct="0"/>
             <a:r>
-              <a:rPr lang="en-US" sz="1800" b="1" dirty="0">
-                <a:latin typeface="Courier New" pitchFamily="-96" charset="0"/>
-              </a:rPr>
-              <a:t>void mystery(</a:t>
-            </a:r>
-            <a:r>
-              <a:rPr lang="en-US" sz="1800" b="1" dirty="0" err="1">
-                <a:latin typeface="Courier New" pitchFamily="-96" charset="0"/>
-              </a:rPr>
-              <a:t>int</a:t>
-            </a:r>
-            <a:r>
-              <a:rPr lang="en-US" sz="1800" b="1" dirty="0">
-                <a:latin typeface="Courier New" pitchFamily="-96" charset="0"/>
-              </a:rPr>
-              <a:t> *</a:t>
-            </a:r>
-            <a:r>
-              <a:rPr lang="en-US" b="1" dirty="0" err="1">
-                <a:latin typeface="Courier New" pitchFamily="-96" charset="0"/>
-              </a:rPr>
-              <a:t>arr</a:t>
-            </a:r>
-            <a:r>
-              <a:rPr lang="en-US" b="1" dirty="0">
-                <a:latin typeface="Courier New" pitchFamily="-96" charset="0"/>
-              </a:rPr>
-              <a:t>, </a:t>
-            </a:r>
-            <a:r>
-              <a:rPr lang="en-US" b="1" dirty="0" err="1">
-                <a:latin typeface="Courier New" pitchFamily="-96" charset="0"/>
-              </a:rPr>
-              <a:t>int</a:t>
-            </a:r>
-            <a:r>
-              <a:rPr lang="en-US" b="1" dirty="0">
-                <a:latin typeface="Courier New" pitchFamily="-96" charset="0"/>
-              </a:rPr>
-              <a:t> n</a:t>
-            </a:r>
-            <a:r>
-              <a:rPr lang="en-US" sz="1800" b="1" dirty="0">
-                <a:latin typeface="Courier New" pitchFamily="-96" charset="0"/>
-              </a:rPr>
-              <a:t>) {</a:t>
+              <a:rPr lang="en-US" sz="1800" dirty="0" err="1">
+                <a:latin typeface="Consolas"/>
+                <a:cs typeface="Consolas"/>
+              </a:rPr>
+              <a:t>typedef</a:t>
+            </a:r>
+            <a:r>
+              <a:rPr lang="en-US" sz="1800" dirty="0">
+                <a:latin typeface="Consolas"/>
+                <a:cs typeface="Consolas"/>
+              </a:rPr>
+              <a:t> </a:t>
+            </a:r>
+            <a:r>
+              <a:rPr lang="en-US" sz="1800" dirty="0" err="1">
+                <a:latin typeface="Consolas"/>
+                <a:cs typeface="Consolas"/>
+              </a:rPr>
+              <a:t>struct</a:t>
+            </a:r>
+            <a:r>
+              <a:rPr lang="en-US" sz="1800" dirty="0">
+                <a:latin typeface="Consolas"/>
+                <a:cs typeface="Consolas"/>
+              </a:rPr>
+              <a:t> node {</a:t>
             </a:r>
           </a:p>
           <a:p>
             <a:pPr eaLnBrk="0" hangingPunct="0"/>
             <a:r>
-              <a:rPr lang="en-US" sz="1800" b="1" dirty="0">
-                <a:latin typeface="Courier New" pitchFamily="-96" charset="0"/>
-              </a:rPr>
-              <a:t>   </a:t>
-            </a:r>
-            <a:r>
-              <a:rPr lang="en-US" sz="1800" b="1" dirty="0">
-                <a:solidFill>
-                  <a:srgbClr val="FF0000"/>
-                </a:solidFill>
-                <a:latin typeface="Courier New" pitchFamily="-96" charset="0"/>
-              </a:rPr>
-              <a:t>???</a:t>
+              <a:rPr lang="en-US" sz="1800" dirty="0">
+                <a:latin typeface="Consolas"/>
+                <a:cs typeface="Consolas"/>
+              </a:rPr>
+              <a:t>    long id;</a:t>
             </a:r>
           </a:p>
           <a:p>
             <a:pPr eaLnBrk="0" hangingPunct="0"/>
             <a:r>
-              <a:rPr lang="en-US" sz="1800" b="1" dirty="0">
-                <a:latin typeface="Courier New" pitchFamily="-96" charset="0"/>
-              </a:rPr>
-              <a:t>}</a:t>
+              <a:rPr lang="en-US" sz="1800" dirty="0">
+                <a:latin typeface="Consolas"/>
+                <a:cs typeface="Consolas"/>
+              </a:rPr>
+              <a:t>    char *name;</a:t>
+            </a:r>
+          </a:p>
+          <a:p>
+            <a:pPr eaLnBrk="0" hangingPunct="0"/>
+            <a:r>
+              <a:rPr lang="en-US" sz="1800" dirty="0">
+                <a:latin typeface="Consolas"/>
+                <a:cs typeface="Consolas"/>
+              </a:rPr>
+              <a:t>    </a:t>
+            </a:r>
+            <a:r>
+              <a:rPr lang="en-US" sz="1800" dirty="0" err="1">
+                <a:latin typeface="Consolas"/>
+                <a:cs typeface="Consolas"/>
+              </a:rPr>
+              <a:t>struct</a:t>
+            </a:r>
+            <a:r>
+              <a:rPr lang="en-US" sz="1800" dirty="0">
+                <a:latin typeface="Consolas"/>
+                <a:cs typeface="Consolas"/>
+              </a:rPr>
+              <a:t> node *next;</a:t>
+            </a:r>
+          </a:p>
+          <a:p>
+            <a:pPr eaLnBrk="0" hangingPunct="0"/>
+            <a:r>
+              <a:rPr lang="en-US" sz="1800" dirty="0">
+                <a:latin typeface="Consolas"/>
+                <a:cs typeface="Consolas"/>
+              </a:rPr>
+              <a:t>}node;</a:t>
             </a:r>
           </a:p>
         </p:txBody>
       </p:sp>
+      <p:grpSp>
+        <p:nvGrpSpPr>
+          <p:cNvPr id="14" name="Group 13"/>
+          <p:cNvGrpSpPr/>
+          <p:nvPr/>
+        </p:nvGrpSpPr>
+        <p:grpSpPr>
+          <a:xfrm>
+            <a:off x="4683734" y="3793654"/>
+            <a:ext cx="3399312" cy="825500"/>
+            <a:chOff x="4768460" y="2414867"/>
+            <a:chExt cx="3399312" cy="825500"/>
+          </a:xfrm>
+        </p:grpSpPr>
+        <p:sp>
+          <p:nvSpPr>
+            <p:cNvPr id="5" name="Rectangle 11"/>
+            <p:cNvSpPr>
+              <a:spLocks noChangeArrowheads="1"/>
+            </p:cNvSpPr>
+            <p:nvPr/>
+          </p:nvSpPr>
+          <p:spPr bwMode="auto">
+            <a:xfrm>
+              <a:off x="4935148" y="2414867"/>
+              <a:ext cx="1015651" cy="431800"/>
+            </a:xfrm>
+            <a:prstGeom prst="rect">
+              <a:avLst/>
+            </a:prstGeom>
+            <a:solidFill>
+              <a:schemeClr val="accent2">
+                <a:lumMod val="40000"/>
+                <a:lumOff val="60000"/>
+              </a:schemeClr>
+            </a:solidFill>
+            <a:ln w="25400">
+              <a:solidFill>
+                <a:schemeClr val="tx1"/>
+              </a:solidFill>
+              <a:miter lim="800000"/>
+              <a:headEnd/>
+              <a:tailEnd/>
+            </a:ln>
+            <a:effectLst/>
+          </p:spPr>
+          <p:txBody>
+            <a:bodyPr wrap="none" lIns="90487" tIns="44450" rIns="90487" bIns="44450" anchor="ctr"/>
+            <a:lstStyle/>
+            <a:p>
+              <a:pPr eaLnBrk="0" hangingPunct="0">
+                <a:defRPr/>
+              </a:pPr>
+              <a:r>
+                <a:rPr lang="en-US" sz="2000" dirty="0">
+                  <a:latin typeface="Arial"/>
+                  <a:cs typeface="Arial"/>
+                </a:rPr>
+                <a:t>id</a:t>
+              </a:r>
+              <a:endParaRPr lang="en-US" sz="2000" dirty="0">
+                <a:latin typeface="Arial"/>
+                <a:ea typeface="+mn-ea"/>
+                <a:cs typeface="Arial"/>
+              </a:endParaRPr>
+            </a:p>
+          </p:txBody>
+        </p:sp>
+        <p:sp>
+          <p:nvSpPr>
+            <p:cNvPr id="8" name="Rectangle 10"/>
+            <p:cNvSpPr>
+              <a:spLocks noChangeArrowheads="1"/>
+            </p:cNvSpPr>
+            <p:nvPr/>
+          </p:nvSpPr>
+          <p:spPr bwMode="auto">
+            <a:xfrm>
+              <a:off x="5950799" y="2414867"/>
+              <a:ext cx="991392" cy="431800"/>
+            </a:xfrm>
+            <a:prstGeom prst="rect">
+              <a:avLst/>
+            </a:prstGeom>
+            <a:solidFill>
+              <a:schemeClr val="accent4">
+                <a:lumMod val="40000"/>
+                <a:lumOff val="60000"/>
+              </a:schemeClr>
+            </a:solidFill>
+            <a:ln w="25400">
+              <a:solidFill>
+                <a:schemeClr val="tx1"/>
+              </a:solidFill>
+              <a:miter lim="800000"/>
+              <a:headEnd/>
+              <a:tailEnd/>
+            </a:ln>
+          </p:spPr>
+          <p:txBody>
+            <a:bodyPr wrap="none" lIns="90487" tIns="44450" rIns="90487" bIns="44450" anchor="ctr">
+              <a:prstTxWarp prst="textNoShape">
+                <a:avLst/>
+              </a:prstTxWarp>
+            </a:bodyPr>
+            <a:lstStyle/>
+            <a:p>
+              <a:pPr algn="ctr" eaLnBrk="0" hangingPunct="0"/>
+              <a:r>
+                <a:rPr lang="en-US" sz="2000" dirty="0">
+                  <a:latin typeface="Courier New" pitchFamily="-96" charset="0"/>
+                </a:rPr>
+                <a:t>name</a:t>
+              </a:r>
+            </a:p>
+          </p:txBody>
+        </p:sp>
+        <p:sp>
+          <p:nvSpPr>
+            <p:cNvPr id="9" name="Rectangle 12"/>
+            <p:cNvSpPr>
+              <a:spLocks noChangeArrowheads="1"/>
+            </p:cNvSpPr>
+            <p:nvPr/>
+          </p:nvSpPr>
+          <p:spPr bwMode="auto">
+            <a:xfrm>
+              <a:off x="6942190" y="2414867"/>
+              <a:ext cx="987285" cy="431800"/>
+            </a:xfrm>
+            <a:prstGeom prst="rect">
+              <a:avLst/>
+            </a:prstGeom>
+            <a:solidFill>
+              <a:schemeClr val="accent5">
+                <a:lumMod val="40000"/>
+                <a:lumOff val="60000"/>
+              </a:schemeClr>
+            </a:solidFill>
+            <a:ln w="25400">
+              <a:solidFill>
+                <a:schemeClr val="tx1"/>
+              </a:solidFill>
+              <a:miter lim="800000"/>
+              <a:headEnd/>
+              <a:tailEnd/>
+            </a:ln>
+          </p:spPr>
+          <p:txBody>
+            <a:bodyPr wrap="none" lIns="90487" tIns="44450" rIns="90487" bIns="44450" anchor="ctr">
+              <a:prstTxWarp prst="textNoShape">
+                <a:avLst/>
+              </a:prstTxWarp>
+            </a:bodyPr>
+            <a:lstStyle/>
+            <a:p>
+              <a:pPr algn="ctr" eaLnBrk="0" hangingPunct="0"/>
+              <a:r>
+                <a:rPr lang="en-US" sz="2000" dirty="0">
+                  <a:latin typeface="Arial"/>
+                  <a:cs typeface="Arial"/>
+                </a:rPr>
+                <a:t>next</a:t>
+              </a:r>
+            </a:p>
+          </p:txBody>
+        </p:sp>
+        <p:sp>
+          <p:nvSpPr>
+            <p:cNvPr id="10" name="Rectangle 13"/>
+            <p:cNvSpPr>
+              <a:spLocks noChangeArrowheads="1"/>
+            </p:cNvSpPr>
+            <p:nvPr/>
+          </p:nvSpPr>
+          <p:spPr bwMode="auto">
+            <a:xfrm>
+              <a:off x="4768460" y="2846667"/>
+              <a:ext cx="333375" cy="393700"/>
+            </a:xfrm>
+            <a:prstGeom prst="rect">
+              <a:avLst/>
+            </a:prstGeom>
+            <a:noFill/>
+            <a:ln w="25400">
+              <a:noFill/>
+              <a:miter lim="800000"/>
+              <a:headEnd/>
+              <a:tailEnd/>
+            </a:ln>
+          </p:spPr>
+          <p:txBody>
+            <a:bodyPr wrap="none" lIns="90487" tIns="44450" rIns="90487" bIns="44450">
+              <a:prstTxWarp prst="textNoShape">
+                <a:avLst/>
+              </a:prstTxWarp>
+              <a:spAutoFit/>
+            </a:bodyPr>
+            <a:lstStyle/>
+            <a:p>
+              <a:pPr eaLnBrk="0" hangingPunct="0"/>
+              <a:r>
+                <a:rPr lang="en-US" sz="2000" dirty="0">
+                  <a:latin typeface="Courier New" pitchFamily="-96" charset="0"/>
+                </a:rPr>
+                <a:t>0</a:t>
+              </a:r>
+            </a:p>
+          </p:txBody>
+        </p:sp>
+        <p:sp>
+          <p:nvSpPr>
+            <p:cNvPr id="11" name="Rectangle 14"/>
+            <p:cNvSpPr>
+              <a:spLocks noChangeArrowheads="1"/>
+            </p:cNvSpPr>
+            <p:nvPr/>
+          </p:nvSpPr>
+          <p:spPr bwMode="auto">
+            <a:xfrm>
+              <a:off x="5791273" y="2827607"/>
+              <a:ext cx="336655" cy="397545"/>
+            </a:xfrm>
+            <a:prstGeom prst="rect">
+              <a:avLst/>
+            </a:prstGeom>
+            <a:noFill/>
+            <a:ln w="25400">
+              <a:noFill/>
+              <a:miter lim="800000"/>
+              <a:headEnd/>
+              <a:tailEnd/>
+            </a:ln>
+          </p:spPr>
+          <p:txBody>
+            <a:bodyPr wrap="none" lIns="90487" tIns="44450" rIns="90487" bIns="44450">
+              <a:prstTxWarp prst="textNoShape">
+                <a:avLst/>
+              </a:prstTxWarp>
+              <a:spAutoFit/>
+            </a:bodyPr>
+            <a:lstStyle/>
+            <a:p>
+              <a:pPr eaLnBrk="0" hangingPunct="0"/>
+              <a:r>
+                <a:rPr lang="en-US" sz="2000" dirty="0">
+                  <a:latin typeface="Courier New" pitchFamily="-96" charset="0"/>
+                </a:rPr>
+                <a:t>8</a:t>
+              </a:r>
+            </a:p>
+          </p:txBody>
+        </p:sp>
+        <p:sp>
+          <p:nvSpPr>
+            <p:cNvPr id="12" name="Rectangle 15"/>
+            <p:cNvSpPr>
+              <a:spLocks noChangeArrowheads="1"/>
+            </p:cNvSpPr>
+            <p:nvPr/>
+          </p:nvSpPr>
+          <p:spPr bwMode="auto">
+            <a:xfrm>
+              <a:off x="6699303" y="2813329"/>
+              <a:ext cx="490568" cy="397545"/>
+            </a:xfrm>
+            <a:prstGeom prst="rect">
+              <a:avLst/>
+            </a:prstGeom>
+            <a:noFill/>
+            <a:ln w="25400">
+              <a:noFill/>
+              <a:miter lim="800000"/>
+              <a:headEnd/>
+              <a:tailEnd/>
+            </a:ln>
+          </p:spPr>
+          <p:txBody>
+            <a:bodyPr wrap="none" lIns="90487" tIns="44450" rIns="90487" bIns="44450">
+              <a:prstTxWarp prst="textNoShape">
+                <a:avLst/>
+              </a:prstTxWarp>
+              <a:spAutoFit/>
+            </a:bodyPr>
+            <a:lstStyle/>
+            <a:p>
+              <a:pPr eaLnBrk="0" hangingPunct="0"/>
+              <a:r>
+                <a:rPr lang="en-US" sz="2000" dirty="0">
+                  <a:latin typeface="Courier New" pitchFamily="-96" charset="0"/>
+                </a:rPr>
+                <a:t>16</a:t>
+              </a:r>
+            </a:p>
+          </p:txBody>
+        </p:sp>
+        <p:sp>
+          <p:nvSpPr>
+            <p:cNvPr id="13" name="Rectangle 16"/>
+            <p:cNvSpPr>
+              <a:spLocks noChangeArrowheads="1"/>
+            </p:cNvSpPr>
+            <p:nvPr/>
+          </p:nvSpPr>
+          <p:spPr bwMode="auto">
+            <a:xfrm>
+              <a:off x="7677204" y="2813329"/>
+              <a:ext cx="490568" cy="397545"/>
+            </a:xfrm>
+            <a:prstGeom prst="rect">
+              <a:avLst/>
+            </a:prstGeom>
+            <a:noFill/>
+            <a:ln w="25400">
+              <a:noFill/>
+              <a:miter lim="800000"/>
+              <a:headEnd/>
+              <a:tailEnd/>
+            </a:ln>
+          </p:spPr>
+          <p:txBody>
+            <a:bodyPr wrap="none" lIns="90487" tIns="44450" rIns="90487" bIns="44450">
+              <a:prstTxWarp prst="textNoShape">
+                <a:avLst/>
+              </a:prstTxWarp>
+              <a:spAutoFit/>
+            </a:bodyPr>
+            <a:lstStyle/>
+            <a:p>
+              <a:pPr eaLnBrk="0" hangingPunct="0"/>
+              <a:r>
+                <a:rPr lang="en-US" sz="2000" dirty="0">
+                  <a:latin typeface="Courier New" pitchFamily="-96" charset="0"/>
+                </a:rPr>
+                <a:t>24</a:t>
+              </a:r>
+            </a:p>
+          </p:txBody>
+        </p:sp>
+      </p:grpSp>
       <p:sp>
         <p:nvSpPr>
-          <p:cNvPr id="9" name="Rectangle 2"/>
+          <p:cNvPr id="7" name="Rectangle 2">
+            <a:extLst>
+              <a:ext uri="{FF2B5EF4-FFF2-40B4-BE49-F238E27FC236}">
+                <a16:creationId xmlns:a16="http://schemas.microsoft.com/office/drawing/2014/main" id="{7CBB900F-B9FE-4E0D-BE8B-43983660D687}"/>
+              </a:ext>
+            </a:extLst>
+          </p:cNvPr>
           <p:cNvSpPr>
             <a:spLocks noChangeArrowheads="1"/>
           </p:cNvSpPr>
@@ -11759,440 +12139,76 @@
         </p:nvSpPr>
         <p:spPr bwMode="auto">
           <a:xfrm>
-            <a:off x="584446" y="2441118"/>
-            <a:ext cx="4081175" cy="2859758"/>
+            <a:off x="538526" y="5419852"/>
+            <a:ext cx="2314954" cy="920765"/>
           </a:xfrm>
           <a:prstGeom prst="rect">
             <a:avLst/>
           </a:prstGeom>
-          <a:solidFill>
-            <a:schemeClr val="bg1"/>
-          </a:solidFill>
+          <a:noFill/>
           <a:ln w="12700">
-            <a:solidFill>
-              <a:schemeClr val="tx1"/>
-            </a:solidFill>
+            <a:noFill/>
             <a:miter lim="800000"/>
             <a:headEnd/>
             <a:tailEnd/>
           </a:ln>
-          <a:effectLst/>
         </p:spPr>
         <p:txBody>
           <a:bodyPr wrap="square" lIns="90487" tIns="44450" rIns="90487" bIns="44450">
+            <a:prstTxWarp prst="textNoShape">
+              <a:avLst/>
+            </a:prstTxWarp>
             <a:spAutoFit/>
           </a:bodyPr>
           <a:lstStyle/>
           <a:p>
-            <a:pPr eaLnBrk="0" hangingPunct="0">
-              <a:tabLst>
-                <a:tab pos="342900" algn="l"/>
-                <a:tab pos="1147763" algn="l"/>
-                <a:tab pos="3657600" algn="l"/>
-              </a:tabLst>
-              <a:defRPr/>
-            </a:pPr>
-            <a:r>
-              <a:rPr lang="cs-CZ" sz="1800" b="1" dirty="0">
-                <a:latin typeface="Courier New" pitchFamily="49" charset="0"/>
-                <a:ea typeface="+mn-ea"/>
-                <a:cs typeface="+mn-cs"/>
-              </a:rPr>
-              <a:t>  </a:t>
-            </a:r>
-            <a:r>
-              <a:rPr lang="cs-CZ" sz="1800" b="1" dirty="0" err="1">
-                <a:latin typeface="Courier New" pitchFamily="49" charset="0"/>
-                <a:ea typeface="+mn-ea"/>
-                <a:cs typeface="+mn-cs"/>
-              </a:rPr>
-              <a:t>movl</a:t>
-            </a:r>
-            <a:r>
-              <a:rPr lang="cs-CZ" sz="1800" b="1" dirty="0">
-                <a:latin typeface="Courier New" pitchFamily="49" charset="0"/>
-                <a:ea typeface="+mn-ea"/>
-                <a:cs typeface="+mn-cs"/>
-              </a:rPr>
-              <a:t> $0, %</a:t>
-            </a:r>
-            <a:r>
-              <a:rPr lang="cs-CZ" b="1" dirty="0" err="1">
-                <a:latin typeface="Courier New" pitchFamily="49" charset="0"/>
-              </a:rPr>
-              <a:t>e</a:t>
-            </a:r>
-            <a:r>
-              <a:rPr lang="cs-CZ" sz="1800" b="1" dirty="0" err="1">
-                <a:latin typeface="Courier New" pitchFamily="49" charset="0"/>
-                <a:ea typeface="+mn-ea"/>
-                <a:cs typeface="+mn-cs"/>
-              </a:rPr>
-              <a:t>ax</a:t>
-            </a:r>
-            <a:r>
-              <a:rPr lang="cs-CZ" sz="1800" b="1" dirty="0">
-                <a:latin typeface="Courier New" pitchFamily="49" charset="0"/>
-                <a:ea typeface="+mn-ea"/>
-                <a:cs typeface="+mn-cs"/>
-              </a:rPr>
-              <a:t>         </a:t>
-            </a:r>
-          </a:p>
-          <a:p>
-            <a:pPr eaLnBrk="0" hangingPunct="0">
-              <a:tabLst>
-                <a:tab pos="342900" algn="l"/>
-                <a:tab pos="1147763" algn="l"/>
-                <a:tab pos="3657600" algn="l"/>
-              </a:tabLst>
-              <a:defRPr/>
-            </a:pPr>
-            <a:r>
-              <a:rPr lang="cs-CZ" sz="1800" b="1" dirty="0">
-                <a:latin typeface="Courier New" pitchFamily="49" charset="0"/>
-                <a:ea typeface="+mn-ea"/>
-                <a:cs typeface="+mn-cs"/>
-              </a:rPr>
-              <a:t>  </a:t>
-            </a:r>
-            <a:r>
-              <a:rPr lang="cs-CZ" sz="1800" b="1" dirty="0" err="1">
-                <a:latin typeface="Courier New" pitchFamily="49" charset="0"/>
-                <a:ea typeface="+mn-ea"/>
-                <a:cs typeface="+mn-cs"/>
-              </a:rPr>
-              <a:t>jmp</a:t>
-            </a:r>
-            <a:r>
-              <a:rPr lang="cs-CZ" sz="1800" b="1" dirty="0">
-                <a:latin typeface="Courier New" pitchFamily="49" charset="0"/>
-                <a:ea typeface="+mn-ea"/>
-                <a:cs typeface="+mn-cs"/>
-              </a:rPr>
-              <a:t>  .L3              </a:t>
-            </a:r>
-          </a:p>
-          <a:p>
-            <a:pPr eaLnBrk="0" hangingPunct="0">
-              <a:tabLst>
-                <a:tab pos="342900" algn="l"/>
-                <a:tab pos="1147763" algn="l"/>
-                <a:tab pos="3657600" algn="l"/>
-              </a:tabLst>
-              <a:defRPr/>
-            </a:pPr>
-            <a:r>
-              <a:rPr lang="cs-CZ" sz="1800" b="1" dirty="0">
-                <a:latin typeface="Courier New" pitchFamily="49" charset="0"/>
-                <a:ea typeface="+mn-ea"/>
-                <a:cs typeface="+mn-cs"/>
-              </a:rPr>
-              <a:t>.L4:  </a:t>
-            </a:r>
-          </a:p>
-          <a:p>
-            <a:pPr eaLnBrk="0" hangingPunct="0">
-              <a:tabLst>
-                <a:tab pos="342900" algn="l"/>
-                <a:tab pos="1147763" algn="l"/>
-                <a:tab pos="3657600" algn="l"/>
-              </a:tabLst>
-              <a:defRPr/>
-            </a:pPr>
-            <a:r>
-              <a:rPr lang="cs-CZ" b="1" dirty="0">
-                <a:latin typeface="Courier New" pitchFamily="49" charset="0"/>
-              </a:rPr>
-              <a:t>  </a:t>
-            </a:r>
-            <a:r>
-              <a:rPr lang="cs-CZ" b="1" dirty="0" err="1">
-                <a:latin typeface="Courier New" pitchFamily="49" charset="0"/>
-              </a:rPr>
-              <a:t>movslq</a:t>
-            </a:r>
-            <a:r>
-              <a:rPr lang="cs-CZ" b="1" dirty="0">
-                <a:latin typeface="Courier New" pitchFamily="49" charset="0"/>
-              </a:rPr>
-              <a:t> %</a:t>
-            </a:r>
-            <a:r>
-              <a:rPr lang="cs-CZ" b="1" dirty="0" err="1">
-                <a:latin typeface="Courier New" pitchFamily="49" charset="0"/>
-              </a:rPr>
-              <a:t>eax</a:t>
-            </a:r>
-            <a:r>
-              <a:rPr lang="cs-CZ" b="1" dirty="0">
-                <a:latin typeface="Courier New" pitchFamily="49" charset="0"/>
-              </a:rPr>
-              <a:t>, %</a:t>
-            </a:r>
-            <a:r>
-              <a:rPr lang="cs-CZ" b="1" dirty="0" err="1">
-                <a:latin typeface="Courier New" pitchFamily="49" charset="0"/>
-              </a:rPr>
-              <a:t>rdx</a:t>
-            </a:r>
-            <a:r>
-              <a:rPr lang="cs-CZ" sz="1800" b="1" dirty="0">
-                <a:latin typeface="Courier New" pitchFamily="49" charset="0"/>
-                <a:ea typeface="+mn-ea"/>
-                <a:cs typeface="+mn-cs"/>
-              </a:rPr>
-              <a:t>                      </a:t>
-            </a:r>
-          </a:p>
-          <a:p>
-            <a:pPr eaLnBrk="0" hangingPunct="0">
-              <a:tabLst>
-                <a:tab pos="342900" algn="l"/>
-                <a:tab pos="1147763" algn="l"/>
-                <a:tab pos="3657600" algn="l"/>
-              </a:tabLst>
-              <a:defRPr/>
-            </a:pPr>
-            <a:r>
-              <a:rPr lang="cs-CZ" sz="1800" b="1" dirty="0">
-                <a:latin typeface="Courier New" pitchFamily="49" charset="0"/>
-                <a:ea typeface="+mn-ea"/>
-                <a:cs typeface="+mn-cs"/>
-              </a:rPr>
-              <a:t>  </a:t>
-            </a:r>
-            <a:r>
-              <a:rPr lang="cs-CZ" sz="1800" b="1" dirty="0" err="1">
-                <a:latin typeface="Courier New" pitchFamily="49" charset="0"/>
-                <a:ea typeface="+mn-ea"/>
-                <a:cs typeface="+mn-cs"/>
-              </a:rPr>
-              <a:t>addl</a:t>
-            </a:r>
-            <a:r>
-              <a:rPr lang="cs-CZ" sz="1800" b="1" dirty="0">
-                <a:latin typeface="Courier New" pitchFamily="49" charset="0"/>
-                <a:ea typeface="+mn-ea"/>
-                <a:cs typeface="+mn-cs"/>
-              </a:rPr>
-              <a:t> $1, (%rdi,%rdx,4) </a:t>
-            </a:r>
-          </a:p>
-          <a:p>
-            <a:pPr eaLnBrk="0" hangingPunct="0">
-              <a:tabLst>
-                <a:tab pos="342900" algn="l"/>
-                <a:tab pos="1147763" algn="l"/>
-                <a:tab pos="3657600" algn="l"/>
-              </a:tabLst>
-              <a:defRPr/>
-            </a:pPr>
-            <a:r>
-              <a:rPr lang="cs-CZ" sz="1800" b="1" dirty="0">
-                <a:latin typeface="Courier New" pitchFamily="49" charset="0"/>
-                <a:ea typeface="+mn-ea"/>
-                <a:cs typeface="+mn-cs"/>
-              </a:rPr>
-              <a:t>  </a:t>
-            </a:r>
-            <a:r>
-              <a:rPr lang="cs-CZ" sz="1800" b="1" dirty="0" err="1">
-                <a:latin typeface="Courier New" pitchFamily="49" charset="0"/>
-                <a:ea typeface="+mn-ea"/>
-                <a:cs typeface="+mn-cs"/>
-              </a:rPr>
-              <a:t>addl</a:t>
-            </a:r>
-            <a:r>
-              <a:rPr lang="cs-CZ" sz="1800" b="1" dirty="0">
-                <a:latin typeface="Courier New" pitchFamily="49" charset="0"/>
-                <a:ea typeface="+mn-ea"/>
-                <a:cs typeface="+mn-cs"/>
-              </a:rPr>
-              <a:t> $1, %</a:t>
-            </a:r>
-            <a:r>
-              <a:rPr lang="cs-CZ" b="1" dirty="0" err="1">
-                <a:latin typeface="Courier New" pitchFamily="49" charset="0"/>
-              </a:rPr>
-              <a:t>e</a:t>
-            </a:r>
-            <a:r>
-              <a:rPr lang="cs-CZ" sz="1800" b="1" dirty="0" err="1">
-                <a:latin typeface="Courier New" pitchFamily="49" charset="0"/>
-                <a:ea typeface="+mn-ea"/>
-                <a:cs typeface="+mn-cs"/>
-              </a:rPr>
-              <a:t>ax</a:t>
-            </a:r>
-            <a:r>
-              <a:rPr lang="cs-CZ" sz="1800" b="1" dirty="0">
-                <a:latin typeface="Courier New" pitchFamily="49" charset="0"/>
-                <a:ea typeface="+mn-ea"/>
-                <a:cs typeface="+mn-cs"/>
-              </a:rPr>
-              <a:t>          </a:t>
-            </a:r>
-          </a:p>
-          <a:p>
-            <a:pPr eaLnBrk="0" hangingPunct="0">
-              <a:tabLst>
-                <a:tab pos="342900" algn="l"/>
-                <a:tab pos="1147763" algn="l"/>
-                <a:tab pos="3657600" algn="l"/>
-              </a:tabLst>
-              <a:defRPr/>
-            </a:pPr>
-            <a:r>
-              <a:rPr lang="cs-CZ" sz="1800" b="1" dirty="0">
-                <a:latin typeface="Courier New" pitchFamily="49" charset="0"/>
-                <a:ea typeface="+mn-ea"/>
-                <a:cs typeface="+mn-cs"/>
-              </a:rPr>
-              <a:t>.L3:                        </a:t>
-            </a:r>
-          </a:p>
-          <a:p>
-            <a:pPr eaLnBrk="0" hangingPunct="0">
-              <a:tabLst>
-                <a:tab pos="342900" algn="l"/>
-                <a:tab pos="1147763" algn="l"/>
-                <a:tab pos="3657600" algn="l"/>
-              </a:tabLst>
-              <a:defRPr/>
-            </a:pPr>
-            <a:r>
-              <a:rPr lang="cs-CZ" sz="1800" b="1" dirty="0">
-                <a:latin typeface="Courier New" pitchFamily="49" charset="0"/>
-                <a:ea typeface="+mn-ea"/>
-                <a:cs typeface="+mn-cs"/>
-              </a:rPr>
-              <a:t>  </a:t>
-            </a:r>
-            <a:r>
-              <a:rPr lang="cs-CZ" sz="1800" b="1" dirty="0" err="1">
-                <a:latin typeface="Courier New" pitchFamily="49" charset="0"/>
-                <a:ea typeface="+mn-ea"/>
-                <a:cs typeface="+mn-cs"/>
-              </a:rPr>
-              <a:t>cmpl</a:t>
-            </a:r>
-            <a:r>
-              <a:rPr lang="cs-CZ" sz="1800" b="1" dirty="0">
-                <a:latin typeface="Courier New" pitchFamily="49" charset="0"/>
-                <a:ea typeface="+mn-ea"/>
-                <a:cs typeface="+mn-cs"/>
-              </a:rPr>
-              <a:t> %</a:t>
-            </a:r>
-            <a:r>
-              <a:rPr lang="cs-CZ" b="1" dirty="0" err="1">
-                <a:latin typeface="Courier New" pitchFamily="49" charset="0"/>
-              </a:rPr>
-              <a:t>esi</a:t>
-            </a:r>
-            <a:r>
-              <a:rPr lang="cs-CZ" sz="1800" b="1" dirty="0">
-                <a:latin typeface="Courier New" pitchFamily="49" charset="0"/>
-                <a:ea typeface="+mn-ea"/>
-                <a:cs typeface="+mn-cs"/>
-              </a:rPr>
-              <a:t>, %</a:t>
-            </a:r>
-            <a:r>
-              <a:rPr lang="cs-CZ" b="1" dirty="0" err="1">
-                <a:latin typeface="Courier New" pitchFamily="49" charset="0"/>
-              </a:rPr>
-              <a:t>e</a:t>
-            </a:r>
-            <a:r>
-              <a:rPr lang="cs-CZ" sz="1800" b="1" dirty="0" err="1">
-                <a:latin typeface="Courier New" pitchFamily="49" charset="0"/>
-                <a:ea typeface="+mn-ea"/>
-                <a:cs typeface="+mn-cs"/>
-              </a:rPr>
-              <a:t>ax</a:t>
-            </a:r>
-            <a:r>
-              <a:rPr lang="cs-CZ" sz="1800" b="1" dirty="0">
-                <a:latin typeface="Courier New" pitchFamily="49" charset="0"/>
-                <a:ea typeface="+mn-ea"/>
-                <a:cs typeface="+mn-cs"/>
-              </a:rPr>
-              <a:t>          </a:t>
-            </a:r>
-          </a:p>
-          <a:p>
-            <a:pPr eaLnBrk="0" hangingPunct="0">
-              <a:tabLst>
-                <a:tab pos="342900" algn="l"/>
-                <a:tab pos="1147763" algn="l"/>
-                <a:tab pos="3657600" algn="l"/>
-              </a:tabLst>
-              <a:defRPr/>
-            </a:pPr>
-            <a:r>
-              <a:rPr lang="cs-CZ" sz="1800" b="1" dirty="0">
-                <a:latin typeface="Courier New" pitchFamily="49" charset="0"/>
-                <a:ea typeface="+mn-ea"/>
-                <a:cs typeface="+mn-cs"/>
-              </a:rPr>
-              <a:t>  </a:t>
-            </a:r>
-            <a:r>
-              <a:rPr lang="cs-CZ" sz="1800" b="1" dirty="0" err="1">
-                <a:latin typeface="Courier New" pitchFamily="49" charset="0"/>
-                <a:ea typeface="+mn-ea"/>
-                <a:cs typeface="+mn-cs"/>
-              </a:rPr>
-              <a:t>jl</a:t>
-            </a:r>
-            <a:r>
-              <a:rPr lang="cs-CZ" sz="1800" b="1" dirty="0">
-                <a:latin typeface="Courier New" pitchFamily="49" charset="0"/>
-                <a:ea typeface="+mn-ea"/>
-                <a:cs typeface="+mn-cs"/>
-              </a:rPr>
-              <a:t>  .L4               </a:t>
-            </a:r>
-          </a:p>
-          <a:p>
-            <a:pPr eaLnBrk="0" hangingPunct="0">
-              <a:tabLst>
-                <a:tab pos="342900" algn="l"/>
-                <a:tab pos="1147763" algn="l"/>
-                <a:tab pos="3657600" algn="l"/>
-              </a:tabLst>
-              <a:defRPr/>
-            </a:pPr>
-            <a:r>
-              <a:rPr lang="cs-CZ" b="1" dirty="0">
-                <a:latin typeface="Courier New" pitchFamily="49" charset="0"/>
-              </a:rPr>
-              <a:t>  </a:t>
-            </a:r>
-            <a:r>
-              <a:rPr lang="cs-CZ" sz="1800" b="1" dirty="0">
-                <a:latin typeface="Courier New" pitchFamily="49" charset="0"/>
-                <a:ea typeface="+mn-ea"/>
-                <a:cs typeface="+mn-cs"/>
-              </a:rPr>
-              <a:t>ret</a:t>
+            <a:pPr eaLnBrk="0" hangingPunct="0"/>
+            <a:r>
+              <a:rPr lang="en-US" dirty="0">
+                <a:latin typeface="Consolas"/>
+                <a:cs typeface="Consolas"/>
+              </a:rPr>
+              <a:t>n-&gt;id = 10;</a:t>
+            </a:r>
+          </a:p>
+          <a:p>
+            <a:pPr eaLnBrk="0" hangingPunct="0"/>
+            <a:r>
+              <a:rPr lang="en-US" dirty="0">
+                <a:latin typeface="Consolas"/>
+                <a:cs typeface="Consolas"/>
+              </a:rPr>
+              <a:t>n-&gt;name = NULL;</a:t>
+            </a:r>
+          </a:p>
+          <a:p>
+            <a:pPr eaLnBrk="0" hangingPunct="0"/>
+            <a:r>
+              <a:rPr lang="en-US" dirty="0">
+                <a:latin typeface="Consolas"/>
+                <a:cs typeface="Consolas"/>
+              </a:rPr>
+              <a:t>n-&gt;next = n;</a:t>
             </a:r>
           </a:p>
         </p:txBody>
       </p:sp>
       <p:sp>
         <p:nvSpPr>
-          <p:cNvPr id="10" name="矩形 1"/>
+          <p:cNvPr id="18" name="矩形 1">
+            <a:extLst>
+              <a:ext uri="{FF2B5EF4-FFF2-40B4-BE49-F238E27FC236}">
+                <a16:creationId xmlns:a16="http://schemas.microsoft.com/office/drawing/2014/main" id="{8A728C36-136A-4D05-92FD-2A411E135B44}"/>
+              </a:ext>
+            </a:extLst>
+          </p:cNvPr>
           <p:cNvSpPr/>
           <p:nvPr/>
         </p:nvSpPr>
         <p:spPr>
           <a:xfrm>
-            <a:off x="584446" y="5511540"/>
-            <a:ext cx="2853328" cy="646331"/>
+            <a:off x="3006484" y="5257799"/>
+            <a:ext cx="1615763" cy="369332"/>
           </a:xfrm>
           <a:prstGeom prst="rect">
             <a:avLst/>
@@ -12205,147 +12221,269 @@
           <a:lstStyle/>
           <a:p>
             <a:r>
-              <a:rPr lang="cs-CZ" altLang="zh-CN" b="1" dirty="0">
-                <a:latin typeface="Consolas"/>
-                <a:cs typeface="Consolas"/>
-              </a:rPr>
-              <a:t>%rdi </a:t>
-            </a:r>
-            <a:r>
-              <a:rPr lang="cs-CZ" altLang="zh-CN" dirty="0">
-                <a:latin typeface="Arial"/>
-                <a:cs typeface="Arial"/>
-              </a:rPr>
-              <a:t>has </a:t>
-            </a:r>
-            <a:r>
-              <a:rPr lang="cs-CZ" altLang="zh-CN" dirty="0" err="1">
-                <a:latin typeface="Arial"/>
-                <a:cs typeface="Arial"/>
-              </a:rPr>
-              <a:t>the</a:t>
-            </a:r>
-            <a:r>
-              <a:rPr lang="cs-CZ" altLang="zh-CN" dirty="0">
-                <a:latin typeface="Arial"/>
-                <a:cs typeface="Arial"/>
-              </a:rPr>
-              <a:t> </a:t>
-            </a:r>
-            <a:r>
-              <a:rPr lang="cs-CZ" altLang="zh-CN" dirty="0" err="1">
-                <a:latin typeface="Arial"/>
-                <a:cs typeface="Arial"/>
-              </a:rPr>
-              <a:t>value</a:t>
-            </a:r>
-            <a:r>
-              <a:rPr lang="cs-CZ" altLang="zh-CN" dirty="0">
-                <a:latin typeface="Arial"/>
-                <a:cs typeface="Arial"/>
-              </a:rPr>
-              <a:t> </a:t>
-            </a:r>
-            <a:r>
-              <a:rPr lang="cs-CZ" altLang="zh-CN" dirty="0" err="1">
-                <a:latin typeface="Arial"/>
-                <a:cs typeface="Arial"/>
-              </a:rPr>
-              <a:t>of</a:t>
-            </a:r>
-            <a:r>
-              <a:rPr lang="cs-CZ" altLang="zh-CN" dirty="0">
-                <a:latin typeface="Arial"/>
-                <a:cs typeface="Arial"/>
-              </a:rPr>
-              <a:t> </a:t>
-            </a:r>
-            <a:r>
-              <a:rPr lang="cs-CZ" altLang="zh-CN" dirty="0" err="1">
-                <a:latin typeface="Arial"/>
-                <a:cs typeface="Arial"/>
-              </a:rPr>
-              <a:t>arr</a:t>
-            </a:r>
-            <a:endParaRPr lang="cs-CZ" altLang="zh-CN" dirty="0">
-              <a:latin typeface="Arial"/>
-              <a:cs typeface="Arial"/>
-            </a:endParaRPr>
-          </a:p>
-          <a:p>
-            <a:r>
-              <a:rPr lang="cs-CZ" altLang="zh-CN" b="1" dirty="0">
-                <a:latin typeface="Consolas"/>
-                <a:cs typeface="Consolas"/>
+              <a:rPr lang="en-US" altLang="zh-CN" dirty="0">
+                <a:latin typeface="Calibri"/>
+                <a:cs typeface="Calibri"/>
               </a:rPr>
               <a:t>%</a:t>
             </a:r>
             <a:r>
-              <a:rPr lang="cs-CZ" altLang="zh-CN" b="1" dirty="0" err="1">
-                <a:latin typeface="Consolas"/>
-                <a:cs typeface="Consolas"/>
-              </a:rPr>
-              <a:t>esi</a:t>
-            </a:r>
-            <a:r>
-              <a:rPr lang="cs-CZ" altLang="zh-CN" b="1" dirty="0">
-                <a:latin typeface="Consolas"/>
-                <a:cs typeface="Consolas"/>
-              </a:rPr>
-              <a:t> </a:t>
-            </a:r>
-            <a:r>
-              <a:rPr lang="cs-CZ" altLang="zh-CN" dirty="0">
-                <a:latin typeface="Arial"/>
-                <a:cs typeface="Arial"/>
-              </a:rPr>
-              <a:t>has </a:t>
-            </a:r>
-            <a:r>
-              <a:rPr lang="cs-CZ" altLang="zh-CN" dirty="0" err="1">
-                <a:latin typeface="Arial"/>
-                <a:cs typeface="Arial"/>
-              </a:rPr>
-              <a:t>the</a:t>
-            </a:r>
-            <a:r>
-              <a:rPr lang="cs-CZ" altLang="zh-CN" dirty="0">
-                <a:latin typeface="Arial"/>
-                <a:cs typeface="Arial"/>
-              </a:rPr>
-              <a:t> </a:t>
-            </a:r>
-            <a:r>
-              <a:rPr lang="cs-CZ" altLang="zh-CN" dirty="0" err="1">
-                <a:latin typeface="Arial"/>
-                <a:cs typeface="Arial"/>
-              </a:rPr>
-              <a:t>value</a:t>
-            </a:r>
-            <a:r>
-              <a:rPr lang="cs-CZ" altLang="zh-CN" dirty="0">
-                <a:latin typeface="Arial"/>
-                <a:cs typeface="Arial"/>
-              </a:rPr>
-              <a:t> </a:t>
-            </a:r>
-            <a:r>
-              <a:rPr lang="cs-CZ" altLang="zh-CN" dirty="0" err="1">
-                <a:latin typeface="Arial"/>
-                <a:cs typeface="Arial"/>
-              </a:rPr>
-              <a:t>of</a:t>
-            </a:r>
-            <a:r>
-              <a:rPr lang="cs-CZ" altLang="zh-CN" dirty="0">
-                <a:latin typeface="Arial"/>
-                <a:cs typeface="Arial"/>
-              </a:rPr>
-              <a:t> n </a:t>
-            </a:r>
-            <a:endParaRPr lang="zh-CN" altLang="en-US" dirty="0">
-              <a:latin typeface="Arial"/>
-              <a:cs typeface="Arial"/>
+              <a:rPr lang="en-US" altLang="zh-CN" dirty="0" err="1">
+                <a:latin typeface="Calibri"/>
+                <a:cs typeface="Calibri"/>
+              </a:rPr>
+              <a:t>rdi</a:t>
+            </a:r>
+            <a:r>
+              <a:rPr lang="en-US" altLang="zh-CN" dirty="0">
+                <a:latin typeface="Calibri"/>
+                <a:cs typeface="Calibri"/>
+              </a:rPr>
+              <a:t> contains n</a:t>
+            </a:r>
+          </a:p>
+        </p:txBody>
+      </p:sp>
+      <p:sp>
+        <p:nvSpPr>
+          <p:cNvPr id="19" name="Right Arrow 15">
+            <a:extLst>
+              <a:ext uri="{FF2B5EF4-FFF2-40B4-BE49-F238E27FC236}">
+                <a16:creationId xmlns:a16="http://schemas.microsoft.com/office/drawing/2014/main" id="{9E0BB329-281A-4C8A-9783-34B5315B0917}"/>
+              </a:ext>
+            </a:extLst>
+          </p:cNvPr>
+          <p:cNvSpPr/>
+          <p:nvPr/>
+        </p:nvSpPr>
+        <p:spPr>
+          <a:xfrm>
+            <a:off x="2871414" y="5581604"/>
+            <a:ext cx="2353072" cy="520523"/>
+          </a:xfrm>
+          <a:prstGeom prst="rightArrow">
+            <a:avLst/>
+          </a:prstGeom>
+          <a:solidFill>
+            <a:srgbClr val="00B0F0"/>
+          </a:solidFill>
+          <a:ln w="28575">
+            <a:noFill/>
+          </a:ln>
+        </p:spPr>
+        <p:style>
+          <a:lnRef idx="2">
+            <a:schemeClr val="accent1">
+              <a:shade val="50000"/>
+            </a:schemeClr>
+          </a:lnRef>
+          <a:fillRef idx="1">
+            <a:schemeClr val="accent1"/>
+          </a:fillRef>
+          <a:effectRef idx="0">
+            <a:schemeClr val="accent1"/>
+          </a:effectRef>
+          <a:fontRef idx="minor">
+            <a:schemeClr val="lt1"/>
+          </a:fontRef>
+        </p:style>
+        <p:txBody>
+          <a:bodyPr rtlCol="0" anchor="ctr"/>
+          <a:lstStyle/>
+          <a:p>
+            <a:pPr algn="ctr"/>
+            <a:endParaRPr lang="en-US" dirty="0"/>
+          </a:p>
+        </p:txBody>
+      </p:sp>
+      <p:sp>
+        <p:nvSpPr>
+          <p:cNvPr id="20" name="Rectangle 19">
+            <a:extLst>
+              <a:ext uri="{FF2B5EF4-FFF2-40B4-BE49-F238E27FC236}">
+                <a16:creationId xmlns:a16="http://schemas.microsoft.com/office/drawing/2014/main" id="{4EB10764-E609-4AF0-B24C-76D721608202}"/>
+              </a:ext>
+            </a:extLst>
+          </p:cNvPr>
+          <p:cNvSpPr/>
+          <p:nvPr/>
+        </p:nvSpPr>
+        <p:spPr>
+          <a:xfrm>
+            <a:off x="5329635" y="5225540"/>
+            <a:ext cx="3180259" cy="400110"/>
+          </a:xfrm>
+          <a:prstGeom prst="rect">
+            <a:avLst/>
+          </a:prstGeom>
+          <a:solidFill>
+            <a:schemeClr val="tx2">
+              <a:lumMod val="40000"/>
+              <a:lumOff val="60000"/>
+            </a:schemeClr>
+          </a:solidFill>
+        </p:spPr>
+        <p:txBody>
+          <a:bodyPr wrap="square">
+            <a:spAutoFit/>
+          </a:bodyPr>
+          <a:lstStyle/>
+          <a:p>
+            <a:r>
+              <a:rPr lang="en-US" sz="2000" dirty="0" err="1">
+                <a:latin typeface="Consolas"/>
+                <a:cs typeface="Consolas"/>
+              </a:rPr>
+              <a:t>movq</a:t>
+            </a:r>
+            <a:r>
+              <a:rPr lang="en-US" sz="2000" dirty="0">
+                <a:latin typeface="Consolas"/>
+                <a:cs typeface="Consolas"/>
+              </a:rPr>
+              <a:t>    $10, (%</a:t>
+            </a:r>
+            <a:r>
+              <a:rPr lang="en-US" sz="2000" dirty="0" err="1">
+                <a:latin typeface="Consolas"/>
+                <a:cs typeface="Consolas"/>
+              </a:rPr>
+              <a:t>rdi</a:t>
+            </a:r>
+            <a:r>
+              <a:rPr lang="en-US" sz="2000" dirty="0">
+                <a:latin typeface="Consolas"/>
+                <a:cs typeface="Consolas"/>
+              </a:rPr>
+              <a:t>)</a:t>
+            </a:r>
+          </a:p>
+        </p:txBody>
+      </p:sp>
+      <p:sp>
+        <p:nvSpPr>
+          <p:cNvPr id="21" name="Rectangle 20">
+            <a:extLst>
+              <a:ext uri="{FF2B5EF4-FFF2-40B4-BE49-F238E27FC236}">
+                <a16:creationId xmlns:a16="http://schemas.microsoft.com/office/drawing/2014/main" id="{1C3107A0-B1BD-4CB7-9062-570F323C599D}"/>
+              </a:ext>
+            </a:extLst>
+          </p:cNvPr>
+          <p:cNvSpPr/>
+          <p:nvPr/>
+        </p:nvSpPr>
+        <p:spPr>
+          <a:xfrm>
+            <a:off x="5329635" y="5617594"/>
+            <a:ext cx="3180259" cy="400110"/>
+          </a:xfrm>
+          <a:prstGeom prst="rect">
+            <a:avLst/>
+          </a:prstGeom>
+          <a:solidFill>
+            <a:schemeClr val="tx2">
+              <a:lumMod val="40000"/>
+              <a:lumOff val="60000"/>
+            </a:schemeClr>
+          </a:solidFill>
+        </p:spPr>
+        <p:txBody>
+          <a:bodyPr wrap="square">
+            <a:spAutoFit/>
+          </a:bodyPr>
+          <a:lstStyle/>
+          <a:p>
+            <a:r>
+              <a:rPr lang="en-US" sz="2000" dirty="0" err="1">
+                <a:latin typeface="Consolas"/>
+                <a:cs typeface="Consolas"/>
+              </a:rPr>
+              <a:t>movq</a:t>
+            </a:r>
+            <a:r>
+              <a:rPr lang="en-US" sz="2000" dirty="0">
+                <a:latin typeface="Consolas"/>
+                <a:cs typeface="Consolas"/>
+              </a:rPr>
+              <a:t>    $0, 8(%</a:t>
+            </a:r>
+            <a:r>
+              <a:rPr lang="en-US" sz="2000" dirty="0" err="1">
+                <a:latin typeface="Consolas"/>
+                <a:cs typeface="Consolas"/>
+              </a:rPr>
+              <a:t>rdi</a:t>
+            </a:r>
+            <a:r>
+              <a:rPr lang="en-US" sz="2000" dirty="0">
+                <a:latin typeface="Consolas"/>
+                <a:cs typeface="Consolas"/>
+              </a:rPr>
+              <a:t>)</a:t>
+            </a:r>
+          </a:p>
+        </p:txBody>
+      </p:sp>
+      <p:sp>
+        <p:nvSpPr>
+          <p:cNvPr id="22" name="Rectangle 21">
+            <a:extLst>
+              <a:ext uri="{FF2B5EF4-FFF2-40B4-BE49-F238E27FC236}">
+                <a16:creationId xmlns:a16="http://schemas.microsoft.com/office/drawing/2014/main" id="{EA5DFA26-9324-4C6F-8C90-B75F921DAA93}"/>
+              </a:ext>
+            </a:extLst>
+          </p:cNvPr>
+          <p:cNvSpPr/>
+          <p:nvPr/>
+        </p:nvSpPr>
+        <p:spPr>
+          <a:xfrm>
+            <a:off x="5329635" y="6017704"/>
+            <a:ext cx="3180259" cy="400110"/>
+          </a:xfrm>
+          <a:prstGeom prst="rect">
+            <a:avLst/>
+          </a:prstGeom>
+          <a:solidFill>
+            <a:schemeClr val="tx2">
+              <a:lumMod val="40000"/>
+              <a:lumOff val="60000"/>
+            </a:schemeClr>
+          </a:solidFill>
+        </p:spPr>
+        <p:txBody>
+          <a:bodyPr wrap="square">
+            <a:spAutoFit/>
+          </a:bodyPr>
+          <a:lstStyle/>
+          <a:p>
+            <a:r>
+              <a:rPr lang="en-US" sz="2000" dirty="0" err="1"/>
+              <a:t>movq</a:t>
+            </a:r>
+            <a:r>
+              <a:rPr lang="en-US" sz="2000" dirty="0"/>
+              <a:t>         %</a:t>
+            </a:r>
+            <a:r>
+              <a:rPr lang="en-US" sz="2000" dirty="0" err="1"/>
+              <a:t>rdi</a:t>
+            </a:r>
+            <a:r>
+              <a:rPr lang="en-US" sz="2000" dirty="0"/>
+              <a:t>, 16(%</a:t>
+            </a:r>
+            <a:r>
+              <a:rPr lang="en-US" sz="2000" dirty="0" err="1"/>
+              <a:t>rdi</a:t>
+            </a:r>
+            <a:r>
+              <a:rPr lang="en-US" sz="2000" dirty="0"/>
+              <a:t>)</a:t>
+            </a:r>
+            <a:endParaRPr lang="en-US" sz="2000" dirty="0">
+              <a:latin typeface="Consolas"/>
+              <a:cs typeface="Consolas"/>
             </a:endParaRPr>
           </a:p>
         </p:txBody>
@@ -12353,13 +12491,183 @@
     </p:spTree>
     <p:extLst>
       <p:ext uri="{BB962C8B-B14F-4D97-AF65-F5344CB8AC3E}">
-        <p14:creationId xmlns:p14="http://schemas.microsoft.com/office/powerpoint/2010/main" val="2892866968"/>
+        <p14:creationId xmlns:p14="http://schemas.microsoft.com/office/powerpoint/2010/main" val="3728354591"/>
       </p:ext>
     </p:extLst>
   </p:cSld>
   <p:clrMapOvr>
     <a:masterClrMapping/>
   </p:clrMapOvr>
+  <p:timing>
+    <p:tnLst>
+      <p:par>
+        <p:cTn id="1" dur="indefinite" restart="never" nodeType="tmRoot">
+          <p:childTnLst>
+            <p:seq concurrent="1" nextAc="seek">
+              <p:cTn id="2" dur="indefinite" nodeType="mainSeq">
+                <p:childTnLst>
+                  <p:par>
+                    <p:cTn id="3" fill="hold">
+                      <p:stCondLst>
+                        <p:cond delay="indefinite"/>
+                      </p:stCondLst>
+                      <p:childTnLst>
+                        <p:par>
+                          <p:cTn id="4" fill="hold">
+                            <p:stCondLst>
+                              <p:cond delay="0"/>
+                            </p:stCondLst>
+                            <p:childTnLst>
+                              <p:par>
+                                <p:cTn id="5" presetID="1" presetClass="entr" presetSubtype="0" fill="hold" grpId="0" nodeType="clickEffect">
+                                  <p:stCondLst>
+                                    <p:cond delay="0"/>
+                                  </p:stCondLst>
+                                  <p:childTnLst>
+                                    <p:set>
+                                      <p:cBhvr>
+                                        <p:cTn id="6" dur="1" fill="hold">
+                                          <p:stCondLst>
+                                            <p:cond delay="0"/>
+                                          </p:stCondLst>
+                                        </p:cTn>
+                                        <p:tgtEl>
+                                          <p:spTgt spid="20"/>
+                                        </p:tgtEl>
+                                        <p:attrNameLst>
+                                          <p:attrName>style.visibility</p:attrName>
+                                        </p:attrNameLst>
+                                      </p:cBhvr>
+                                      <p:to>
+                                        <p:strVal val="visible"/>
+                                      </p:to>
+                                    </p:set>
+                                  </p:childTnLst>
+                                </p:cTn>
+                              </p:par>
+                            </p:childTnLst>
+                          </p:cTn>
+                        </p:par>
+                      </p:childTnLst>
+                    </p:cTn>
+                  </p:par>
+                  <p:par>
+                    <p:cTn id="7" fill="hold">
+                      <p:stCondLst>
+                        <p:cond delay="indefinite"/>
+                      </p:stCondLst>
+                      <p:childTnLst>
+                        <p:par>
+                          <p:cTn id="8" fill="hold">
+                            <p:stCondLst>
+                              <p:cond delay="0"/>
+                            </p:stCondLst>
+                            <p:childTnLst>
+                              <p:par>
+                                <p:cTn id="9" presetID="1" presetClass="entr" presetSubtype="0" fill="hold" grpId="0" nodeType="clickEffect">
+                                  <p:stCondLst>
+                                    <p:cond delay="0"/>
+                                  </p:stCondLst>
+                                  <p:childTnLst>
+                                    <p:set>
+                                      <p:cBhvr>
+                                        <p:cTn id="10" dur="1" fill="hold">
+                                          <p:stCondLst>
+                                            <p:cond delay="0"/>
+                                          </p:stCondLst>
+                                        </p:cTn>
+                                        <p:tgtEl>
+                                          <p:spTgt spid="21"/>
+                                        </p:tgtEl>
+                                        <p:attrNameLst>
+                                          <p:attrName>style.visibility</p:attrName>
+                                        </p:attrNameLst>
+                                      </p:cBhvr>
+                                      <p:to>
+                                        <p:strVal val="visible"/>
+                                      </p:to>
+                                    </p:set>
+                                  </p:childTnLst>
+                                </p:cTn>
+                              </p:par>
+                            </p:childTnLst>
+                          </p:cTn>
+                        </p:par>
+                      </p:childTnLst>
+                    </p:cTn>
+                  </p:par>
+                  <p:par>
+                    <p:cTn id="11" fill="hold">
+                      <p:stCondLst>
+                        <p:cond delay="indefinite"/>
+                      </p:stCondLst>
+                      <p:childTnLst>
+                        <p:par>
+                          <p:cTn id="12" fill="hold">
+                            <p:stCondLst>
+                              <p:cond delay="0"/>
+                            </p:stCondLst>
+                            <p:childTnLst>
+                              <p:par>
+                                <p:cTn id="13" presetID="1" presetClass="entr" presetSubtype="0" fill="hold" grpId="0" nodeType="clickEffect">
+                                  <p:stCondLst>
+                                    <p:cond delay="0"/>
+                                  </p:stCondLst>
+                                  <p:childTnLst>
+                                    <p:set>
+                                      <p:cBhvr>
+                                        <p:cTn id="14" dur="1" fill="hold">
+                                          <p:stCondLst>
+                                            <p:cond delay="0"/>
+                                          </p:stCondLst>
+                                        </p:cTn>
+                                        <p:tgtEl>
+                                          <p:spTgt spid="22"/>
+                                        </p:tgtEl>
+                                        <p:attrNameLst>
+                                          <p:attrName>style.visibility</p:attrName>
+                                        </p:attrNameLst>
+                                      </p:cBhvr>
+                                      <p:to>
+                                        <p:strVal val="visible"/>
+                                      </p:to>
+                                    </p:set>
+                                  </p:childTnLst>
+                                </p:cTn>
+                              </p:par>
+                            </p:childTnLst>
+                          </p:cTn>
+                        </p:par>
+                      </p:childTnLst>
+                    </p:cTn>
+                  </p:par>
+                </p:childTnLst>
+              </p:cTn>
+              <p:prevCondLst>
+                <p:cond evt="onPrev" delay="0">
+                  <p:tgtEl>
+                    <p:sldTgt/>
+                  </p:tgtEl>
+                </p:cond>
+              </p:prevCondLst>
+              <p:nextCondLst>
+                <p:cond evt="onNext" delay="0">
+                  <p:tgtEl>
+                    <p:sldTgt/>
+                  </p:tgtEl>
+                </p:cond>
+              </p:nextCondLst>
+            </p:seq>
+          </p:childTnLst>
+        </p:cTn>
+      </p:par>
+    </p:tnLst>
+    <p:bldLst>
+      <p:bldP spid="20" grpId="0" animBg="1"/>
+      <p:bldP spid="21" grpId="0" animBg="1"/>
+      <p:bldP spid="22" grpId="0" animBg="1"/>
+    </p:bldLst>
+  </p:timing>
 </p:sld>
 </file>
 
@@ -12529,277 +12837,7 @@
       </p:sp>
       <p:sp>
         <p:nvSpPr>
-          <p:cNvPr id="5" name="Rectangle 2"/>
-          <p:cNvSpPr>
-            <a:spLocks noChangeArrowheads="1"/>
-          </p:cNvSpPr>
-          <p:nvPr/>
-        </p:nvSpPr>
-        <p:spPr bwMode="auto">
-          <a:xfrm>
-            <a:off x="4950534" y="2441118"/>
-            <a:ext cx="4081175" cy="920765"/>
-          </a:xfrm>
-          <a:prstGeom prst="rect">
-            <a:avLst/>
-          </a:prstGeom>
-          <a:solidFill>
-            <a:schemeClr val="bg1"/>
-          </a:solidFill>
-          <a:ln w="12700">
-            <a:solidFill>
-              <a:schemeClr val="tx1"/>
-            </a:solidFill>
-            <a:miter lim="800000"/>
-            <a:headEnd/>
-            <a:tailEnd/>
-          </a:ln>
-          <a:effectLst/>
-        </p:spPr>
-        <p:txBody>
-          <a:bodyPr wrap="square" lIns="90487" tIns="44450" rIns="90487" bIns="44450">
-            <a:spAutoFit/>
-          </a:bodyPr>
-          <a:lstStyle/>
-          <a:p>
-            <a:pPr eaLnBrk="0" hangingPunct="0">
-              <a:tabLst>
-                <a:tab pos="342900" algn="l"/>
-                <a:tab pos="1147763" algn="l"/>
-                <a:tab pos="3657600" algn="l"/>
-              </a:tabLst>
-              <a:defRPr/>
-            </a:pPr>
-            <a:r>
-              <a:rPr lang="cs-CZ" sz="1800" b="1" dirty="0">
-                <a:latin typeface="Courier New" pitchFamily="49" charset="0"/>
-                <a:ea typeface="+mn-ea"/>
-                <a:cs typeface="+mn-cs"/>
-              </a:rPr>
-              <a:t>  a = 0;         </a:t>
-            </a:r>
-          </a:p>
-          <a:p>
-            <a:pPr eaLnBrk="0" hangingPunct="0">
-              <a:tabLst>
-                <a:tab pos="342900" algn="l"/>
-                <a:tab pos="1147763" algn="l"/>
-                <a:tab pos="3657600" algn="l"/>
-              </a:tabLst>
-              <a:defRPr/>
-            </a:pPr>
-            <a:r>
-              <a:rPr lang="cs-CZ" sz="1800" b="1" dirty="0">
-                <a:latin typeface="Courier New" pitchFamily="49" charset="0"/>
-                <a:ea typeface="+mn-ea"/>
-                <a:cs typeface="+mn-cs"/>
-              </a:rPr>
-              <a:t>  </a:t>
-            </a:r>
-            <a:r>
-              <a:rPr lang="cs-CZ" sz="1800" b="1" dirty="0" err="1">
-                <a:latin typeface="Courier New" pitchFamily="49" charset="0"/>
-                <a:ea typeface="+mn-ea"/>
-                <a:cs typeface="+mn-cs"/>
-              </a:rPr>
-              <a:t>goto</a:t>
-            </a:r>
-            <a:r>
-              <a:rPr lang="cs-CZ" sz="1800" b="1" dirty="0">
-                <a:latin typeface="Courier New" pitchFamily="49" charset="0"/>
-                <a:ea typeface="+mn-ea"/>
-                <a:cs typeface="+mn-cs"/>
-              </a:rPr>
-              <a:t> .L3            </a:t>
-            </a:r>
-          </a:p>
-          <a:p>
-            <a:pPr eaLnBrk="0" hangingPunct="0">
-              <a:tabLst>
-                <a:tab pos="342900" algn="l"/>
-                <a:tab pos="1147763" algn="l"/>
-                <a:tab pos="3657600" algn="l"/>
-              </a:tabLst>
-              <a:defRPr/>
-            </a:pPr>
-            <a:endParaRPr lang="cs-CZ" sz="1800" b="1" dirty="0">
-              <a:latin typeface="Courier New" pitchFamily="49" charset="0"/>
-              <a:ea typeface="+mn-ea"/>
-              <a:cs typeface="+mn-cs"/>
-            </a:endParaRPr>
-          </a:p>
-        </p:txBody>
-      </p:sp>
-      <p:sp>
-        <p:nvSpPr>
-          <p:cNvPr id="2" name="矩形 1"/>
-          <p:cNvSpPr/>
-          <p:nvPr/>
-        </p:nvSpPr>
-        <p:spPr>
-          <a:xfrm>
-            <a:off x="584446" y="5511540"/>
-            <a:ext cx="2853328" cy="646331"/>
-          </a:xfrm>
-          <a:prstGeom prst="rect">
-            <a:avLst/>
-          </a:prstGeom>
-        </p:spPr>
-        <p:txBody>
-          <a:bodyPr wrap="none">
-            <a:spAutoFit/>
-          </a:bodyPr>
-          <a:lstStyle/>
-          <a:p>
-            <a:r>
-              <a:rPr lang="cs-CZ" altLang="zh-CN" b="1" dirty="0">
-                <a:latin typeface="Consolas"/>
-                <a:cs typeface="Consolas"/>
-              </a:rPr>
-              <a:t>%rdi </a:t>
-            </a:r>
-            <a:r>
-              <a:rPr lang="cs-CZ" altLang="zh-CN" dirty="0">
-                <a:latin typeface="Arial"/>
-                <a:cs typeface="Arial"/>
-              </a:rPr>
-              <a:t>has </a:t>
-            </a:r>
-            <a:r>
-              <a:rPr lang="cs-CZ" altLang="zh-CN" dirty="0" err="1">
-                <a:latin typeface="Arial"/>
-                <a:cs typeface="Arial"/>
-              </a:rPr>
-              <a:t>the</a:t>
-            </a:r>
-            <a:r>
-              <a:rPr lang="cs-CZ" altLang="zh-CN" dirty="0">
-                <a:latin typeface="Arial"/>
-                <a:cs typeface="Arial"/>
-              </a:rPr>
-              <a:t> </a:t>
-            </a:r>
-            <a:r>
-              <a:rPr lang="cs-CZ" altLang="zh-CN" dirty="0" err="1">
-                <a:latin typeface="Arial"/>
-                <a:cs typeface="Arial"/>
-              </a:rPr>
-              <a:t>value</a:t>
-            </a:r>
-            <a:r>
-              <a:rPr lang="cs-CZ" altLang="zh-CN" dirty="0">
-                <a:latin typeface="Arial"/>
-                <a:cs typeface="Arial"/>
-              </a:rPr>
-              <a:t> </a:t>
-            </a:r>
-            <a:r>
-              <a:rPr lang="cs-CZ" altLang="zh-CN" dirty="0" err="1">
-                <a:latin typeface="Arial"/>
-                <a:cs typeface="Arial"/>
-              </a:rPr>
-              <a:t>of</a:t>
-            </a:r>
-            <a:r>
-              <a:rPr lang="cs-CZ" altLang="zh-CN" dirty="0">
-                <a:latin typeface="Arial"/>
-                <a:cs typeface="Arial"/>
-              </a:rPr>
-              <a:t> </a:t>
-            </a:r>
-            <a:r>
-              <a:rPr lang="cs-CZ" altLang="zh-CN" dirty="0" err="1">
-                <a:latin typeface="Arial"/>
-                <a:cs typeface="Arial"/>
-              </a:rPr>
-              <a:t>arr</a:t>
-            </a:r>
-            <a:endParaRPr lang="cs-CZ" altLang="zh-CN" dirty="0">
-              <a:latin typeface="Arial"/>
-              <a:cs typeface="Arial"/>
-            </a:endParaRPr>
-          </a:p>
-          <a:p>
-            <a:r>
-              <a:rPr lang="cs-CZ" altLang="zh-CN" b="1" dirty="0">
-                <a:latin typeface="Consolas"/>
-                <a:cs typeface="Consolas"/>
-              </a:rPr>
-              <a:t>%</a:t>
-            </a:r>
-            <a:r>
-              <a:rPr lang="cs-CZ" altLang="zh-CN" b="1" dirty="0" err="1">
-                <a:latin typeface="Consolas"/>
-                <a:cs typeface="Consolas"/>
-              </a:rPr>
-              <a:t>esi</a:t>
-            </a:r>
-            <a:r>
-              <a:rPr lang="cs-CZ" altLang="zh-CN" b="1" dirty="0">
-                <a:latin typeface="Consolas"/>
-                <a:cs typeface="Consolas"/>
-              </a:rPr>
-              <a:t> </a:t>
-            </a:r>
-            <a:r>
-              <a:rPr lang="cs-CZ" altLang="zh-CN" dirty="0">
-                <a:latin typeface="Arial"/>
-                <a:cs typeface="Arial"/>
-              </a:rPr>
-              <a:t>has </a:t>
-            </a:r>
-            <a:r>
-              <a:rPr lang="cs-CZ" altLang="zh-CN" dirty="0" err="1">
-                <a:latin typeface="Arial"/>
-                <a:cs typeface="Arial"/>
-              </a:rPr>
-              <a:t>the</a:t>
-            </a:r>
-            <a:r>
-              <a:rPr lang="cs-CZ" altLang="zh-CN" dirty="0">
-                <a:latin typeface="Arial"/>
-                <a:cs typeface="Arial"/>
-              </a:rPr>
-              <a:t> </a:t>
-            </a:r>
-            <a:r>
-              <a:rPr lang="cs-CZ" altLang="zh-CN" dirty="0" err="1">
-                <a:latin typeface="Arial"/>
-                <a:cs typeface="Arial"/>
-              </a:rPr>
-              <a:t>value</a:t>
-            </a:r>
-            <a:r>
-              <a:rPr lang="cs-CZ" altLang="zh-CN" dirty="0">
-                <a:latin typeface="Arial"/>
-                <a:cs typeface="Arial"/>
-              </a:rPr>
-              <a:t> </a:t>
-            </a:r>
-            <a:r>
-              <a:rPr lang="cs-CZ" altLang="zh-CN" dirty="0" err="1">
-                <a:latin typeface="Arial"/>
-                <a:cs typeface="Arial"/>
-              </a:rPr>
-              <a:t>of</a:t>
-            </a:r>
-            <a:r>
-              <a:rPr lang="cs-CZ" altLang="zh-CN" dirty="0">
-                <a:latin typeface="Arial"/>
-                <a:cs typeface="Arial"/>
-              </a:rPr>
-              <a:t> n </a:t>
-            </a:r>
-            <a:endParaRPr lang="zh-CN" altLang="en-US" dirty="0">
-              <a:latin typeface="Arial"/>
-              <a:cs typeface="Arial"/>
-            </a:endParaRPr>
-          </a:p>
-        </p:txBody>
-      </p:sp>
-      <p:sp>
-        <p:nvSpPr>
-          <p:cNvPr id="8" name="Rectangle 2"/>
+          <p:cNvPr id="9" name="Rectangle 2"/>
           <p:cNvSpPr>
             <a:spLocks noChangeArrowheads="1"/>
           </p:cNvSpPr>
@@ -13231,10 +13269,177 @@
           </a:p>
         </p:txBody>
       </p:sp>
+      <p:sp>
+        <p:nvSpPr>
+          <p:cNvPr id="10" name="矩形 1"/>
+          <p:cNvSpPr/>
+          <p:nvPr/>
+        </p:nvSpPr>
+        <p:spPr>
+          <a:xfrm>
+            <a:off x="584446" y="5511540"/>
+            <a:ext cx="2853328" cy="646331"/>
+          </a:xfrm>
+          <a:prstGeom prst="rect">
+            <a:avLst/>
+          </a:prstGeom>
+        </p:spPr>
+        <p:txBody>
+          <a:bodyPr wrap="none">
+            <a:spAutoFit/>
+          </a:bodyPr>
+          <a:lstStyle/>
+          <a:p>
+            <a:r>
+              <a:rPr lang="cs-CZ" altLang="zh-CN" b="1" dirty="0">
+                <a:latin typeface="Consolas"/>
+                <a:cs typeface="Consolas"/>
+              </a:rPr>
+              <a:t>%rdi </a:t>
+            </a:r>
+            <a:r>
+              <a:rPr lang="cs-CZ" altLang="zh-CN" dirty="0">
+                <a:latin typeface="Arial"/>
+                <a:cs typeface="Arial"/>
+              </a:rPr>
+              <a:t>has </a:t>
+            </a:r>
+            <a:r>
+              <a:rPr lang="cs-CZ" altLang="zh-CN" dirty="0" err="1">
+                <a:latin typeface="Arial"/>
+                <a:cs typeface="Arial"/>
+              </a:rPr>
+              <a:t>the</a:t>
+            </a:r>
+            <a:r>
+              <a:rPr lang="cs-CZ" altLang="zh-CN" dirty="0">
+                <a:latin typeface="Arial"/>
+                <a:cs typeface="Arial"/>
+              </a:rPr>
+              <a:t> </a:t>
+            </a:r>
+            <a:r>
+              <a:rPr lang="cs-CZ" altLang="zh-CN" dirty="0" err="1">
+                <a:latin typeface="Arial"/>
+                <a:cs typeface="Arial"/>
+              </a:rPr>
+              <a:t>value</a:t>
+            </a:r>
+            <a:r>
+              <a:rPr lang="cs-CZ" altLang="zh-CN" dirty="0">
+                <a:latin typeface="Arial"/>
+                <a:cs typeface="Arial"/>
+              </a:rPr>
+              <a:t> </a:t>
+            </a:r>
+            <a:r>
+              <a:rPr lang="cs-CZ" altLang="zh-CN" dirty="0" err="1">
+                <a:latin typeface="Arial"/>
+                <a:cs typeface="Arial"/>
+              </a:rPr>
+              <a:t>of</a:t>
+            </a:r>
+            <a:r>
+              <a:rPr lang="cs-CZ" altLang="zh-CN" dirty="0">
+                <a:latin typeface="Arial"/>
+                <a:cs typeface="Arial"/>
+              </a:rPr>
+              <a:t> </a:t>
+            </a:r>
+            <a:r>
+              <a:rPr lang="cs-CZ" altLang="zh-CN" dirty="0" err="1">
+                <a:latin typeface="Arial"/>
+                <a:cs typeface="Arial"/>
+              </a:rPr>
+              <a:t>arr</a:t>
+            </a:r>
+            <a:endParaRPr lang="cs-CZ" altLang="zh-CN" dirty="0">
+              <a:latin typeface="Arial"/>
+              <a:cs typeface="Arial"/>
+            </a:endParaRPr>
+          </a:p>
+          <a:p>
+            <a:r>
+              <a:rPr lang="cs-CZ" altLang="zh-CN" b="1" dirty="0">
+                <a:latin typeface="Consolas"/>
+                <a:cs typeface="Consolas"/>
+              </a:rPr>
+              <a:t>%</a:t>
+            </a:r>
+            <a:r>
+              <a:rPr lang="cs-CZ" altLang="zh-CN" b="1" dirty="0" err="1">
+                <a:latin typeface="Consolas"/>
+                <a:cs typeface="Consolas"/>
+              </a:rPr>
+              <a:t>esi</a:t>
+            </a:r>
+            <a:r>
+              <a:rPr lang="cs-CZ" altLang="zh-CN" b="1" dirty="0">
+                <a:latin typeface="Consolas"/>
+                <a:cs typeface="Consolas"/>
+              </a:rPr>
+              <a:t> </a:t>
+            </a:r>
+            <a:r>
+              <a:rPr lang="cs-CZ" altLang="zh-CN" dirty="0">
+                <a:latin typeface="Arial"/>
+                <a:cs typeface="Arial"/>
+              </a:rPr>
+              <a:t>has </a:t>
+            </a:r>
+            <a:r>
+              <a:rPr lang="cs-CZ" altLang="zh-CN" dirty="0" err="1">
+                <a:latin typeface="Arial"/>
+                <a:cs typeface="Arial"/>
+              </a:rPr>
+              <a:t>the</a:t>
+            </a:r>
+            <a:r>
+              <a:rPr lang="cs-CZ" altLang="zh-CN" dirty="0">
+                <a:latin typeface="Arial"/>
+                <a:cs typeface="Arial"/>
+              </a:rPr>
+              <a:t> </a:t>
+            </a:r>
+            <a:r>
+              <a:rPr lang="cs-CZ" altLang="zh-CN" dirty="0" err="1">
+                <a:latin typeface="Arial"/>
+                <a:cs typeface="Arial"/>
+              </a:rPr>
+              <a:t>value</a:t>
+            </a:r>
+            <a:r>
+              <a:rPr lang="cs-CZ" altLang="zh-CN" dirty="0">
+                <a:latin typeface="Arial"/>
+                <a:cs typeface="Arial"/>
+              </a:rPr>
+              <a:t> </a:t>
+            </a:r>
+            <a:r>
+              <a:rPr lang="cs-CZ" altLang="zh-CN" dirty="0" err="1">
+                <a:latin typeface="Arial"/>
+                <a:cs typeface="Arial"/>
+              </a:rPr>
+              <a:t>of</a:t>
+            </a:r>
+            <a:r>
+              <a:rPr lang="cs-CZ" altLang="zh-CN" dirty="0">
+                <a:latin typeface="Arial"/>
+                <a:cs typeface="Arial"/>
+              </a:rPr>
+              <a:t> n </a:t>
+            </a:r>
+            <a:endParaRPr lang="zh-CN" altLang="en-US" dirty="0">
+              <a:latin typeface="Arial"/>
+              <a:cs typeface="Arial"/>
+            </a:endParaRPr>
+          </a:p>
+        </p:txBody>
+      </p:sp>
     </p:spTree>
     <p:extLst>
       <p:ext uri="{BB962C8B-B14F-4D97-AF65-F5344CB8AC3E}">
-        <p14:creationId xmlns:p14="http://schemas.microsoft.com/office/powerpoint/2010/main" val="312581568"/>
+        <p14:creationId xmlns:p14="http://schemas.microsoft.com/office/powerpoint/2010/main" val="2892866968"/>
       </p:ext>
     </p:extLst>
   </p:cSld>
@@ -13426,6 +13631,887 @@
 </file>
 
 <file path=ppt/slides/slide20.xml><?xml version="1.0" encoding="utf-8"?>
+<p:sld xmlns:a="http://schemas.openxmlformats.org/drawingml/2006/main" xmlns:r="http://schemas.openxmlformats.org/officeDocument/2006/relationships" xmlns:p="http://schemas.openxmlformats.org/presentationml/2006/main">
+  <p:cSld>
+    <p:spTree>
+      <p:nvGrpSpPr>
+        <p:cNvPr id="1" name=""/>
+        <p:cNvGrpSpPr/>
+        <p:nvPr/>
+      </p:nvGrpSpPr>
+      <p:grpSpPr>
+        <a:xfrm>
+          <a:off x="0" y="0"/>
+          <a:ext cx="0" cy="0"/>
+          <a:chOff x="0" y="0"/>
+          <a:chExt cx="0" cy="0"/>
+        </a:xfrm>
+      </p:grpSpPr>
+      <p:sp>
+        <p:nvSpPr>
+          <p:cNvPr id="72706" name="Rectangle 3"/>
+          <p:cNvSpPr>
+            <a:spLocks noGrp="1" noChangeArrowheads="1"/>
+          </p:cNvSpPr>
+          <p:nvPr>
+            <p:ph type="title"/>
+          </p:nvPr>
+        </p:nvSpPr>
+        <p:spPr>
+          <a:xfrm>
+            <a:off x="304800" y="417513"/>
+            <a:ext cx="8382000" cy="573087"/>
+          </a:xfrm>
+        </p:spPr>
+        <p:txBody>
+          <a:bodyPr>
+            <a:normAutofit fontScale="90000"/>
+          </a:bodyPr>
+          <a:lstStyle/>
+          <a:p>
+            <a:r>
+              <a:rPr lang="en-US" dirty="0">
+                <a:latin typeface="Calibri" pitchFamily="-96" charset="0"/>
+              </a:rPr>
+              <a:t>Binary Puzzle 1</a:t>
+            </a:r>
+          </a:p>
+        </p:txBody>
+      </p:sp>
+      <p:sp>
+        <p:nvSpPr>
+          <p:cNvPr id="7" name="Rectangle 2"/>
+          <p:cNvSpPr>
+            <a:spLocks noChangeArrowheads="1"/>
+          </p:cNvSpPr>
+          <p:nvPr/>
+        </p:nvSpPr>
+        <p:spPr bwMode="auto">
+          <a:xfrm>
+            <a:off x="584446" y="1357298"/>
+            <a:ext cx="6651850" cy="920765"/>
+          </a:xfrm>
+          <a:prstGeom prst="rect">
+            <a:avLst/>
+          </a:prstGeom>
+          <a:solidFill>
+            <a:srgbClr val="F6F5BD"/>
+          </a:solidFill>
+          <a:ln w="12700">
+            <a:solidFill>
+              <a:schemeClr val="tx1"/>
+            </a:solidFill>
+            <a:miter lim="800000"/>
+            <a:headEnd/>
+            <a:tailEnd/>
+          </a:ln>
+        </p:spPr>
+        <p:txBody>
+          <a:bodyPr wrap="square" lIns="90487" tIns="44450" rIns="90487" bIns="44450">
+            <a:prstTxWarp prst="textNoShape">
+              <a:avLst/>
+            </a:prstTxWarp>
+            <a:spAutoFit/>
+          </a:bodyPr>
+          <a:lstStyle/>
+          <a:p>
+            <a:pPr eaLnBrk="0" hangingPunct="0"/>
+            <a:r>
+              <a:rPr lang="en-US" sz="1800" b="1" dirty="0">
+                <a:latin typeface="Courier New" pitchFamily="-96" charset="0"/>
+              </a:rPr>
+              <a:t>void mystery(</a:t>
+            </a:r>
+            <a:r>
+              <a:rPr lang="en-US" sz="1800" b="1" dirty="0" err="1">
+                <a:latin typeface="Courier New" pitchFamily="-96" charset="0"/>
+              </a:rPr>
+              <a:t>int</a:t>
+            </a:r>
+            <a:r>
+              <a:rPr lang="en-US" sz="1800" b="1" dirty="0">
+                <a:latin typeface="Courier New" pitchFamily="-96" charset="0"/>
+              </a:rPr>
+              <a:t> *</a:t>
+            </a:r>
+            <a:r>
+              <a:rPr lang="en-US" b="1" dirty="0" err="1">
+                <a:latin typeface="Courier New" pitchFamily="-96" charset="0"/>
+              </a:rPr>
+              <a:t>arr</a:t>
+            </a:r>
+            <a:r>
+              <a:rPr lang="en-US" b="1" dirty="0">
+                <a:latin typeface="Courier New" pitchFamily="-96" charset="0"/>
+              </a:rPr>
+              <a:t>, </a:t>
+            </a:r>
+            <a:r>
+              <a:rPr lang="en-US" b="1" dirty="0" err="1">
+                <a:latin typeface="Courier New" pitchFamily="-96" charset="0"/>
+              </a:rPr>
+              <a:t>int</a:t>
+            </a:r>
+            <a:r>
+              <a:rPr lang="en-US" b="1" dirty="0">
+                <a:latin typeface="Courier New" pitchFamily="-96" charset="0"/>
+              </a:rPr>
+              <a:t> n</a:t>
+            </a:r>
+            <a:r>
+              <a:rPr lang="en-US" sz="1800" b="1" dirty="0">
+                <a:latin typeface="Courier New" pitchFamily="-96" charset="0"/>
+              </a:rPr>
+              <a:t>) {</a:t>
+            </a:r>
+          </a:p>
+          <a:p>
+            <a:pPr eaLnBrk="0" hangingPunct="0"/>
+            <a:r>
+              <a:rPr lang="en-US" sz="1800" b="1" dirty="0">
+                <a:latin typeface="Courier New" pitchFamily="-96" charset="0"/>
+              </a:rPr>
+              <a:t>   </a:t>
+            </a:r>
+            <a:r>
+              <a:rPr lang="en-US" sz="1800" b="1" dirty="0">
+                <a:solidFill>
+                  <a:srgbClr val="FF0000"/>
+                </a:solidFill>
+                <a:latin typeface="Courier New" pitchFamily="-96" charset="0"/>
+              </a:rPr>
+              <a:t>???</a:t>
+            </a:r>
+          </a:p>
+          <a:p>
+            <a:pPr eaLnBrk="0" hangingPunct="0"/>
+            <a:r>
+              <a:rPr lang="en-US" sz="1800" b="1" dirty="0">
+                <a:latin typeface="Courier New" pitchFamily="-96" charset="0"/>
+              </a:rPr>
+              <a:t>}</a:t>
+            </a:r>
+          </a:p>
+        </p:txBody>
+      </p:sp>
+      <p:sp>
+        <p:nvSpPr>
+          <p:cNvPr id="5" name="Rectangle 2"/>
+          <p:cNvSpPr>
+            <a:spLocks noChangeArrowheads="1"/>
+          </p:cNvSpPr>
+          <p:nvPr/>
+        </p:nvSpPr>
+        <p:spPr bwMode="auto">
+          <a:xfrm>
+            <a:off x="4950534" y="2441118"/>
+            <a:ext cx="4081175" cy="920765"/>
+          </a:xfrm>
+          <a:prstGeom prst="rect">
+            <a:avLst/>
+          </a:prstGeom>
+          <a:solidFill>
+            <a:schemeClr val="bg1"/>
+          </a:solidFill>
+          <a:ln w="12700">
+            <a:solidFill>
+              <a:schemeClr val="tx1"/>
+            </a:solidFill>
+            <a:miter lim="800000"/>
+            <a:headEnd/>
+            <a:tailEnd/>
+          </a:ln>
+          <a:effectLst/>
+        </p:spPr>
+        <p:txBody>
+          <a:bodyPr wrap="square" lIns="90487" tIns="44450" rIns="90487" bIns="44450">
+            <a:spAutoFit/>
+          </a:bodyPr>
+          <a:lstStyle/>
+          <a:p>
+            <a:pPr eaLnBrk="0" hangingPunct="0">
+              <a:tabLst>
+                <a:tab pos="342900" algn="l"/>
+                <a:tab pos="1147763" algn="l"/>
+                <a:tab pos="3657600" algn="l"/>
+              </a:tabLst>
+              <a:defRPr/>
+            </a:pPr>
+            <a:r>
+              <a:rPr lang="cs-CZ" sz="1800" b="1" dirty="0">
+                <a:latin typeface="Courier New" pitchFamily="49" charset="0"/>
+                <a:ea typeface="+mn-ea"/>
+                <a:cs typeface="+mn-cs"/>
+              </a:rPr>
+              <a:t>  a = 0;         </a:t>
+            </a:r>
+          </a:p>
+          <a:p>
+            <a:pPr eaLnBrk="0" hangingPunct="0">
+              <a:tabLst>
+                <a:tab pos="342900" algn="l"/>
+                <a:tab pos="1147763" algn="l"/>
+                <a:tab pos="3657600" algn="l"/>
+              </a:tabLst>
+              <a:defRPr/>
+            </a:pPr>
+            <a:r>
+              <a:rPr lang="cs-CZ" sz="1800" b="1" dirty="0">
+                <a:latin typeface="Courier New" pitchFamily="49" charset="0"/>
+                <a:ea typeface="+mn-ea"/>
+                <a:cs typeface="+mn-cs"/>
+              </a:rPr>
+              <a:t>  </a:t>
+            </a:r>
+            <a:r>
+              <a:rPr lang="cs-CZ" sz="1800" b="1" dirty="0" err="1">
+                <a:latin typeface="Courier New" pitchFamily="49" charset="0"/>
+                <a:ea typeface="+mn-ea"/>
+                <a:cs typeface="+mn-cs"/>
+              </a:rPr>
+              <a:t>goto</a:t>
+            </a:r>
+            <a:r>
+              <a:rPr lang="cs-CZ" sz="1800" b="1" dirty="0">
+                <a:latin typeface="Courier New" pitchFamily="49" charset="0"/>
+                <a:ea typeface="+mn-ea"/>
+                <a:cs typeface="+mn-cs"/>
+              </a:rPr>
+              <a:t> .L3            </a:t>
+            </a:r>
+          </a:p>
+          <a:p>
+            <a:pPr eaLnBrk="0" hangingPunct="0">
+              <a:tabLst>
+                <a:tab pos="342900" algn="l"/>
+                <a:tab pos="1147763" algn="l"/>
+                <a:tab pos="3657600" algn="l"/>
+              </a:tabLst>
+              <a:defRPr/>
+            </a:pPr>
+            <a:endParaRPr lang="cs-CZ" sz="1800" b="1" dirty="0">
+              <a:latin typeface="Courier New" pitchFamily="49" charset="0"/>
+              <a:ea typeface="+mn-ea"/>
+              <a:cs typeface="+mn-cs"/>
+            </a:endParaRPr>
+          </a:p>
+        </p:txBody>
+      </p:sp>
+      <p:sp>
+        <p:nvSpPr>
+          <p:cNvPr id="2" name="矩形 1"/>
+          <p:cNvSpPr/>
+          <p:nvPr/>
+        </p:nvSpPr>
+        <p:spPr>
+          <a:xfrm>
+            <a:off x="584446" y="5511540"/>
+            <a:ext cx="2853328" cy="646331"/>
+          </a:xfrm>
+          <a:prstGeom prst="rect">
+            <a:avLst/>
+          </a:prstGeom>
+        </p:spPr>
+        <p:txBody>
+          <a:bodyPr wrap="none">
+            <a:spAutoFit/>
+          </a:bodyPr>
+          <a:lstStyle/>
+          <a:p>
+            <a:r>
+              <a:rPr lang="cs-CZ" altLang="zh-CN" b="1" dirty="0">
+                <a:latin typeface="Consolas"/>
+                <a:cs typeface="Consolas"/>
+              </a:rPr>
+              <a:t>%rdi </a:t>
+            </a:r>
+            <a:r>
+              <a:rPr lang="cs-CZ" altLang="zh-CN" dirty="0">
+                <a:latin typeface="Arial"/>
+                <a:cs typeface="Arial"/>
+              </a:rPr>
+              <a:t>has </a:t>
+            </a:r>
+            <a:r>
+              <a:rPr lang="cs-CZ" altLang="zh-CN" dirty="0" err="1">
+                <a:latin typeface="Arial"/>
+                <a:cs typeface="Arial"/>
+              </a:rPr>
+              <a:t>the</a:t>
+            </a:r>
+            <a:r>
+              <a:rPr lang="cs-CZ" altLang="zh-CN" dirty="0">
+                <a:latin typeface="Arial"/>
+                <a:cs typeface="Arial"/>
+              </a:rPr>
+              <a:t> </a:t>
+            </a:r>
+            <a:r>
+              <a:rPr lang="cs-CZ" altLang="zh-CN" dirty="0" err="1">
+                <a:latin typeface="Arial"/>
+                <a:cs typeface="Arial"/>
+              </a:rPr>
+              <a:t>value</a:t>
+            </a:r>
+            <a:r>
+              <a:rPr lang="cs-CZ" altLang="zh-CN" dirty="0">
+                <a:latin typeface="Arial"/>
+                <a:cs typeface="Arial"/>
+              </a:rPr>
+              <a:t> </a:t>
+            </a:r>
+            <a:r>
+              <a:rPr lang="cs-CZ" altLang="zh-CN" dirty="0" err="1">
+                <a:latin typeface="Arial"/>
+                <a:cs typeface="Arial"/>
+              </a:rPr>
+              <a:t>of</a:t>
+            </a:r>
+            <a:r>
+              <a:rPr lang="cs-CZ" altLang="zh-CN" dirty="0">
+                <a:latin typeface="Arial"/>
+                <a:cs typeface="Arial"/>
+              </a:rPr>
+              <a:t> </a:t>
+            </a:r>
+            <a:r>
+              <a:rPr lang="cs-CZ" altLang="zh-CN" dirty="0" err="1">
+                <a:latin typeface="Arial"/>
+                <a:cs typeface="Arial"/>
+              </a:rPr>
+              <a:t>arr</a:t>
+            </a:r>
+            <a:endParaRPr lang="cs-CZ" altLang="zh-CN" dirty="0">
+              <a:latin typeface="Arial"/>
+              <a:cs typeface="Arial"/>
+            </a:endParaRPr>
+          </a:p>
+          <a:p>
+            <a:r>
+              <a:rPr lang="cs-CZ" altLang="zh-CN" b="1" dirty="0">
+                <a:latin typeface="Consolas"/>
+                <a:cs typeface="Consolas"/>
+              </a:rPr>
+              <a:t>%</a:t>
+            </a:r>
+            <a:r>
+              <a:rPr lang="cs-CZ" altLang="zh-CN" b="1" dirty="0" err="1">
+                <a:latin typeface="Consolas"/>
+                <a:cs typeface="Consolas"/>
+              </a:rPr>
+              <a:t>esi</a:t>
+            </a:r>
+            <a:r>
+              <a:rPr lang="cs-CZ" altLang="zh-CN" b="1" dirty="0">
+                <a:latin typeface="Consolas"/>
+                <a:cs typeface="Consolas"/>
+              </a:rPr>
+              <a:t> </a:t>
+            </a:r>
+            <a:r>
+              <a:rPr lang="cs-CZ" altLang="zh-CN" dirty="0">
+                <a:latin typeface="Arial"/>
+                <a:cs typeface="Arial"/>
+              </a:rPr>
+              <a:t>has </a:t>
+            </a:r>
+            <a:r>
+              <a:rPr lang="cs-CZ" altLang="zh-CN" dirty="0" err="1">
+                <a:latin typeface="Arial"/>
+                <a:cs typeface="Arial"/>
+              </a:rPr>
+              <a:t>the</a:t>
+            </a:r>
+            <a:r>
+              <a:rPr lang="cs-CZ" altLang="zh-CN" dirty="0">
+                <a:latin typeface="Arial"/>
+                <a:cs typeface="Arial"/>
+              </a:rPr>
+              <a:t> </a:t>
+            </a:r>
+            <a:r>
+              <a:rPr lang="cs-CZ" altLang="zh-CN" dirty="0" err="1">
+                <a:latin typeface="Arial"/>
+                <a:cs typeface="Arial"/>
+              </a:rPr>
+              <a:t>value</a:t>
+            </a:r>
+            <a:r>
+              <a:rPr lang="cs-CZ" altLang="zh-CN" dirty="0">
+                <a:latin typeface="Arial"/>
+                <a:cs typeface="Arial"/>
+              </a:rPr>
+              <a:t> </a:t>
+            </a:r>
+            <a:r>
+              <a:rPr lang="cs-CZ" altLang="zh-CN" dirty="0" err="1">
+                <a:latin typeface="Arial"/>
+                <a:cs typeface="Arial"/>
+              </a:rPr>
+              <a:t>of</a:t>
+            </a:r>
+            <a:r>
+              <a:rPr lang="cs-CZ" altLang="zh-CN" dirty="0">
+                <a:latin typeface="Arial"/>
+                <a:cs typeface="Arial"/>
+              </a:rPr>
+              <a:t> n </a:t>
+            </a:r>
+            <a:endParaRPr lang="zh-CN" altLang="en-US" dirty="0">
+              <a:latin typeface="Arial"/>
+              <a:cs typeface="Arial"/>
+            </a:endParaRPr>
+          </a:p>
+        </p:txBody>
+      </p:sp>
+      <p:sp>
+        <p:nvSpPr>
+          <p:cNvPr id="8" name="Rectangle 2"/>
+          <p:cNvSpPr>
+            <a:spLocks noChangeArrowheads="1"/>
+          </p:cNvSpPr>
+          <p:nvPr/>
+        </p:nvSpPr>
+        <p:spPr bwMode="auto">
+          <a:xfrm>
+            <a:off x="584446" y="2441118"/>
+            <a:ext cx="4081175" cy="2859758"/>
+          </a:xfrm>
+          <a:prstGeom prst="rect">
+            <a:avLst/>
+          </a:prstGeom>
+          <a:solidFill>
+            <a:schemeClr val="bg1"/>
+          </a:solidFill>
+          <a:ln w="12700">
+            <a:solidFill>
+              <a:schemeClr val="tx1"/>
+            </a:solidFill>
+            <a:miter lim="800000"/>
+            <a:headEnd/>
+            <a:tailEnd/>
+          </a:ln>
+          <a:effectLst/>
+        </p:spPr>
+        <p:txBody>
+          <a:bodyPr wrap="square" lIns="90487" tIns="44450" rIns="90487" bIns="44450">
+            <a:spAutoFit/>
+          </a:bodyPr>
+          <a:lstStyle/>
+          <a:p>
+            <a:pPr eaLnBrk="0" hangingPunct="0">
+              <a:tabLst>
+                <a:tab pos="342900" algn="l"/>
+                <a:tab pos="1147763" algn="l"/>
+                <a:tab pos="3657600" algn="l"/>
+              </a:tabLst>
+              <a:defRPr/>
+            </a:pPr>
+            <a:r>
+              <a:rPr lang="cs-CZ" sz="1800" b="1" dirty="0">
+                <a:latin typeface="Courier New" pitchFamily="49" charset="0"/>
+                <a:ea typeface="+mn-ea"/>
+                <a:cs typeface="+mn-cs"/>
+              </a:rPr>
+              <a:t>  </a:t>
+            </a:r>
+            <a:r>
+              <a:rPr lang="cs-CZ" sz="1800" b="1" dirty="0" err="1">
+                <a:latin typeface="Courier New" pitchFamily="49" charset="0"/>
+                <a:ea typeface="+mn-ea"/>
+                <a:cs typeface="+mn-cs"/>
+              </a:rPr>
+              <a:t>movl</a:t>
+            </a:r>
+            <a:r>
+              <a:rPr lang="cs-CZ" sz="1800" b="1" dirty="0">
+                <a:latin typeface="Courier New" pitchFamily="49" charset="0"/>
+                <a:ea typeface="+mn-ea"/>
+                <a:cs typeface="+mn-cs"/>
+              </a:rPr>
+              <a:t> $0, %</a:t>
+            </a:r>
+            <a:r>
+              <a:rPr lang="cs-CZ" b="1" dirty="0" err="1">
+                <a:latin typeface="Courier New" pitchFamily="49" charset="0"/>
+              </a:rPr>
+              <a:t>e</a:t>
+            </a:r>
+            <a:r>
+              <a:rPr lang="cs-CZ" sz="1800" b="1" dirty="0" err="1">
+                <a:latin typeface="Courier New" pitchFamily="49" charset="0"/>
+                <a:ea typeface="+mn-ea"/>
+                <a:cs typeface="+mn-cs"/>
+              </a:rPr>
+              <a:t>ax</a:t>
+            </a:r>
+            <a:r>
+              <a:rPr lang="cs-CZ" sz="1800" b="1" dirty="0">
+                <a:latin typeface="Courier New" pitchFamily="49" charset="0"/>
+                <a:ea typeface="+mn-ea"/>
+                <a:cs typeface="+mn-cs"/>
+              </a:rPr>
+              <a:t>         </a:t>
+            </a:r>
+          </a:p>
+          <a:p>
+            <a:pPr eaLnBrk="0" hangingPunct="0">
+              <a:tabLst>
+                <a:tab pos="342900" algn="l"/>
+                <a:tab pos="1147763" algn="l"/>
+                <a:tab pos="3657600" algn="l"/>
+              </a:tabLst>
+              <a:defRPr/>
+            </a:pPr>
+            <a:r>
+              <a:rPr lang="cs-CZ" sz="1800" b="1" dirty="0">
+                <a:latin typeface="Courier New" pitchFamily="49" charset="0"/>
+                <a:ea typeface="+mn-ea"/>
+                <a:cs typeface="+mn-cs"/>
+              </a:rPr>
+              <a:t>  </a:t>
+            </a:r>
+            <a:r>
+              <a:rPr lang="cs-CZ" sz="1800" b="1" dirty="0" err="1">
+                <a:latin typeface="Courier New" pitchFamily="49" charset="0"/>
+                <a:ea typeface="+mn-ea"/>
+                <a:cs typeface="+mn-cs"/>
+              </a:rPr>
+              <a:t>jmp</a:t>
+            </a:r>
+            <a:r>
+              <a:rPr lang="cs-CZ" sz="1800" b="1" dirty="0">
+                <a:latin typeface="Courier New" pitchFamily="49" charset="0"/>
+                <a:ea typeface="+mn-ea"/>
+                <a:cs typeface="+mn-cs"/>
+              </a:rPr>
+              <a:t>  .L3              </a:t>
+            </a:r>
+          </a:p>
+          <a:p>
+            <a:pPr eaLnBrk="0" hangingPunct="0">
+              <a:tabLst>
+                <a:tab pos="342900" algn="l"/>
+                <a:tab pos="1147763" algn="l"/>
+                <a:tab pos="3657600" algn="l"/>
+              </a:tabLst>
+              <a:defRPr/>
+            </a:pPr>
+            <a:r>
+              <a:rPr lang="cs-CZ" sz="1800" b="1" dirty="0">
+                <a:latin typeface="Courier New" pitchFamily="49" charset="0"/>
+                <a:ea typeface="+mn-ea"/>
+                <a:cs typeface="+mn-cs"/>
+              </a:rPr>
+              <a:t>.L4:  </a:t>
+            </a:r>
+          </a:p>
+          <a:p>
+            <a:pPr eaLnBrk="0" hangingPunct="0">
+              <a:tabLst>
+                <a:tab pos="342900" algn="l"/>
+                <a:tab pos="1147763" algn="l"/>
+                <a:tab pos="3657600" algn="l"/>
+              </a:tabLst>
+              <a:defRPr/>
+            </a:pPr>
+            <a:r>
+              <a:rPr lang="cs-CZ" b="1" dirty="0">
+                <a:latin typeface="Courier New" pitchFamily="49" charset="0"/>
+              </a:rPr>
+              <a:t>  </a:t>
+            </a:r>
+            <a:r>
+              <a:rPr lang="cs-CZ" b="1" dirty="0" err="1">
+                <a:latin typeface="Courier New" pitchFamily="49" charset="0"/>
+              </a:rPr>
+              <a:t>movslq</a:t>
+            </a:r>
+            <a:r>
+              <a:rPr lang="cs-CZ" b="1" dirty="0">
+                <a:latin typeface="Courier New" pitchFamily="49" charset="0"/>
+              </a:rPr>
+              <a:t> %</a:t>
+            </a:r>
+            <a:r>
+              <a:rPr lang="cs-CZ" b="1" dirty="0" err="1">
+                <a:latin typeface="Courier New" pitchFamily="49" charset="0"/>
+              </a:rPr>
+              <a:t>eax</a:t>
+            </a:r>
+            <a:r>
+              <a:rPr lang="cs-CZ" b="1" dirty="0">
+                <a:latin typeface="Courier New" pitchFamily="49" charset="0"/>
+              </a:rPr>
+              <a:t>, %</a:t>
+            </a:r>
+            <a:r>
+              <a:rPr lang="cs-CZ" b="1" dirty="0" err="1">
+                <a:latin typeface="Courier New" pitchFamily="49" charset="0"/>
+              </a:rPr>
+              <a:t>rdx</a:t>
+            </a:r>
+            <a:r>
+              <a:rPr lang="cs-CZ" sz="1800" b="1" dirty="0">
+                <a:latin typeface="Courier New" pitchFamily="49" charset="0"/>
+                <a:ea typeface="+mn-ea"/>
+                <a:cs typeface="+mn-cs"/>
+              </a:rPr>
+              <a:t>                      </a:t>
+            </a:r>
+          </a:p>
+          <a:p>
+            <a:pPr eaLnBrk="0" hangingPunct="0">
+              <a:tabLst>
+                <a:tab pos="342900" algn="l"/>
+                <a:tab pos="1147763" algn="l"/>
+                <a:tab pos="3657600" algn="l"/>
+              </a:tabLst>
+              <a:defRPr/>
+            </a:pPr>
+            <a:r>
+              <a:rPr lang="cs-CZ" sz="1800" b="1" dirty="0">
+                <a:latin typeface="Courier New" pitchFamily="49" charset="0"/>
+                <a:ea typeface="+mn-ea"/>
+                <a:cs typeface="+mn-cs"/>
+              </a:rPr>
+              <a:t>  </a:t>
+            </a:r>
+            <a:r>
+              <a:rPr lang="cs-CZ" sz="1800" b="1" dirty="0" err="1">
+                <a:latin typeface="Courier New" pitchFamily="49" charset="0"/>
+                <a:ea typeface="+mn-ea"/>
+                <a:cs typeface="+mn-cs"/>
+              </a:rPr>
+              <a:t>addl</a:t>
+            </a:r>
+            <a:r>
+              <a:rPr lang="cs-CZ" sz="1800" b="1" dirty="0">
+                <a:latin typeface="Courier New" pitchFamily="49" charset="0"/>
+                <a:ea typeface="+mn-ea"/>
+                <a:cs typeface="+mn-cs"/>
+              </a:rPr>
+              <a:t> $1, (%rdi,%rdx,4) </a:t>
+            </a:r>
+          </a:p>
+          <a:p>
+            <a:pPr eaLnBrk="0" hangingPunct="0">
+              <a:tabLst>
+                <a:tab pos="342900" algn="l"/>
+                <a:tab pos="1147763" algn="l"/>
+                <a:tab pos="3657600" algn="l"/>
+              </a:tabLst>
+              <a:defRPr/>
+            </a:pPr>
+            <a:r>
+              <a:rPr lang="cs-CZ" sz="1800" b="1" dirty="0">
+                <a:latin typeface="Courier New" pitchFamily="49" charset="0"/>
+                <a:ea typeface="+mn-ea"/>
+                <a:cs typeface="+mn-cs"/>
+              </a:rPr>
+              <a:t>  </a:t>
+            </a:r>
+            <a:r>
+              <a:rPr lang="cs-CZ" sz="1800" b="1" dirty="0" err="1">
+                <a:latin typeface="Courier New" pitchFamily="49" charset="0"/>
+                <a:ea typeface="+mn-ea"/>
+                <a:cs typeface="+mn-cs"/>
+              </a:rPr>
+              <a:t>addl</a:t>
+            </a:r>
+            <a:r>
+              <a:rPr lang="cs-CZ" sz="1800" b="1" dirty="0">
+                <a:latin typeface="Courier New" pitchFamily="49" charset="0"/>
+                <a:ea typeface="+mn-ea"/>
+                <a:cs typeface="+mn-cs"/>
+              </a:rPr>
+              <a:t> $1, %</a:t>
+            </a:r>
+            <a:r>
+              <a:rPr lang="cs-CZ" b="1" dirty="0" err="1">
+                <a:latin typeface="Courier New" pitchFamily="49" charset="0"/>
+              </a:rPr>
+              <a:t>e</a:t>
+            </a:r>
+            <a:r>
+              <a:rPr lang="cs-CZ" sz="1800" b="1" dirty="0" err="1">
+                <a:latin typeface="Courier New" pitchFamily="49" charset="0"/>
+                <a:ea typeface="+mn-ea"/>
+                <a:cs typeface="+mn-cs"/>
+              </a:rPr>
+              <a:t>ax</a:t>
+            </a:r>
+            <a:r>
+              <a:rPr lang="cs-CZ" sz="1800" b="1" dirty="0">
+                <a:latin typeface="Courier New" pitchFamily="49" charset="0"/>
+                <a:ea typeface="+mn-ea"/>
+                <a:cs typeface="+mn-cs"/>
+              </a:rPr>
+              <a:t>          </a:t>
+            </a:r>
+          </a:p>
+          <a:p>
+            <a:pPr eaLnBrk="0" hangingPunct="0">
+              <a:tabLst>
+                <a:tab pos="342900" algn="l"/>
+                <a:tab pos="1147763" algn="l"/>
+                <a:tab pos="3657600" algn="l"/>
+              </a:tabLst>
+              <a:defRPr/>
+            </a:pPr>
+            <a:r>
+              <a:rPr lang="cs-CZ" sz="1800" b="1" dirty="0">
+                <a:latin typeface="Courier New" pitchFamily="49" charset="0"/>
+                <a:ea typeface="+mn-ea"/>
+                <a:cs typeface="+mn-cs"/>
+              </a:rPr>
+              <a:t>.L3:                        </a:t>
+            </a:r>
+          </a:p>
+          <a:p>
+            <a:pPr eaLnBrk="0" hangingPunct="0">
+              <a:tabLst>
+                <a:tab pos="342900" algn="l"/>
+                <a:tab pos="1147763" algn="l"/>
+                <a:tab pos="3657600" algn="l"/>
+              </a:tabLst>
+              <a:defRPr/>
+            </a:pPr>
+            <a:r>
+              <a:rPr lang="cs-CZ" sz="1800" b="1" dirty="0">
+                <a:latin typeface="Courier New" pitchFamily="49" charset="0"/>
+                <a:ea typeface="+mn-ea"/>
+                <a:cs typeface="+mn-cs"/>
+              </a:rPr>
+              <a:t>  </a:t>
+            </a:r>
+            <a:r>
+              <a:rPr lang="cs-CZ" sz="1800" b="1" dirty="0" err="1">
+                <a:latin typeface="Courier New" pitchFamily="49" charset="0"/>
+                <a:ea typeface="+mn-ea"/>
+                <a:cs typeface="+mn-cs"/>
+              </a:rPr>
+              <a:t>cmpl</a:t>
+            </a:r>
+            <a:r>
+              <a:rPr lang="cs-CZ" sz="1800" b="1" dirty="0">
+                <a:latin typeface="Courier New" pitchFamily="49" charset="0"/>
+                <a:ea typeface="+mn-ea"/>
+                <a:cs typeface="+mn-cs"/>
+              </a:rPr>
+              <a:t> %</a:t>
+            </a:r>
+            <a:r>
+              <a:rPr lang="cs-CZ" b="1" dirty="0" err="1">
+                <a:latin typeface="Courier New" pitchFamily="49" charset="0"/>
+              </a:rPr>
+              <a:t>esi</a:t>
+            </a:r>
+            <a:r>
+              <a:rPr lang="cs-CZ" sz="1800" b="1" dirty="0">
+                <a:latin typeface="Courier New" pitchFamily="49" charset="0"/>
+                <a:ea typeface="+mn-ea"/>
+                <a:cs typeface="+mn-cs"/>
+              </a:rPr>
+              <a:t>, %</a:t>
+            </a:r>
+            <a:r>
+              <a:rPr lang="cs-CZ" b="1" dirty="0" err="1">
+                <a:latin typeface="Courier New" pitchFamily="49" charset="0"/>
+              </a:rPr>
+              <a:t>e</a:t>
+            </a:r>
+            <a:r>
+              <a:rPr lang="cs-CZ" sz="1800" b="1" dirty="0" err="1">
+                <a:latin typeface="Courier New" pitchFamily="49" charset="0"/>
+                <a:ea typeface="+mn-ea"/>
+                <a:cs typeface="+mn-cs"/>
+              </a:rPr>
+              <a:t>ax</a:t>
+            </a:r>
+            <a:r>
+              <a:rPr lang="cs-CZ" sz="1800" b="1" dirty="0">
+                <a:latin typeface="Courier New" pitchFamily="49" charset="0"/>
+                <a:ea typeface="+mn-ea"/>
+                <a:cs typeface="+mn-cs"/>
+              </a:rPr>
+              <a:t>          </a:t>
+            </a:r>
+          </a:p>
+          <a:p>
+            <a:pPr eaLnBrk="0" hangingPunct="0">
+              <a:tabLst>
+                <a:tab pos="342900" algn="l"/>
+                <a:tab pos="1147763" algn="l"/>
+                <a:tab pos="3657600" algn="l"/>
+              </a:tabLst>
+              <a:defRPr/>
+            </a:pPr>
+            <a:r>
+              <a:rPr lang="cs-CZ" sz="1800" b="1" dirty="0">
+                <a:latin typeface="Courier New" pitchFamily="49" charset="0"/>
+                <a:ea typeface="+mn-ea"/>
+                <a:cs typeface="+mn-cs"/>
+              </a:rPr>
+              <a:t>  </a:t>
+            </a:r>
+            <a:r>
+              <a:rPr lang="cs-CZ" sz="1800" b="1" dirty="0" err="1">
+                <a:latin typeface="Courier New" pitchFamily="49" charset="0"/>
+                <a:ea typeface="+mn-ea"/>
+                <a:cs typeface="+mn-cs"/>
+              </a:rPr>
+              <a:t>jl</a:t>
+            </a:r>
+            <a:r>
+              <a:rPr lang="cs-CZ" sz="1800" b="1" dirty="0">
+                <a:latin typeface="Courier New" pitchFamily="49" charset="0"/>
+                <a:ea typeface="+mn-ea"/>
+                <a:cs typeface="+mn-cs"/>
+              </a:rPr>
+              <a:t>  .L4               </a:t>
+            </a:r>
+          </a:p>
+          <a:p>
+            <a:pPr eaLnBrk="0" hangingPunct="0">
+              <a:tabLst>
+                <a:tab pos="342900" algn="l"/>
+                <a:tab pos="1147763" algn="l"/>
+                <a:tab pos="3657600" algn="l"/>
+              </a:tabLst>
+              <a:defRPr/>
+            </a:pPr>
+            <a:r>
+              <a:rPr lang="cs-CZ" b="1" dirty="0">
+                <a:latin typeface="Courier New" pitchFamily="49" charset="0"/>
+              </a:rPr>
+              <a:t>  </a:t>
+            </a:r>
+            <a:r>
+              <a:rPr lang="cs-CZ" sz="1800" b="1" dirty="0">
+                <a:latin typeface="Courier New" pitchFamily="49" charset="0"/>
+                <a:ea typeface="+mn-ea"/>
+                <a:cs typeface="+mn-cs"/>
+              </a:rPr>
+              <a:t>ret</a:t>
+            </a:r>
+          </a:p>
+        </p:txBody>
+      </p:sp>
+    </p:spTree>
+    <p:extLst>
+      <p:ext uri="{BB962C8B-B14F-4D97-AF65-F5344CB8AC3E}">
+        <p14:creationId xmlns:p14="http://schemas.microsoft.com/office/powerpoint/2010/main" val="312581568"/>
+      </p:ext>
+    </p:extLst>
+  </p:cSld>
+  <p:clrMapOvr>
+    <a:masterClrMapping/>
+  </p:clrMapOvr>
+</p:sld>
+</file>
+
+<file path=ppt/slides/slide21.xml><?xml version="1.0" encoding="utf-8"?>
 <p:sld xmlns:a="http://schemas.openxmlformats.org/drawingml/2006/main" xmlns:r="http://schemas.openxmlformats.org/officeDocument/2006/relationships" xmlns:p="http://schemas.openxmlformats.org/presentationml/2006/main">
   <p:cSld>
     <p:spTree>
@@ -14619,7 +15705,7 @@
 </p:sld>
 </file>
 
-<file path=ppt/slides/slide21.xml><?xml version="1.0" encoding="utf-8"?>
+<file path=ppt/slides/slide22.xml><?xml version="1.0" encoding="utf-8"?>
 <p:sld xmlns:a="http://schemas.openxmlformats.org/drawingml/2006/main" xmlns:r="http://schemas.openxmlformats.org/officeDocument/2006/relationships" xmlns:p="http://schemas.openxmlformats.org/presentationml/2006/main">
   <p:cSld>
     <p:spTree>
@@ -15853,7 +16939,7 @@
 </p:sld>
 </file>
 
-<file path=ppt/slides/slide22.xml><?xml version="1.0" encoding="utf-8"?>
+<file path=ppt/slides/slide23.xml><?xml version="1.0" encoding="utf-8"?>
 <p:sld xmlns:a="http://schemas.openxmlformats.org/drawingml/2006/main" xmlns:r="http://schemas.openxmlformats.org/officeDocument/2006/relationships" xmlns:p="http://schemas.openxmlformats.org/presentationml/2006/main">
   <p:cSld>
     <p:spTree>
@@ -17285,7 +18371,7 @@
 </p:sld>
 </file>
 
-<file path=ppt/slides/slide23.xml><?xml version="1.0" encoding="utf-8"?>
+<file path=ppt/slides/slide24.xml><?xml version="1.0" encoding="utf-8"?>
 <p:sld xmlns:a="http://schemas.openxmlformats.org/drawingml/2006/main" xmlns:r="http://schemas.openxmlformats.org/officeDocument/2006/relationships" xmlns:p="http://schemas.openxmlformats.org/presentationml/2006/main" show="0">
   <p:cSld>
     <p:spTree>
@@ -19229,7 +20315,7 @@
 </p:sld>
 </file>
 
-<file path=ppt/slides/slide24.xml><?xml version="1.0" encoding="utf-8"?>
+<file path=ppt/slides/slide25.xml><?xml version="1.0" encoding="utf-8"?>
 <p:sld xmlns:a="http://schemas.openxmlformats.org/drawingml/2006/main" xmlns:r="http://schemas.openxmlformats.org/officeDocument/2006/relationships" xmlns:p="http://schemas.openxmlformats.org/presentationml/2006/main" show="0">
   <p:cSld>
     <p:spTree>
@@ -20489,7 +21575,7 @@
 </p:sld>
 </file>
 
-<file path=ppt/slides/slide25.xml><?xml version="1.0" encoding="utf-8"?>
+<file path=ppt/slides/slide26.xml><?xml version="1.0" encoding="utf-8"?>
 <p:sld xmlns:a="http://schemas.openxmlformats.org/drawingml/2006/main" xmlns:r="http://schemas.openxmlformats.org/officeDocument/2006/relationships" xmlns:p="http://schemas.openxmlformats.org/presentationml/2006/main" show="0">
   <p:cSld>
     <p:spTree>
@@ -21377,7 +22463,7 @@
 </p:sld>
 </file>
 
-<file path=ppt/slides/slide26.xml><?xml version="1.0" encoding="utf-8"?>
+<file path=ppt/slides/slide27.xml><?xml version="1.0" encoding="utf-8"?>
 <p:sld xmlns:a="http://schemas.openxmlformats.org/drawingml/2006/main" xmlns:r="http://schemas.openxmlformats.org/officeDocument/2006/relationships" xmlns:p="http://schemas.openxmlformats.org/presentationml/2006/main">
   <p:cSld>
     <p:spTree>
@@ -21793,472 +22879,6 @@
     <p:extLst>
       <p:ext uri="{BB962C8B-B14F-4D97-AF65-F5344CB8AC3E}">
         <p14:creationId xmlns:p14="http://schemas.microsoft.com/office/powerpoint/2010/main" val="601012274"/>
-      </p:ext>
-    </p:extLst>
-  </p:cSld>
-  <p:clrMapOvr>
-    <a:masterClrMapping/>
-  </p:clrMapOvr>
-</p:sld>
-</file>
-
-<file path=ppt/slides/slide27.xml><?xml version="1.0" encoding="utf-8"?>
-<p:sld xmlns:a="http://schemas.openxmlformats.org/drawingml/2006/main" xmlns:r="http://schemas.openxmlformats.org/officeDocument/2006/relationships" xmlns:p="http://schemas.openxmlformats.org/presentationml/2006/main">
-  <p:cSld>
-    <p:spTree>
-      <p:nvGrpSpPr>
-        <p:cNvPr id="1" name=""/>
-        <p:cNvGrpSpPr/>
-        <p:nvPr/>
-      </p:nvGrpSpPr>
-      <p:grpSpPr>
-        <a:xfrm>
-          <a:off x="0" y="0"/>
-          <a:ext cx="0" cy="0"/>
-          <a:chOff x="0" y="0"/>
-          <a:chExt cx="0" cy="0"/>
-        </a:xfrm>
-      </p:grpSpPr>
-      <p:sp>
-        <p:nvSpPr>
-          <p:cNvPr id="23553" name="Title 1"/>
-          <p:cNvSpPr>
-            <a:spLocks noGrp="1"/>
-          </p:cNvSpPr>
-          <p:nvPr>
-            <p:ph type="title"/>
-          </p:nvPr>
-        </p:nvSpPr>
-        <p:spPr>
-          <a:xfrm>
-            <a:off x="357188" y="457200"/>
-            <a:ext cx="7591425" cy="762000"/>
-          </a:xfrm>
-        </p:spPr>
-        <p:txBody>
-          <a:bodyPr/>
-          <a:lstStyle/>
-          <a:p>
-            <a:r>
-              <a:rPr lang="en-US" dirty="0">
-                <a:latin typeface="Calibri" pitchFamily="-96" charset="0"/>
-              </a:rPr>
-              <a:t>Binary puzzle 2</a:t>
-            </a:r>
-          </a:p>
-        </p:txBody>
-      </p:sp>
-      <p:sp>
-        <p:nvSpPr>
-          <p:cNvPr id="5" name="Rectangle 4"/>
-          <p:cNvSpPr>
-            <a:spLocks noChangeArrowheads="1"/>
-          </p:cNvSpPr>
-          <p:nvPr/>
-        </p:nvSpPr>
-        <p:spPr bwMode="auto">
-          <a:xfrm>
-            <a:off x="272051" y="3406833"/>
-            <a:ext cx="4262116" cy="2582759"/>
-          </a:xfrm>
-          <a:prstGeom prst="rect">
-            <a:avLst/>
-          </a:prstGeom>
-          <a:solidFill>
-            <a:schemeClr val="bg1">
-              <a:lumMod val="95000"/>
-            </a:schemeClr>
-          </a:solidFill>
-          <a:ln w="12700">
-            <a:solidFill>
-              <a:schemeClr val="tx1"/>
-            </a:solidFill>
-            <a:miter lim="800000"/>
-            <a:headEnd/>
-            <a:tailEnd/>
-          </a:ln>
-          <a:effectLst/>
-        </p:spPr>
-        <p:txBody>
-          <a:bodyPr wrap="square" lIns="90487" tIns="44450" rIns="90487" bIns="44450">
-            <a:spAutoFit/>
-          </a:bodyPr>
-          <a:lstStyle/>
-          <a:p>
-            <a:r>
-              <a:rPr lang="sk-SK" sz="1800" dirty="0">
-                <a:latin typeface="Consolas"/>
-                <a:cs typeface="Consolas"/>
-              </a:rPr>
-              <a:t>      movl    $0x0,%eax</a:t>
-            </a:r>
-          </a:p>
-          <a:p>
-            <a:r>
-              <a:rPr lang="pl-PL" sz="1800" dirty="0">
-                <a:latin typeface="Consolas"/>
-                <a:cs typeface="Consolas"/>
-              </a:rPr>
-              <a:t>      jmp     </a:t>
-            </a:r>
-            <a:r>
-              <a:rPr lang="pl-PL" dirty="0">
-                <a:latin typeface="Consolas"/>
-                <a:cs typeface="Consolas"/>
-              </a:rPr>
-              <a:t>L1.</a:t>
-            </a:r>
-            <a:endParaRPr lang="pl-PL" sz="1800" dirty="0">
-              <a:latin typeface="Consolas"/>
-              <a:cs typeface="Consolas"/>
-            </a:endParaRPr>
-          </a:p>
-          <a:p>
-            <a:r>
-              <a:rPr lang="nb-NO" sz="1800" dirty="0">
-                <a:latin typeface="Consolas"/>
-                <a:cs typeface="Consolas"/>
-              </a:rPr>
-              <a:t>  L2.	</a:t>
-            </a:r>
-          </a:p>
-          <a:p>
-            <a:r>
-              <a:rPr lang="nb-NO" dirty="0">
-                <a:latin typeface="Consolas"/>
-                <a:cs typeface="Consolas"/>
-              </a:rPr>
-              <a:t>      </a:t>
-            </a:r>
-            <a:r>
-              <a:rPr lang="nb-NO" sz="1800" dirty="0" err="1">
-                <a:latin typeface="Consolas"/>
-                <a:cs typeface="Consolas"/>
-              </a:rPr>
-              <a:t>addl</a:t>
-            </a:r>
-            <a:r>
-              <a:rPr lang="nb-NO" sz="1800" dirty="0">
-                <a:latin typeface="Consolas"/>
-                <a:cs typeface="Consolas"/>
-              </a:rPr>
-              <a:t>    $0x1,%eax</a:t>
-            </a:r>
-          </a:p>
-          <a:p>
-            <a:r>
-              <a:rPr lang="es-ES_tradnl" sz="1800" dirty="0">
-                <a:latin typeface="Consolas"/>
-                <a:cs typeface="Consolas"/>
-              </a:rPr>
-              <a:t>  L1. </a:t>
-            </a:r>
-          </a:p>
-          <a:p>
-            <a:r>
-              <a:rPr lang="es-ES_tradnl" dirty="0">
-                <a:latin typeface="Consolas"/>
-                <a:cs typeface="Consolas"/>
-              </a:rPr>
-              <a:t>      </a:t>
-            </a:r>
-            <a:r>
-              <a:rPr lang="es-ES_tradnl" sz="1800" dirty="0" err="1">
-                <a:latin typeface="Consolas"/>
-                <a:cs typeface="Consolas"/>
-              </a:rPr>
-              <a:t>movslq</a:t>
-            </a:r>
-            <a:r>
-              <a:rPr lang="es-ES_tradnl" sz="1800" dirty="0">
-                <a:latin typeface="Consolas"/>
-                <a:cs typeface="Consolas"/>
-              </a:rPr>
-              <a:t> %</a:t>
-            </a:r>
-            <a:r>
-              <a:rPr lang="es-ES_tradnl" sz="1800" dirty="0" err="1">
-                <a:latin typeface="Consolas"/>
-                <a:cs typeface="Consolas"/>
-              </a:rPr>
-              <a:t>eax</a:t>
-            </a:r>
-            <a:r>
-              <a:rPr lang="es-ES_tradnl" sz="1800" dirty="0">
-                <a:latin typeface="Consolas"/>
-                <a:cs typeface="Consolas"/>
-              </a:rPr>
-              <a:t>,%</a:t>
-            </a:r>
-            <a:r>
-              <a:rPr lang="es-ES_tradnl" sz="1800" dirty="0" err="1">
-                <a:latin typeface="Consolas"/>
-                <a:cs typeface="Consolas"/>
-              </a:rPr>
-              <a:t>rdx</a:t>
-            </a:r>
-            <a:r>
-              <a:rPr lang="es-ES_tradnl" sz="1800" dirty="0">
-                <a:latin typeface="Consolas"/>
-                <a:cs typeface="Consolas"/>
-              </a:rPr>
-              <a:t>          </a:t>
-            </a:r>
-          </a:p>
-          <a:p>
-            <a:r>
-              <a:rPr lang="es-ES_tradnl" sz="1800" dirty="0">
-                <a:latin typeface="Consolas"/>
-                <a:cs typeface="Consolas"/>
-              </a:rPr>
-              <a:t>      </a:t>
-            </a:r>
-            <a:r>
-              <a:rPr lang="es-ES_tradnl" sz="1800" dirty="0" err="1">
-                <a:latin typeface="Consolas"/>
-                <a:cs typeface="Consolas"/>
-              </a:rPr>
-              <a:t>cmpb</a:t>
-            </a:r>
-            <a:r>
-              <a:rPr lang="es-ES_tradnl" sz="1800" dirty="0">
-                <a:latin typeface="Consolas"/>
-                <a:cs typeface="Consolas"/>
-              </a:rPr>
-              <a:t>   $0x0,(%rdi,%rdx,1)</a:t>
-            </a:r>
-          </a:p>
-          <a:p>
-            <a:r>
-              <a:rPr lang="pl-PL" sz="1800" dirty="0">
-                <a:latin typeface="Consolas"/>
-                <a:cs typeface="Consolas"/>
-              </a:rPr>
-              <a:t>  </a:t>
-            </a:r>
-            <a:r>
-              <a:rPr lang="pl-PL" dirty="0">
-                <a:latin typeface="Consolas"/>
-                <a:cs typeface="Consolas"/>
-              </a:rPr>
-              <a:t>	  </a:t>
-            </a:r>
-            <a:r>
-              <a:rPr lang="pl-PL" sz="1800" dirty="0" err="1">
-                <a:latin typeface="Consolas"/>
-                <a:cs typeface="Consolas"/>
-              </a:rPr>
-              <a:t>jne</a:t>
-            </a:r>
-            <a:r>
-              <a:rPr lang="pl-PL" sz="1800" dirty="0">
-                <a:latin typeface="Consolas"/>
-                <a:cs typeface="Consolas"/>
-              </a:rPr>
-              <a:t>     L2.</a:t>
-            </a:r>
-          </a:p>
-          <a:p>
-            <a:r>
-              <a:rPr lang="hu-HU" sz="1800" dirty="0">
-                <a:latin typeface="Consolas"/>
-                <a:cs typeface="Consolas"/>
-              </a:rPr>
-              <a:t>      ret</a:t>
-            </a:r>
-          </a:p>
-        </p:txBody>
-      </p:sp>
-      <p:sp>
-        <p:nvSpPr>
-          <p:cNvPr id="7" name="Rectangle 5"/>
-          <p:cNvSpPr>
-            <a:spLocks noChangeArrowheads="1"/>
-          </p:cNvSpPr>
-          <p:nvPr/>
-        </p:nvSpPr>
-        <p:spPr bwMode="auto">
-          <a:xfrm>
-            <a:off x="461963" y="1412776"/>
-            <a:ext cx="4398640" cy="1197764"/>
-          </a:xfrm>
-          <a:prstGeom prst="rect">
-            <a:avLst/>
-          </a:prstGeom>
-          <a:solidFill>
-            <a:srgbClr val="F6F5BD"/>
-          </a:solidFill>
-          <a:ln w="12700">
-            <a:solidFill>
-              <a:schemeClr val="tx1"/>
-            </a:solidFill>
-            <a:miter lim="800000"/>
-            <a:headEnd/>
-            <a:tailEnd/>
-          </a:ln>
-        </p:spPr>
-        <p:txBody>
-          <a:bodyPr wrap="square" lIns="90487" tIns="44450" rIns="90487" bIns="44450">
-            <a:prstTxWarp prst="textNoShape">
-              <a:avLst/>
-            </a:prstTxWarp>
-            <a:spAutoFit/>
-          </a:bodyPr>
-          <a:lstStyle/>
-          <a:p>
-            <a:pPr eaLnBrk="0" hangingPunct="0"/>
-            <a:r>
-              <a:rPr lang="en-US" sz="1800" dirty="0">
-                <a:solidFill>
-                  <a:srgbClr val="FF0000"/>
-                </a:solidFill>
-                <a:latin typeface="Courier New" pitchFamily="-96" charset="0"/>
-              </a:rPr>
-              <a:t>??</a:t>
-            </a:r>
-            <a:r>
-              <a:rPr lang="en-US" sz="1800" dirty="0">
-                <a:latin typeface="Courier New" pitchFamily="-96" charset="0"/>
-              </a:rPr>
-              <a:t> mystery(char *s) {</a:t>
-            </a:r>
-          </a:p>
-          <a:p>
-            <a:pPr eaLnBrk="0" hangingPunct="0"/>
-            <a:r>
-              <a:rPr lang="en-US" sz="1800" dirty="0">
-                <a:latin typeface="Courier New" pitchFamily="-96" charset="0"/>
-              </a:rPr>
-              <a:t>   </a:t>
-            </a:r>
-          </a:p>
-          <a:p>
-            <a:pPr eaLnBrk="0" hangingPunct="0"/>
-            <a:r>
-              <a:rPr lang="en-US" sz="1800" dirty="0">
-                <a:latin typeface="Courier New" pitchFamily="-96" charset="0"/>
-              </a:rPr>
-              <a:t>      </a:t>
-            </a:r>
-            <a:r>
-              <a:rPr lang="en-US" sz="1800" dirty="0">
-                <a:solidFill>
-                  <a:srgbClr val="FF0000"/>
-                </a:solidFill>
-                <a:latin typeface="Courier New" pitchFamily="-96" charset="0"/>
-              </a:rPr>
-              <a:t>???</a:t>
-            </a:r>
-          </a:p>
-          <a:p>
-            <a:pPr eaLnBrk="0" hangingPunct="0"/>
-            <a:r>
-              <a:rPr lang="en-US" sz="1800" dirty="0">
-                <a:latin typeface="Courier New" pitchFamily="-96" charset="0"/>
-              </a:rPr>
-              <a:t>}</a:t>
-            </a:r>
-          </a:p>
-        </p:txBody>
-      </p:sp>
-      <p:sp>
-        <p:nvSpPr>
-          <p:cNvPr id="2" name="矩形 1"/>
-          <p:cNvSpPr/>
-          <p:nvPr/>
-        </p:nvSpPr>
-        <p:spPr>
-          <a:xfrm>
-            <a:off x="5844208" y="3429000"/>
-            <a:ext cx="1453793" cy="1200329"/>
-          </a:xfrm>
-          <a:prstGeom prst="rect">
-            <a:avLst/>
-          </a:prstGeom>
-        </p:spPr>
-        <p:txBody>
-          <a:bodyPr wrap="none">
-            <a:spAutoFit/>
-          </a:bodyPr>
-          <a:lstStyle/>
-          <a:p>
-            <a:r>
-              <a:rPr lang="sk-SK" altLang="zh-CN" dirty="0">
-                <a:latin typeface="Consolas"/>
-                <a:cs typeface="Consolas"/>
-              </a:rPr>
-              <a:t>int a = 0;</a:t>
-            </a:r>
-          </a:p>
-          <a:p>
-            <a:r>
-              <a:rPr lang="sk-SK" altLang="zh-CN" dirty="0">
-                <a:latin typeface="Consolas"/>
-                <a:cs typeface="Consolas"/>
-              </a:rPr>
-              <a:t>goto L1;</a:t>
-            </a:r>
-          </a:p>
-          <a:p>
-            <a:endParaRPr lang="sk-SK" altLang="zh-CN" dirty="0">
-              <a:latin typeface="Consolas"/>
-              <a:cs typeface="Consolas"/>
-            </a:endParaRPr>
-          </a:p>
-          <a:p>
-            <a:endParaRPr lang="zh-CN" altLang="en-US" dirty="0"/>
-          </a:p>
-        </p:txBody>
-      </p:sp>
-      <p:sp>
-        <p:nvSpPr>
-          <p:cNvPr id="6" name="矩形 1"/>
-          <p:cNvSpPr/>
-          <p:nvPr/>
-        </p:nvSpPr>
-        <p:spPr>
-          <a:xfrm>
-            <a:off x="5177928" y="1822025"/>
-            <a:ext cx="1595309" cy="369332"/>
-          </a:xfrm>
-          <a:prstGeom prst="rect">
-            <a:avLst/>
-          </a:prstGeom>
-        </p:spPr>
-        <p:txBody>
-          <a:bodyPr wrap="none">
-            <a:spAutoFit/>
-          </a:bodyPr>
-          <a:lstStyle/>
-          <a:p>
-            <a:r>
-              <a:rPr lang="en-US" altLang="zh-CN" dirty="0">
-                <a:latin typeface="Calibri"/>
-                <a:cs typeface="Calibri"/>
-              </a:rPr>
-              <a:t>%</a:t>
-            </a:r>
-            <a:r>
-              <a:rPr lang="en-US" altLang="zh-CN" dirty="0" err="1">
-                <a:latin typeface="Calibri"/>
-                <a:cs typeface="Calibri"/>
-              </a:rPr>
-              <a:t>rdi</a:t>
-            </a:r>
-            <a:r>
-              <a:rPr lang="en-US" altLang="zh-CN" dirty="0">
-                <a:latin typeface="Calibri"/>
-                <a:cs typeface="Calibri"/>
-              </a:rPr>
-              <a:t> contains s</a:t>
-            </a:r>
-          </a:p>
-        </p:txBody>
-      </p:sp>
-    </p:spTree>
-    <p:extLst>
-      <p:ext uri="{BB962C8B-B14F-4D97-AF65-F5344CB8AC3E}">
-        <p14:creationId xmlns:p14="http://schemas.microsoft.com/office/powerpoint/2010/main" val="2683830930"/>
       </p:ext>
     </p:extLst>
   </p:cSld>
@@ -22530,7 +23150,7 @@
                 <a:latin typeface="Consolas"/>
                 <a:cs typeface="Consolas"/>
               </a:rPr>
-              <a:t>      ret  </a:t>
+              <a:t>      ret</a:t>
             </a:r>
           </a:p>
         </p:txBody>
@@ -22636,6 +23256,472 @@
         <p:spPr>
           <a:xfrm>
             <a:off x="5844208" y="3429000"/>
+            <a:ext cx="1453793" cy="1200329"/>
+          </a:xfrm>
+          <a:prstGeom prst="rect">
+            <a:avLst/>
+          </a:prstGeom>
+        </p:spPr>
+        <p:txBody>
+          <a:bodyPr wrap="none">
+            <a:spAutoFit/>
+          </a:bodyPr>
+          <a:lstStyle/>
+          <a:p>
+            <a:r>
+              <a:rPr lang="sk-SK" altLang="zh-CN" dirty="0">
+                <a:latin typeface="Consolas"/>
+                <a:cs typeface="Consolas"/>
+              </a:rPr>
+              <a:t>int a = 0;</a:t>
+            </a:r>
+          </a:p>
+          <a:p>
+            <a:r>
+              <a:rPr lang="sk-SK" altLang="zh-CN" dirty="0">
+                <a:latin typeface="Consolas"/>
+                <a:cs typeface="Consolas"/>
+              </a:rPr>
+              <a:t>goto L1;</a:t>
+            </a:r>
+          </a:p>
+          <a:p>
+            <a:endParaRPr lang="sk-SK" altLang="zh-CN" dirty="0">
+              <a:latin typeface="Consolas"/>
+              <a:cs typeface="Consolas"/>
+            </a:endParaRPr>
+          </a:p>
+          <a:p>
+            <a:endParaRPr lang="zh-CN" altLang="en-US" dirty="0"/>
+          </a:p>
+        </p:txBody>
+      </p:sp>
+      <p:sp>
+        <p:nvSpPr>
+          <p:cNvPr id="6" name="矩形 1"/>
+          <p:cNvSpPr/>
+          <p:nvPr/>
+        </p:nvSpPr>
+        <p:spPr>
+          <a:xfrm>
+            <a:off x="5177928" y="1822025"/>
+            <a:ext cx="1595309" cy="369332"/>
+          </a:xfrm>
+          <a:prstGeom prst="rect">
+            <a:avLst/>
+          </a:prstGeom>
+        </p:spPr>
+        <p:txBody>
+          <a:bodyPr wrap="none">
+            <a:spAutoFit/>
+          </a:bodyPr>
+          <a:lstStyle/>
+          <a:p>
+            <a:r>
+              <a:rPr lang="en-US" altLang="zh-CN" dirty="0">
+                <a:latin typeface="Calibri"/>
+                <a:cs typeface="Calibri"/>
+              </a:rPr>
+              <a:t>%</a:t>
+            </a:r>
+            <a:r>
+              <a:rPr lang="en-US" altLang="zh-CN" dirty="0" err="1">
+                <a:latin typeface="Calibri"/>
+                <a:cs typeface="Calibri"/>
+              </a:rPr>
+              <a:t>rdi</a:t>
+            </a:r>
+            <a:r>
+              <a:rPr lang="en-US" altLang="zh-CN" dirty="0">
+                <a:latin typeface="Calibri"/>
+                <a:cs typeface="Calibri"/>
+              </a:rPr>
+              <a:t> contains s</a:t>
+            </a:r>
+          </a:p>
+        </p:txBody>
+      </p:sp>
+    </p:spTree>
+    <p:extLst>
+      <p:ext uri="{BB962C8B-B14F-4D97-AF65-F5344CB8AC3E}">
+        <p14:creationId xmlns:p14="http://schemas.microsoft.com/office/powerpoint/2010/main" val="2683830930"/>
+      </p:ext>
+    </p:extLst>
+  </p:cSld>
+  <p:clrMapOvr>
+    <a:masterClrMapping/>
+  </p:clrMapOvr>
+</p:sld>
+</file>
+
+<file path=ppt/slides/slide29.xml><?xml version="1.0" encoding="utf-8"?>
+<p:sld xmlns:a="http://schemas.openxmlformats.org/drawingml/2006/main" xmlns:r="http://schemas.openxmlformats.org/officeDocument/2006/relationships" xmlns:p="http://schemas.openxmlformats.org/presentationml/2006/main">
+  <p:cSld>
+    <p:spTree>
+      <p:nvGrpSpPr>
+        <p:cNvPr id="1" name=""/>
+        <p:cNvGrpSpPr/>
+        <p:nvPr/>
+      </p:nvGrpSpPr>
+      <p:grpSpPr>
+        <a:xfrm>
+          <a:off x="0" y="0"/>
+          <a:ext cx="0" cy="0"/>
+          <a:chOff x="0" y="0"/>
+          <a:chExt cx="0" cy="0"/>
+        </a:xfrm>
+      </p:grpSpPr>
+      <p:sp>
+        <p:nvSpPr>
+          <p:cNvPr id="23553" name="Title 1"/>
+          <p:cNvSpPr>
+            <a:spLocks noGrp="1"/>
+          </p:cNvSpPr>
+          <p:nvPr>
+            <p:ph type="title"/>
+          </p:nvPr>
+        </p:nvSpPr>
+        <p:spPr>
+          <a:xfrm>
+            <a:off x="357188" y="457200"/>
+            <a:ext cx="7591425" cy="762000"/>
+          </a:xfrm>
+        </p:spPr>
+        <p:txBody>
+          <a:bodyPr/>
+          <a:lstStyle/>
+          <a:p>
+            <a:r>
+              <a:rPr lang="en-US" dirty="0">
+                <a:latin typeface="Calibri" pitchFamily="-96" charset="0"/>
+              </a:rPr>
+              <a:t>Binary puzzle 2</a:t>
+            </a:r>
+          </a:p>
+        </p:txBody>
+      </p:sp>
+      <p:sp>
+        <p:nvSpPr>
+          <p:cNvPr id="5" name="Rectangle 4"/>
+          <p:cNvSpPr>
+            <a:spLocks noChangeArrowheads="1"/>
+          </p:cNvSpPr>
+          <p:nvPr/>
+        </p:nvSpPr>
+        <p:spPr bwMode="auto">
+          <a:xfrm>
+            <a:off x="272051" y="3406833"/>
+            <a:ext cx="4262116" cy="2582759"/>
+          </a:xfrm>
+          <a:prstGeom prst="rect">
+            <a:avLst/>
+          </a:prstGeom>
+          <a:solidFill>
+            <a:schemeClr val="bg1">
+              <a:lumMod val="95000"/>
+            </a:schemeClr>
+          </a:solidFill>
+          <a:ln w="12700">
+            <a:solidFill>
+              <a:schemeClr val="tx1"/>
+            </a:solidFill>
+            <a:miter lim="800000"/>
+            <a:headEnd/>
+            <a:tailEnd/>
+          </a:ln>
+          <a:effectLst/>
+        </p:spPr>
+        <p:txBody>
+          <a:bodyPr wrap="square" lIns="90487" tIns="44450" rIns="90487" bIns="44450">
+            <a:spAutoFit/>
+          </a:bodyPr>
+          <a:lstStyle/>
+          <a:p>
+            <a:r>
+              <a:rPr lang="sk-SK" sz="1800" dirty="0">
+                <a:latin typeface="Consolas"/>
+                <a:cs typeface="Consolas"/>
+              </a:rPr>
+              <a:t>      movl    $0x0,%eax</a:t>
+            </a:r>
+          </a:p>
+          <a:p>
+            <a:r>
+              <a:rPr lang="pl-PL" sz="1800" dirty="0">
+                <a:latin typeface="Consolas"/>
+                <a:cs typeface="Consolas"/>
+              </a:rPr>
+              <a:t>      jmp     </a:t>
+            </a:r>
+            <a:r>
+              <a:rPr lang="pl-PL" dirty="0">
+                <a:latin typeface="Consolas"/>
+                <a:cs typeface="Consolas"/>
+              </a:rPr>
+              <a:t>L1.</a:t>
+            </a:r>
+            <a:endParaRPr lang="pl-PL" sz="1800" dirty="0">
+              <a:latin typeface="Consolas"/>
+              <a:cs typeface="Consolas"/>
+            </a:endParaRPr>
+          </a:p>
+          <a:p>
+            <a:r>
+              <a:rPr lang="nb-NO" sz="1800" dirty="0">
+                <a:latin typeface="Consolas"/>
+                <a:cs typeface="Consolas"/>
+              </a:rPr>
+              <a:t>  L2.	</a:t>
+            </a:r>
+          </a:p>
+          <a:p>
+            <a:r>
+              <a:rPr lang="nb-NO" dirty="0">
+                <a:latin typeface="Consolas"/>
+                <a:cs typeface="Consolas"/>
+              </a:rPr>
+              <a:t>      </a:t>
+            </a:r>
+            <a:r>
+              <a:rPr lang="nb-NO" sz="1800" dirty="0" err="1">
+                <a:latin typeface="Consolas"/>
+                <a:cs typeface="Consolas"/>
+              </a:rPr>
+              <a:t>addl</a:t>
+            </a:r>
+            <a:r>
+              <a:rPr lang="nb-NO" sz="1800" dirty="0">
+                <a:latin typeface="Consolas"/>
+                <a:cs typeface="Consolas"/>
+              </a:rPr>
+              <a:t>    $0x1,%eax</a:t>
+            </a:r>
+          </a:p>
+          <a:p>
+            <a:r>
+              <a:rPr lang="es-ES_tradnl" sz="1800" dirty="0">
+                <a:latin typeface="Consolas"/>
+                <a:cs typeface="Consolas"/>
+              </a:rPr>
+              <a:t>  L1. </a:t>
+            </a:r>
+          </a:p>
+          <a:p>
+            <a:r>
+              <a:rPr lang="es-ES_tradnl" dirty="0">
+                <a:latin typeface="Consolas"/>
+                <a:cs typeface="Consolas"/>
+              </a:rPr>
+              <a:t>      </a:t>
+            </a:r>
+            <a:r>
+              <a:rPr lang="es-ES_tradnl" sz="1800" dirty="0" err="1">
+                <a:latin typeface="Consolas"/>
+                <a:cs typeface="Consolas"/>
+              </a:rPr>
+              <a:t>movslq</a:t>
+            </a:r>
+            <a:r>
+              <a:rPr lang="es-ES_tradnl" sz="1800" dirty="0">
+                <a:latin typeface="Consolas"/>
+                <a:cs typeface="Consolas"/>
+              </a:rPr>
+              <a:t> %</a:t>
+            </a:r>
+            <a:r>
+              <a:rPr lang="es-ES_tradnl" sz="1800" dirty="0" err="1">
+                <a:latin typeface="Consolas"/>
+                <a:cs typeface="Consolas"/>
+              </a:rPr>
+              <a:t>eax</a:t>
+            </a:r>
+            <a:r>
+              <a:rPr lang="es-ES_tradnl" sz="1800" dirty="0">
+                <a:latin typeface="Consolas"/>
+                <a:cs typeface="Consolas"/>
+              </a:rPr>
+              <a:t>,%</a:t>
+            </a:r>
+            <a:r>
+              <a:rPr lang="es-ES_tradnl" sz="1800" dirty="0" err="1">
+                <a:latin typeface="Consolas"/>
+                <a:cs typeface="Consolas"/>
+              </a:rPr>
+              <a:t>rdx</a:t>
+            </a:r>
+            <a:r>
+              <a:rPr lang="es-ES_tradnl" sz="1800" dirty="0">
+                <a:latin typeface="Consolas"/>
+                <a:cs typeface="Consolas"/>
+              </a:rPr>
+              <a:t>          </a:t>
+            </a:r>
+          </a:p>
+          <a:p>
+            <a:r>
+              <a:rPr lang="es-ES_tradnl" sz="1800" dirty="0">
+                <a:latin typeface="Consolas"/>
+                <a:cs typeface="Consolas"/>
+              </a:rPr>
+              <a:t>      </a:t>
+            </a:r>
+            <a:r>
+              <a:rPr lang="es-ES_tradnl" sz="1800" dirty="0" err="1">
+                <a:latin typeface="Consolas"/>
+                <a:cs typeface="Consolas"/>
+              </a:rPr>
+              <a:t>cmpb</a:t>
+            </a:r>
+            <a:r>
+              <a:rPr lang="es-ES_tradnl" sz="1800" dirty="0">
+                <a:latin typeface="Consolas"/>
+                <a:cs typeface="Consolas"/>
+              </a:rPr>
+              <a:t>   $0x0,(%rdi,%rdx,1)</a:t>
+            </a:r>
+          </a:p>
+          <a:p>
+            <a:r>
+              <a:rPr lang="pl-PL" sz="1800" dirty="0">
+                <a:latin typeface="Consolas"/>
+                <a:cs typeface="Consolas"/>
+              </a:rPr>
+              <a:t>  </a:t>
+            </a:r>
+            <a:r>
+              <a:rPr lang="pl-PL" dirty="0">
+                <a:latin typeface="Consolas"/>
+                <a:cs typeface="Consolas"/>
+              </a:rPr>
+              <a:t>	  </a:t>
+            </a:r>
+            <a:r>
+              <a:rPr lang="pl-PL" sz="1800" dirty="0" err="1">
+                <a:latin typeface="Consolas"/>
+                <a:cs typeface="Consolas"/>
+              </a:rPr>
+              <a:t>jne</a:t>
+            </a:r>
+            <a:r>
+              <a:rPr lang="pl-PL" sz="1800" dirty="0">
+                <a:latin typeface="Consolas"/>
+                <a:cs typeface="Consolas"/>
+              </a:rPr>
+              <a:t>     L2.</a:t>
+            </a:r>
+          </a:p>
+          <a:p>
+            <a:r>
+              <a:rPr lang="hu-HU" sz="1800" dirty="0">
+                <a:latin typeface="Consolas"/>
+                <a:cs typeface="Consolas"/>
+              </a:rPr>
+              <a:t>      ret  </a:t>
+            </a:r>
+          </a:p>
+        </p:txBody>
+      </p:sp>
+      <p:sp>
+        <p:nvSpPr>
+          <p:cNvPr id="7" name="Rectangle 5"/>
+          <p:cNvSpPr>
+            <a:spLocks noChangeArrowheads="1"/>
+          </p:cNvSpPr>
+          <p:nvPr/>
+        </p:nvSpPr>
+        <p:spPr bwMode="auto">
+          <a:xfrm>
+            <a:off x="461963" y="1412776"/>
+            <a:ext cx="4398640" cy="1197764"/>
+          </a:xfrm>
+          <a:prstGeom prst="rect">
+            <a:avLst/>
+          </a:prstGeom>
+          <a:solidFill>
+            <a:srgbClr val="F6F5BD"/>
+          </a:solidFill>
+          <a:ln w="12700">
+            <a:solidFill>
+              <a:schemeClr val="tx1"/>
+            </a:solidFill>
+            <a:miter lim="800000"/>
+            <a:headEnd/>
+            <a:tailEnd/>
+          </a:ln>
+        </p:spPr>
+        <p:txBody>
+          <a:bodyPr wrap="square" lIns="90487" tIns="44450" rIns="90487" bIns="44450">
+            <a:prstTxWarp prst="textNoShape">
+              <a:avLst/>
+            </a:prstTxWarp>
+            <a:spAutoFit/>
+          </a:bodyPr>
+          <a:lstStyle/>
+          <a:p>
+            <a:pPr eaLnBrk="0" hangingPunct="0"/>
+            <a:r>
+              <a:rPr lang="en-US" sz="1800" dirty="0">
+                <a:solidFill>
+                  <a:srgbClr val="FF0000"/>
+                </a:solidFill>
+                <a:latin typeface="Courier New" pitchFamily="-96" charset="0"/>
+              </a:rPr>
+              <a:t>??</a:t>
+            </a:r>
+            <a:r>
+              <a:rPr lang="en-US" sz="1800" dirty="0">
+                <a:latin typeface="Courier New" pitchFamily="-96" charset="0"/>
+              </a:rPr>
+              <a:t> mystery(char *s) {</a:t>
+            </a:r>
+          </a:p>
+          <a:p>
+            <a:pPr eaLnBrk="0" hangingPunct="0"/>
+            <a:r>
+              <a:rPr lang="en-US" sz="1800" dirty="0">
+                <a:latin typeface="Courier New" pitchFamily="-96" charset="0"/>
+              </a:rPr>
+              <a:t>   </a:t>
+            </a:r>
+          </a:p>
+          <a:p>
+            <a:pPr eaLnBrk="0" hangingPunct="0"/>
+            <a:r>
+              <a:rPr lang="en-US" sz="1800" dirty="0">
+                <a:latin typeface="Courier New" pitchFamily="-96" charset="0"/>
+              </a:rPr>
+              <a:t>      </a:t>
+            </a:r>
+            <a:r>
+              <a:rPr lang="en-US" sz="1800" dirty="0">
+                <a:solidFill>
+                  <a:srgbClr val="FF0000"/>
+                </a:solidFill>
+                <a:latin typeface="Courier New" pitchFamily="-96" charset="0"/>
+              </a:rPr>
+              <a:t>???</a:t>
+            </a:r>
+          </a:p>
+          <a:p>
+            <a:pPr eaLnBrk="0" hangingPunct="0"/>
+            <a:r>
+              <a:rPr lang="en-US" sz="1800" dirty="0">
+                <a:latin typeface="Courier New" pitchFamily="-96" charset="0"/>
+              </a:rPr>
+              <a:t>}</a:t>
+            </a:r>
+          </a:p>
+        </p:txBody>
+      </p:sp>
+      <p:sp>
+        <p:nvSpPr>
+          <p:cNvPr id="2" name="矩形 1"/>
+          <p:cNvSpPr/>
+          <p:nvPr/>
+        </p:nvSpPr>
+        <p:spPr>
+          <a:xfrm>
+            <a:off x="5844208" y="3429000"/>
             <a:ext cx="2088357" cy="2031325"/>
           </a:xfrm>
           <a:prstGeom prst="rect">
@@ -22764,7 +23850,108 @@
 </p:sld>
 </file>
 
-<file path=ppt/slides/slide29.xml><?xml version="1.0" encoding="utf-8"?>
+<file path=ppt/slides/slide3.xml><?xml version="1.0" encoding="utf-8"?>
+<p:sld xmlns:a="http://schemas.openxmlformats.org/drawingml/2006/main" xmlns:r="http://schemas.openxmlformats.org/officeDocument/2006/relationships" xmlns:p="http://schemas.openxmlformats.org/presentationml/2006/main">
+  <p:cSld>
+    <p:spTree>
+      <p:nvGrpSpPr>
+        <p:cNvPr id="1" name=""/>
+        <p:cNvGrpSpPr/>
+        <p:nvPr/>
+      </p:nvGrpSpPr>
+      <p:grpSpPr>
+        <a:xfrm>
+          <a:off x="0" y="0"/>
+          <a:ext cx="0" cy="0"/>
+          <a:chOff x="0" y="0"/>
+          <a:chExt cx="0" cy="0"/>
+        </a:xfrm>
+      </p:grpSpPr>
+      <p:sp>
+        <p:nvSpPr>
+          <p:cNvPr id="2" name="Title 1">
+            <a:extLst>
+              <a:ext uri="{FF2B5EF4-FFF2-40B4-BE49-F238E27FC236}">
+                <a16:creationId xmlns:a16="http://schemas.microsoft.com/office/drawing/2014/main" id="{EDC88C19-847B-4C53-B140-D412656D8C68}"/>
+              </a:ext>
+            </a:extLst>
+          </p:cNvPr>
+          <p:cNvSpPr>
+            <a:spLocks noGrp="1"/>
+          </p:cNvSpPr>
+          <p:nvPr>
+            <p:ph type="title"/>
+          </p:nvPr>
+        </p:nvSpPr>
+        <p:spPr/>
+        <p:txBody>
+          <a:bodyPr/>
+          <a:lstStyle/>
+          <a:p>
+            <a:r>
+              <a:rPr lang="en-US" dirty="0"/>
+              <a:t>Today’s lesson plan</a:t>
+            </a:r>
+          </a:p>
+        </p:txBody>
+      </p:sp>
+      <p:sp>
+        <p:nvSpPr>
+          <p:cNvPr id="3" name="Content Placeholder 2">
+            <a:extLst>
+              <a:ext uri="{FF2B5EF4-FFF2-40B4-BE49-F238E27FC236}">
+                <a16:creationId xmlns:a16="http://schemas.microsoft.com/office/drawing/2014/main" id="{7984DF01-4655-4168-BC47-075611EA2679}"/>
+              </a:ext>
+            </a:extLst>
+          </p:cNvPr>
+          <p:cNvSpPr>
+            <a:spLocks noGrp="1"/>
+          </p:cNvSpPr>
+          <p:nvPr>
+            <p:ph idx="1"/>
+          </p:nvPr>
+        </p:nvSpPr>
+        <p:spPr/>
+        <p:txBody>
+          <a:bodyPr/>
+          <a:lstStyle/>
+          <a:p>
+            <a:r>
+              <a:rPr lang="en-US" dirty="0"/>
+              <a:t>C/UNIX calling convention (caller vs. callee-save reg)</a:t>
+            </a:r>
+          </a:p>
+          <a:p>
+            <a:r>
+              <a:rPr lang="en-US" dirty="0"/>
+              <a:t>Program data storage and </a:t>
+            </a:r>
+            <a:r>
+              <a:rPr lang="en-US" dirty="0" err="1"/>
+              <a:t>manipuation</a:t>
+            </a:r>
+            <a:endParaRPr lang="en-US" dirty="0"/>
+          </a:p>
+          <a:p>
+            <a:pPr lvl="1"/>
+            <a:endParaRPr lang="en-US" dirty="0"/>
+          </a:p>
+        </p:txBody>
+      </p:sp>
+    </p:spTree>
+    <p:extLst>
+      <p:ext uri="{BB962C8B-B14F-4D97-AF65-F5344CB8AC3E}">
+        <p14:creationId xmlns:p14="http://schemas.microsoft.com/office/powerpoint/2010/main" val="2950814609"/>
+      </p:ext>
+    </p:extLst>
+  </p:cSld>
+  <p:clrMapOvr>
+    <a:masterClrMapping/>
+  </p:clrMapOvr>
+</p:sld>
+</file>
+
+<file path=ppt/slides/slide30.xml><?xml version="1.0" encoding="utf-8"?>
 <p:sld xmlns:a="http://schemas.openxmlformats.org/drawingml/2006/main" xmlns:r="http://schemas.openxmlformats.org/officeDocument/2006/relationships" xmlns:p="http://schemas.openxmlformats.org/presentationml/2006/main">
   <p:cSld>
     <p:spTree>
@@ -23462,108 +24649,7 @@
 </p:sld>
 </file>
 
-<file path=ppt/slides/slide3.xml><?xml version="1.0" encoding="utf-8"?>
-<p:sld xmlns:a="http://schemas.openxmlformats.org/drawingml/2006/main" xmlns:r="http://schemas.openxmlformats.org/officeDocument/2006/relationships" xmlns:p="http://schemas.openxmlformats.org/presentationml/2006/main">
-  <p:cSld>
-    <p:spTree>
-      <p:nvGrpSpPr>
-        <p:cNvPr id="1" name=""/>
-        <p:cNvGrpSpPr/>
-        <p:nvPr/>
-      </p:nvGrpSpPr>
-      <p:grpSpPr>
-        <a:xfrm>
-          <a:off x="0" y="0"/>
-          <a:ext cx="0" cy="0"/>
-          <a:chOff x="0" y="0"/>
-          <a:chExt cx="0" cy="0"/>
-        </a:xfrm>
-      </p:grpSpPr>
-      <p:sp>
-        <p:nvSpPr>
-          <p:cNvPr id="2" name="Title 1">
-            <a:extLst>
-              <a:ext uri="{FF2B5EF4-FFF2-40B4-BE49-F238E27FC236}">
-                <a16:creationId xmlns:a16="http://schemas.microsoft.com/office/drawing/2014/main" id="{EDC88C19-847B-4C53-B140-D412656D8C68}"/>
-              </a:ext>
-            </a:extLst>
-          </p:cNvPr>
-          <p:cNvSpPr>
-            <a:spLocks noGrp="1"/>
-          </p:cNvSpPr>
-          <p:nvPr>
-            <p:ph type="title"/>
-          </p:nvPr>
-        </p:nvSpPr>
-        <p:spPr/>
-        <p:txBody>
-          <a:bodyPr/>
-          <a:lstStyle/>
-          <a:p>
-            <a:r>
-              <a:rPr lang="en-US" dirty="0"/>
-              <a:t>Today’s lesson plan</a:t>
-            </a:r>
-          </a:p>
-        </p:txBody>
-      </p:sp>
-      <p:sp>
-        <p:nvSpPr>
-          <p:cNvPr id="3" name="Content Placeholder 2">
-            <a:extLst>
-              <a:ext uri="{FF2B5EF4-FFF2-40B4-BE49-F238E27FC236}">
-                <a16:creationId xmlns:a16="http://schemas.microsoft.com/office/drawing/2014/main" id="{7984DF01-4655-4168-BC47-075611EA2679}"/>
-              </a:ext>
-            </a:extLst>
-          </p:cNvPr>
-          <p:cNvSpPr>
-            <a:spLocks noGrp="1"/>
-          </p:cNvSpPr>
-          <p:nvPr>
-            <p:ph idx="1"/>
-          </p:nvPr>
-        </p:nvSpPr>
-        <p:spPr/>
-        <p:txBody>
-          <a:bodyPr/>
-          <a:lstStyle/>
-          <a:p>
-            <a:r>
-              <a:rPr lang="en-US" dirty="0"/>
-              <a:t>C/UNIX calling convention (caller vs. callee-save reg)</a:t>
-            </a:r>
-          </a:p>
-          <a:p>
-            <a:r>
-              <a:rPr lang="en-US" dirty="0"/>
-              <a:t>Program data storage and </a:t>
-            </a:r>
-            <a:r>
-              <a:rPr lang="en-US" dirty="0" err="1"/>
-              <a:t>manipuation</a:t>
-            </a:r>
-            <a:endParaRPr lang="en-US" dirty="0"/>
-          </a:p>
-          <a:p>
-            <a:pPr lvl="1"/>
-            <a:endParaRPr lang="en-US" dirty="0"/>
-          </a:p>
-        </p:txBody>
-      </p:sp>
-    </p:spTree>
-    <p:extLst>
-      <p:ext uri="{BB962C8B-B14F-4D97-AF65-F5344CB8AC3E}">
-        <p14:creationId xmlns:p14="http://schemas.microsoft.com/office/powerpoint/2010/main" val="2950814609"/>
-      </p:ext>
-    </p:extLst>
-  </p:cSld>
-  <p:clrMapOvr>
-    <a:masterClrMapping/>
-  </p:clrMapOvr>
-</p:sld>
-</file>
-
-<file path=ppt/slides/slide30.xml><?xml version="1.0" encoding="utf-8"?>
+<file path=ppt/slides/slide31.xml><?xml version="1.0" encoding="utf-8"?>
 <p:sld xmlns:a="http://schemas.openxmlformats.org/drawingml/2006/main" xmlns:r="http://schemas.openxmlformats.org/officeDocument/2006/relationships" xmlns:p="http://schemas.openxmlformats.org/presentationml/2006/main">
   <p:cSld>
     <p:spTree>
@@ -24208,7 +25294,7 @@
 </p:sld>
 </file>
 
-<file path=ppt/slides/slide31.xml><?xml version="1.0" encoding="utf-8"?>
+<file path=ppt/slides/slide32.xml><?xml version="1.0" encoding="utf-8"?>
 <p:sld xmlns:a="http://schemas.openxmlformats.org/drawingml/2006/main" xmlns:r="http://schemas.openxmlformats.org/officeDocument/2006/relationships" xmlns:p="http://schemas.openxmlformats.org/presentationml/2006/main">
   <p:cSld>
     <p:spTree>
@@ -24805,1100 +25891,6 @@
   <p:clrMapOvr>
     <a:masterClrMapping/>
   </p:clrMapOvr>
-</p:sld>
-</file>
-
-<file path=ppt/slides/slide32.xml><?xml version="1.0" encoding="utf-8"?>
-<p:sld xmlns:a="http://schemas.openxmlformats.org/drawingml/2006/main" xmlns:r="http://schemas.openxmlformats.org/officeDocument/2006/relationships" xmlns:p="http://schemas.openxmlformats.org/presentationml/2006/main">
-  <p:cSld>
-    <p:spTree>
-      <p:nvGrpSpPr>
-        <p:cNvPr id="1" name=""/>
-        <p:cNvGrpSpPr/>
-        <p:nvPr/>
-      </p:nvGrpSpPr>
-      <p:grpSpPr>
-        <a:xfrm>
-          <a:off x="0" y="0"/>
-          <a:ext cx="0" cy="0"/>
-          <a:chOff x="0" y="0"/>
-          <a:chExt cx="0" cy="0"/>
-        </a:xfrm>
-      </p:grpSpPr>
-      <p:sp>
-        <p:nvSpPr>
-          <p:cNvPr id="2" name="标题 1"/>
-          <p:cNvSpPr>
-            <a:spLocks noGrp="1"/>
-          </p:cNvSpPr>
-          <p:nvPr>
-            <p:ph type="title"/>
-          </p:nvPr>
-        </p:nvSpPr>
-        <p:spPr/>
-        <p:txBody>
-          <a:bodyPr/>
-          <a:lstStyle/>
-          <a:p>
-            <a:r>
-              <a:rPr kumimoji="1" lang="en-US" altLang="zh-CN" dirty="0"/>
-              <a:t>Accessing Program Data: struct</a:t>
-            </a:r>
-            <a:endParaRPr kumimoji="1" lang="zh-CN" altLang="en-US" dirty="0"/>
-          </a:p>
-        </p:txBody>
-      </p:sp>
-      <p:sp>
-        <p:nvSpPr>
-          <p:cNvPr id="6" name="Content Placeholder 5">
-            <a:extLst>
-              <a:ext uri="{FF2B5EF4-FFF2-40B4-BE49-F238E27FC236}">
-                <a16:creationId xmlns:a16="http://schemas.microsoft.com/office/drawing/2014/main" id="{9BFE19AC-E636-419B-878C-0049D9BC0336}"/>
-              </a:ext>
-            </a:extLst>
-          </p:cNvPr>
-          <p:cNvSpPr>
-            <a:spLocks noGrp="1"/>
-          </p:cNvSpPr>
-          <p:nvPr>
-            <p:ph idx="1"/>
-          </p:nvPr>
-        </p:nvSpPr>
-        <p:spPr>
-          <a:xfrm>
-            <a:off x="457200" y="1600201"/>
-            <a:ext cx="8424886" cy="1547358"/>
-          </a:xfrm>
-        </p:spPr>
-        <p:txBody>
-          <a:bodyPr/>
-          <a:lstStyle/>
-          <a:p>
-            <a:r>
-              <a:rPr lang="en-US" dirty="0"/>
-              <a:t>Struct is stored in the memory </a:t>
-            </a:r>
-          </a:p>
-          <a:p>
-            <a:pPr lvl="1"/>
-            <a:r>
-              <a:rPr lang="en-US" dirty="0"/>
-              <a:t>Fields are contiguous in the order they are declared in struct</a:t>
-            </a:r>
-          </a:p>
-          <a:p>
-            <a:pPr lvl="1"/>
-            <a:r>
-              <a:rPr lang="en-US" dirty="0"/>
-              <a:t>There may be padding (gaps) between fields </a:t>
-            </a:r>
-          </a:p>
-        </p:txBody>
-      </p:sp>
-      <p:sp>
-        <p:nvSpPr>
-          <p:cNvPr id="4" name="Rectangle 2"/>
-          <p:cNvSpPr>
-            <a:spLocks noChangeArrowheads="1"/>
-          </p:cNvSpPr>
-          <p:nvPr/>
-        </p:nvSpPr>
-        <p:spPr bwMode="auto">
-          <a:xfrm>
-            <a:off x="538525" y="3425717"/>
-            <a:ext cx="3296295" cy="1474763"/>
-          </a:xfrm>
-          <a:prstGeom prst="rect">
-            <a:avLst/>
-          </a:prstGeom>
-          <a:noFill/>
-          <a:ln w="12700">
-            <a:noFill/>
-            <a:miter lim="800000"/>
-            <a:headEnd/>
-            <a:tailEnd/>
-          </a:ln>
-        </p:spPr>
-        <p:txBody>
-          <a:bodyPr wrap="square" lIns="90487" tIns="44450" rIns="90487" bIns="44450">
-            <a:prstTxWarp prst="textNoShape">
-              <a:avLst/>
-            </a:prstTxWarp>
-            <a:spAutoFit/>
-          </a:bodyPr>
-          <a:lstStyle/>
-          <a:p>
-            <a:pPr eaLnBrk="0" hangingPunct="0"/>
-            <a:r>
-              <a:rPr lang="en-US" sz="1800" dirty="0" err="1">
-                <a:latin typeface="Consolas"/>
-                <a:cs typeface="Consolas"/>
-              </a:rPr>
-              <a:t>typedef</a:t>
-            </a:r>
-            <a:r>
-              <a:rPr lang="en-US" sz="1800" dirty="0">
-                <a:latin typeface="Consolas"/>
-                <a:cs typeface="Consolas"/>
-              </a:rPr>
-              <a:t> </a:t>
-            </a:r>
-            <a:r>
-              <a:rPr lang="en-US" sz="1800" dirty="0" err="1">
-                <a:latin typeface="Consolas"/>
-                <a:cs typeface="Consolas"/>
-              </a:rPr>
-              <a:t>struct</a:t>
-            </a:r>
-            <a:r>
-              <a:rPr lang="en-US" sz="1800" dirty="0">
-                <a:latin typeface="Consolas"/>
-                <a:cs typeface="Consolas"/>
-              </a:rPr>
-              <a:t> node {</a:t>
-            </a:r>
-          </a:p>
-          <a:p>
-            <a:pPr eaLnBrk="0" hangingPunct="0"/>
-            <a:r>
-              <a:rPr lang="en-US" sz="1800" dirty="0">
-                <a:latin typeface="Consolas"/>
-                <a:cs typeface="Consolas"/>
-              </a:rPr>
-              <a:t>    long id;</a:t>
-            </a:r>
-          </a:p>
-          <a:p>
-            <a:pPr eaLnBrk="0" hangingPunct="0"/>
-            <a:r>
-              <a:rPr lang="en-US" sz="1800" dirty="0">
-                <a:latin typeface="Consolas"/>
-                <a:cs typeface="Consolas"/>
-              </a:rPr>
-              <a:t>    char *name;</a:t>
-            </a:r>
-          </a:p>
-          <a:p>
-            <a:pPr eaLnBrk="0" hangingPunct="0"/>
-            <a:r>
-              <a:rPr lang="en-US" sz="1800" dirty="0">
-                <a:latin typeface="Consolas"/>
-                <a:cs typeface="Consolas"/>
-              </a:rPr>
-              <a:t>    </a:t>
-            </a:r>
-            <a:r>
-              <a:rPr lang="en-US" sz="1800" dirty="0" err="1">
-                <a:latin typeface="Consolas"/>
-                <a:cs typeface="Consolas"/>
-              </a:rPr>
-              <a:t>struct</a:t>
-            </a:r>
-            <a:r>
-              <a:rPr lang="en-US" sz="1800" dirty="0">
-                <a:latin typeface="Consolas"/>
-                <a:cs typeface="Consolas"/>
-              </a:rPr>
-              <a:t> node *next;</a:t>
-            </a:r>
-          </a:p>
-          <a:p>
-            <a:pPr eaLnBrk="0" hangingPunct="0"/>
-            <a:r>
-              <a:rPr lang="en-US" sz="1800" dirty="0">
-                <a:latin typeface="Consolas"/>
-                <a:cs typeface="Consolas"/>
-              </a:rPr>
-              <a:t>}node;</a:t>
-            </a:r>
-          </a:p>
-        </p:txBody>
-      </p:sp>
-      <p:grpSp>
-        <p:nvGrpSpPr>
-          <p:cNvPr id="14" name="Group 13"/>
-          <p:cNvGrpSpPr/>
-          <p:nvPr/>
-        </p:nvGrpSpPr>
-        <p:grpSpPr>
-          <a:xfrm>
-            <a:off x="4683734" y="3793654"/>
-            <a:ext cx="3399312" cy="825500"/>
-            <a:chOff x="4768460" y="2414867"/>
-            <a:chExt cx="3399312" cy="825500"/>
-          </a:xfrm>
-        </p:grpSpPr>
-        <p:sp>
-          <p:nvSpPr>
-            <p:cNvPr id="5" name="Rectangle 11"/>
-            <p:cNvSpPr>
-              <a:spLocks noChangeArrowheads="1"/>
-            </p:cNvSpPr>
-            <p:nvPr/>
-          </p:nvSpPr>
-          <p:spPr bwMode="auto">
-            <a:xfrm>
-              <a:off x="4935148" y="2414867"/>
-              <a:ext cx="1015651" cy="431800"/>
-            </a:xfrm>
-            <a:prstGeom prst="rect">
-              <a:avLst/>
-            </a:prstGeom>
-            <a:solidFill>
-              <a:schemeClr val="accent2">
-                <a:lumMod val="40000"/>
-                <a:lumOff val="60000"/>
-              </a:schemeClr>
-            </a:solidFill>
-            <a:ln w="25400">
-              <a:solidFill>
-                <a:schemeClr val="tx1"/>
-              </a:solidFill>
-              <a:miter lim="800000"/>
-              <a:headEnd/>
-              <a:tailEnd/>
-            </a:ln>
-            <a:effectLst/>
-          </p:spPr>
-          <p:txBody>
-            <a:bodyPr wrap="none" lIns="90487" tIns="44450" rIns="90487" bIns="44450" anchor="ctr"/>
-            <a:lstStyle/>
-            <a:p>
-              <a:pPr eaLnBrk="0" hangingPunct="0">
-                <a:defRPr/>
-              </a:pPr>
-              <a:r>
-                <a:rPr lang="en-US" sz="2000" dirty="0">
-                  <a:latin typeface="Arial"/>
-                  <a:cs typeface="Arial"/>
-                </a:rPr>
-                <a:t>id</a:t>
-              </a:r>
-              <a:endParaRPr lang="en-US" sz="2000" dirty="0">
-                <a:latin typeface="Arial"/>
-                <a:ea typeface="+mn-ea"/>
-                <a:cs typeface="Arial"/>
-              </a:endParaRPr>
-            </a:p>
-          </p:txBody>
-        </p:sp>
-        <p:sp>
-          <p:nvSpPr>
-            <p:cNvPr id="8" name="Rectangle 10"/>
-            <p:cNvSpPr>
-              <a:spLocks noChangeArrowheads="1"/>
-            </p:cNvSpPr>
-            <p:nvPr/>
-          </p:nvSpPr>
-          <p:spPr bwMode="auto">
-            <a:xfrm>
-              <a:off x="5950799" y="2414867"/>
-              <a:ext cx="991392" cy="431800"/>
-            </a:xfrm>
-            <a:prstGeom prst="rect">
-              <a:avLst/>
-            </a:prstGeom>
-            <a:solidFill>
-              <a:schemeClr val="accent4">
-                <a:lumMod val="40000"/>
-                <a:lumOff val="60000"/>
-              </a:schemeClr>
-            </a:solidFill>
-            <a:ln w="25400">
-              <a:solidFill>
-                <a:schemeClr val="tx1"/>
-              </a:solidFill>
-              <a:miter lim="800000"/>
-              <a:headEnd/>
-              <a:tailEnd/>
-            </a:ln>
-          </p:spPr>
-          <p:txBody>
-            <a:bodyPr wrap="none" lIns="90487" tIns="44450" rIns="90487" bIns="44450" anchor="ctr">
-              <a:prstTxWarp prst="textNoShape">
-                <a:avLst/>
-              </a:prstTxWarp>
-            </a:bodyPr>
-            <a:lstStyle/>
-            <a:p>
-              <a:pPr algn="ctr" eaLnBrk="0" hangingPunct="0"/>
-              <a:r>
-                <a:rPr lang="en-US" sz="2000" dirty="0">
-                  <a:latin typeface="Courier New" pitchFamily="-96" charset="0"/>
-                </a:rPr>
-                <a:t>name</a:t>
-              </a:r>
-            </a:p>
-          </p:txBody>
-        </p:sp>
-        <p:sp>
-          <p:nvSpPr>
-            <p:cNvPr id="9" name="Rectangle 12"/>
-            <p:cNvSpPr>
-              <a:spLocks noChangeArrowheads="1"/>
-            </p:cNvSpPr>
-            <p:nvPr/>
-          </p:nvSpPr>
-          <p:spPr bwMode="auto">
-            <a:xfrm>
-              <a:off x="6942190" y="2414867"/>
-              <a:ext cx="987285" cy="431800"/>
-            </a:xfrm>
-            <a:prstGeom prst="rect">
-              <a:avLst/>
-            </a:prstGeom>
-            <a:solidFill>
-              <a:schemeClr val="accent5">
-                <a:lumMod val="40000"/>
-                <a:lumOff val="60000"/>
-              </a:schemeClr>
-            </a:solidFill>
-            <a:ln w="25400">
-              <a:solidFill>
-                <a:schemeClr val="tx1"/>
-              </a:solidFill>
-              <a:miter lim="800000"/>
-              <a:headEnd/>
-              <a:tailEnd/>
-            </a:ln>
-          </p:spPr>
-          <p:txBody>
-            <a:bodyPr wrap="none" lIns="90487" tIns="44450" rIns="90487" bIns="44450" anchor="ctr">
-              <a:prstTxWarp prst="textNoShape">
-                <a:avLst/>
-              </a:prstTxWarp>
-            </a:bodyPr>
-            <a:lstStyle/>
-            <a:p>
-              <a:pPr algn="ctr" eaLnBrk="0" hangingPunct="0"/>
-              <a:r>
-                <a:rPr lang="en-US" sz="2000" dirty="0">
-                  <a:latin typeface="Arial"/>
-                  <a:cs typeface="Arial"/>
-                </a:rPr>
-                <a:t>next</a:t>
-              </a:r>
-            </a:p>
-          </p:txBody>
-        </p:sp>
-        <p:sp>
-          <p:nvSpPr>
-            <p:cNvPr id="10" name="Rectangle 13"/>
-            <p:cNvSpPr>
-              <a:spLocks noChangeArrowheads="1"/>
-            </p:cNvSpPr>
-            <p:nvPr/>
-          </p:nvSpPr>
-          <p:spPr bwMode="auto">
-            <a:xfrm>
-              <a:off x="4768460" y="2846667"/>
-              <a:ext cx="333375" cy="393700"/>
-            </a:xfrm>
-            <a:prstGeom prst="rect">
-              <a:avLst/>
-            </a:prstGeom>
-            <a:noFill/>
-            <a:ln w="25400">
-              <a:noFill/>
-              <a:miter lim="800000"/>
-              <a:headEnd/>
-              <a:tailEnd/>
-            </a:ln>
-          </p:spPr>
-          <p:txBody>
-            <a:bodyPr wrap="none" lIns="90487" tIns="44450" rIns="90487" bIns="44450">
-              <a:prstTxWarp prst="textNoShape">
-                <a:avLst/>
-              </a:prstTxWarp>
-              <a:spAutoFit/>
-            </a:bodyPr>
-            <a:lstStyle/>
-            <a:p>
-              <a:pPr eaLnBrk="0" hangingPunct="0"/>
-              <a:r>
-                <a:rPr lang="en-US" sz="2000" dirty="0">
-                  <a:latin typeface="Courier New" pitchFamily="-96" charset="0"/>
-                </a:rPr>
-                <a:t>0</a:t>
-              </a:r>
-            </a:p>
-          </p:txBody>
-        </p:sp>
-        <p:sp>
-          <p:nvSpPr>
-            <p:cNvPr id="11" name="Rectangle 14"/>
-            <p:cNvSpPr>
-              <a:spLocks noChangeArrowheads="1"/>
-            </p:cNvSpPr>
-            <p:nvPr/>
-          </p:nvSpPr>
-          <p:spPr bwMode="auto">
-            <a:xfrm>
-              <a:off x="5791273" y="2827607"/>
-              <a:ext cx="336655" cy="397545"/>
-            </a:xfrm>
-            <a:prstGeom prst="rect">
-              <a:avLst/>
-            </a:prstGeom>
-            <a:noFill/>
-            <a:ln w="25400">
-              <a:noFill/>
-              <a:miter lim="800000"/>
-              <a:headEnd/>
-              <a:tailEnd/>
-            </a:ln>
-          </p:spPr>
-          <p:txBody>
-            <a:bodyPr wrap="none" lIns="90487" tIns="44450" rIns="90487" bIns="44450">
-              <a:prstTxWarp prst="textNoShape">
-                <a:avLst/>
-              </a:prstTxWarp>
-              <a:spAutoFit/>
-            </a:bodyPr>
-            <a:lstStyle/>
-            <a:p>
-              <a:pPr eaLnBrk="0" hangingPunct="0"/>
-              <a:r>
-                <a:rPr lang="en-US" sz="2000" dirty="0">
-                  <a:latin typeface="Courier New" pitchFamily="-96" charset="0"/>
-                </a:rPr>
-                <a:t>8</a:t>
-              </a:r>
-            </a:p>
-          </p:txBody>
-        </p:sp>
-        <p:sp>
-          <p:nvSpPr>
-            <p:cNvPr id="12" name="Rectangle 15"/>
-            <p:cNvSpPr>
-              <a:spLocks noChangeArrowheads="1"/>
-            </p:cNvSpPr>
-            <p:nvPr/>
-          </p:nvSpPr>
-          <p:spPr bwMode="auto">
-            <a:xfrm>
-              <a:off x="6699303" y="2813329"/>
-              <a:ext cx="490568" cy="397545"/>
-            </a:xfrm>
-            <a:prstGeom prst="rect">
-              <a:avLst/>
-            </a:prstGeom>
-            <a:noFill/>
-            <a:ln w="25400">
-              <a:noFill/>
-              <a:miter lim="800000"/>
-              <a:headEnd/>
-              <a:tailEnd/>
-            </a:ln>
-          </p:spPr>
-          <p:txBody>
-            <a:bodyPr wrap="none" lIns="90487" tIns="44450" rIns="90487" bIns="44450">
-              <a:prstTxWarp prst="textNoShape">
-                <a:avLst/>
-              </a:prstTxWarp>
-              <a:spAutoFit/>
-            </a:bodyPr>
-            <a:lstStyle/>
-            <a:p>
-              <a:pPr eaLnBrk="0" hangingPunct="0"/>
-              <a:r>
-                <a:rPr lang="en-US" sz="2000" dirty="0">
-                  <a:latin typeface="Courier New" pitchFamily="-96" charset="0"/>
-                </a:rPr>
-                <a:t>16</a:t>
-              </a:r>
-            </a:p>
-          </p:txBody>
-        </p:sp>
-        <p:sp>
-          <p:nvSpPr>
-            <p:cNvPr id="13" name="Rectangle 16"/>
-            <p:cNvSpPr>
-              <a:spLocks noChangeArrowheads="1"/>
-            </p:cNvSpPr>
-            <p:nvPr/>
-          </p:nvSpPr>
-          <p:spPr bwMode="auto">
-            <a:xfrm>
-              <a:off x="7677204" y="2813329"/>
-              <a:ext cx="490568" cy="397545"/>
-            </a:xfrm>
-            <a:prstGeom prst="rect">
-              <a:avLst/>
-            </a:prstGeom>
-            <a:noFill/>
-            <a:ln w="25400">
-              <a:noFill/>
-              <a:miter lim="800000"/>
-              <a:headEnd/>
-              <a:tailEnd/>
-            </a:ln>
-          </p:spPr>
-          <p:txBody>
-            <a:bodyPr wrap="none" lIns="90487" tIns="44450" rIns="90487" bIns="44450">
-              <a:prstTxWarp prst="textNoShape">
-                <a:avLst/>
-              </a:prstTxWarp>
-              <a:spAutoFit/>
-            </a:bodyPr>
-            <a:lstStyle/>
-            <a:p>
-              <a:pPr eaLnBrk="0" hangingPunct="0"/>
-              <a:r>
-                <a:rPr lang="en-US" sz="2000" dirty="0">
-                  <a:latin typeface="Courier New" pitchFamily="-96" charset="0"/>
-                </a:rPr>
-                <a:t>24</a:t>
-              </a:r>
-            </a:p>
-          </p:txBody>
-        </p:sp>
-      </p:grpSp>
-      <p:sp>
-        <p:nvSpPr>
-          <p:cNvPr id="7" name="Rectangle 2">
-            <a:extLst>
-              <a:ext uri="{FF2B5EF4-FFF2-40B4-BE49-F238E27FC236}">
-                <a16:creationId xmlns:a16="http://schemas.microsoft.com/office/drawing/2014/main" id="{7CBB900F-B9FE-4E0D-BE8B-43983660D687}"/>
-              </a:ext>
-            </a:extLst>
-          </p:cNvPr>
-          <p:cNvSpPr>
-            <a:spLocks noChangeArrowheads="1"/>
-          </p:cNvSpPr>
-          <p:nvPr/>
-        </p:nvSpPr>
-        <p:spPr bwMode="auto">
-          <a:xfrm>
-            <a:off x="538526" y="5419852"/>
-            <a:ext cx="2314954" cy="920765"/>
-          </a:xfrm>
-          <a:prstGeom prst="rect">
-            <a:avLst/>
-          </a:prstGeom>
-          <a:noFill/>
-          <a:ln w="12700">
-            <a:noFill/>
-            <a:miter lim="800000"/>
-            <a:headEnd/>
-            <a:tailEnd/>
-          </a:ln>
-        </p:spPr>
-        <p:txBody>
-          <a:bodyPr wrap="square" lIns="90487" tIns="44450" rIns="90487" bIns="44450">
-            <a:prstTxWarp prst="textNoShape">
-              <a:avLst/>
-            </a:prstTxWarp>
-            <a:spAutoFit/>
-          </a:bodyPr>
-          <a:lstStyle/>
-          <a:p>
-            <a:pPr eaLnBrk="0" hangingPunct="0"/>
-            <a:r>
-              <a:rPr lang="en-US" dirty="0">
-                <a:latin typeface="Consolas"/>
-                <a:cs typeface="Consolas"/>
-              </a:rPr>
-              <a:t>n-&gt;id = 10;</a:t>
-            </a:r>
-          </a:p>
-          <a:p>
-            <a:pPr eaLnBrk="0" hangingPunct="0"/>
-            <a:r>
-              <a:rPr lang="en-US" dirty="0">
-                <a:latin typeface="Consolas"/>
-                <a:cs typeface="Consolas"/>
-              </a:rPr>
-              <a:t>n-&gt;name = NULL;</a:t>
-            </a:r>
-          </a:p>
-          <a:p>
-            <a:pPr eaLnBrk="0" hangingPunct="0"/>
-            <a:r>
-              <a:rPr lang="en-US" dirty="0">
-                <a:latin typeface="Consolas"/>
-                <a:cs typeface="Consolas"/>
-              </a:rPr>
-              <a:t>n-&gt;next = n;</a:t>
-            </a:r>
-          </a:p>
-        </p:txBody>
-      </p:sp>
-      <p:sp>
-        <p:nvSpPr>
-          <p:cNvPr id="18" name="矩形 1">
-            <a:extLst>
-              <a:ext uri="{FF2B5EF4-FFF2-40B4-BE49-F238E27FC236}">
-                <a16:creationId xmlns:a16="http://schemas.microsoft.com/office/drawing/2014/main" id="{8A728C36-136A-4D05-92FD-2A411E135B44}"/>
-              </a:ext>
-            </a:extLst>
-          </p:cNvPr>
-          <p:cNvSpPr/>
-          <p:nvPr/>
-        </p:nvSpPr>
-        <p:spPr>
-          <a:xfrm>
-            <a:off x="3006484" y="5257799"/>
-            <a:ext cx="1615763" cy="369332"/>
-          </a:xfrm>
-          <a:prstGeom prst="rect">
-            <a:avLst/>
-          </a:prstGeom>
-        </p:spPr>
-        <p:txBody>
-          <a:bodyPr wrap="none">
-            <a:spAutoFit/>
-          </a:bodyPr>
-          <a:lstStyle/>
-          <a:p>
-            <a:r>
-              <a:rPr lang="en-US" altLang="zh-CN" dirty="0">
-                <a:latin typeface="Calibri"/>
-                <a:cs typeface="Calibri"/>
-              </a:rPr>
-              <a:t>%</a:t>
-            </a:r>
-            <a:r>
-              <a:rPr lang="en-US" altLang="zh-CN" dirty="0" err="1">
-                <a:latin typeface="Calibri"/>
-                <a:cs typeface="Calibri"/>
-              </a:rPr>
-              <a:t>rdi</a:t>
-            </a:r>
-            <a:r>
-              <a:rPr lang="en-US" altLang="zh-CN" dirty="0">
-                <a:latin typeface="Calibri"/>
-                <a:cs typeface="Calibri"/>
-              </a:rPr>
-              <a:t> contains n</a:t>
-            </a:r>
-          </a:p>
-        </p:txBody>
-      </p:sp>
-      <p:sp>
-        <p:nvSpPr>
-          <p:cNvPr id="19" name="Right Arrow 15">
-            <a:extLst>
-              <a:ext uri="{FF2B5EF4-FFF2-40B4-BE49-F238E27FC236}">
-                <a16:creationId xmlns:a16="http://schemas.microsoft.com/office/drawing/2014/main" id="{9E0BB329-281A-4C8A-9783-34B5315B0917}"/>
-              </a:ext>
-            </a:extLst>
-          </p:cNvPr>
-          <p:cNvSpPr/>
-          <p:nvPr/>
-        </p:nvSpPr>
-        <p:spPr>
-          <a:xfrm>
-            <a:off x="2871414" y="5581604"/>
-            <a:ext cx="2353072" cy="520523"/>
-          </a:xfrm>
-          <a:prstGeom prst="rightArrow">
-            <a:avLst/>
-          </a:prstGeom>
-          <a:solidFill>
-            <a:srgbClr val="00B0F0"/>
-          </a:solidFill>
-          <a:ln w="28575">
-            <a:noFill/>
-          </a:ln>
-        </p:spPr>
-        <p:style>
-          <a:lnRef idx="2">
-            <a:schemeClr val="accent1">
-              <a:shade val="50000"/>
-            </a:schemeClr>
-          </a:lnRef>
-          <a:fillRef idx="1">
-            <a:schemeClr val="accent1"/>
-          </a:fillRef>
-          <a:effectRef idx="0">
-            <a:schemeClr val="accent1"/>
-          </a:effectRef>
-          <a:fontRef idx="minor">
-            <a:schemeClr val="lt1"/>
-          </a:fontRef>
-        </p:style>
-        <p:txBody>
-          <a:bodyPr rtlCol="0" anchor="ctr"/>
-          <a:lstStyle/>
-          <a:p>
-            <a:pPr algn="ctr"/>
-            <a:endParaRPr lang="en-US" dirty="0"/>
-          </a:p>
-        </p:txBody>
-      </p:sp>
-      <p:sp>
-        <p:nvSpPr>
-          <p:cNvPr id="20" name="Rectangle 19">
-            <a:extLst>
-              <a:ext uri="{FF2B5EF4-FFF2-40B4-BE49-F238E27FC236}">
-                <a16:creationId xmlns:a16="http://schemas.microsoft.com/office/drawing/2014/main" id="{4EB10764-E609-4AF0-B24C-76D721608202}"/>
-              </a:ext>
-            </a:extLst>
-          </p:cNvPr>
-          <p:cNvSpPr/>
-          <p:nvPr/>
-        </p:nvSpPr>
-        <p:spPr>
-          <a:xfrm>
-            <a:off x="5329635" y="5225540"/>
-            <a:ext cx="3180259" cy="400110"/>
-          </a:xfrm>
-          <a:prstGeom prst="rect">
-            <a:avLst/>
-          </a:prstGeom>
-          <a:solidFill>
-            <a:schemeClr val="tx2">
-              <a:lumMod val="40000"/>
-              <a:lumOff val="60000"/>
-            </a:schemeClr>
-          </a:solidFill>
-        </p:spPr>
-        <p:txBody>
-          <a:bodyPr wrap="square">
-            <a:spAutoFit/>
-          </a:bodyPr>
-          <a:lstStyle/>
-          <a:p>
-            <a:r>
-              <a:rPr lang="en-US" sz="2000" dirty="0" err="1">
-                <a:latin typeface="Consolas"/>
-                <a:cs typeface="Consolas"/>
-              </a:rPr>
-              <a:t>movq</a:t>
-            </a:r>
-            <a:r>
-              <a:rPr lang="en-US" sz="2000" dirty="0">
-                <a:latin typeface="Consolas"/>
-                <a:cs typeface="Consolas"/>
-              </a:rPr>
-              <a:t>    $10, (%</a:t>
-            </a:r>
-            <a:r>
-              <a:rPr lang="en-US" sz="2000" dirty="0" err="1">
-                <a:latin typeface="Consolas"/>
-                <a:cs typeface="Consolas"/>
-              </a:rPr>
-              <a:t>rdi</a:t>
-            </a:r>
-            <a:r>
-              <a:rPr lang="en-US" sz="2000" dirty="0">
-                <a:latin typeface="Consolas"/>
-                <a:cs typeface="Consolas"/>
-              </a:rPr>
-              <a:t>)</a:t>
-            </a:r>
-          </a:p>
-        </p:txBody>
-      </p:sp>
-      <p:sp>
-        <p:nvSpPr>
-          <p:cNvPr id="21" name="Rectangle 20">
-            <a:extLst>
-              <a:ext uri="{FF2B5EF4-FFF2-40B4-BE49-F238E27FC236}">
-                <a16:creationId xmlns:a16="http://schemas.microsoft.com/office/drawing/2014/main" id="{1C3107A0-B1BD-4CB7-9062-570F323C599D}"/>
-              </a:ext>
-            </a:extLst>
-          </p:cNvPr>
-          <p:cNvSpPr/>
-          <p:nvPr/>
-        </p:nvSpPr>
-        <p:spPr>
-          <a:xfrm>
-            <a:off x="5329635" y="5617594"/>
-            <a:ext cx="3180259" cy="400110"/>
-          </a:xfrm>
-          <a:prstGeom prst="rect">
-            <a:avLst/>
-          </a:prstGeom>
-          <a:solidFill>
-            <a:schemeClr val="tx2">
-              <a:lumMod val="40000"/>
-              <a:lumOff val="60000"/>
-            </a:schemeClr>
-          </a:solidFill>
-        </p:spPr>
-        <p:txBody>
-          <a:bodyPr wrap="square">
-            <a:spAutoFit/>
-          </a:bodyPr>
-          <a:lstStyle/>
-          <a:p>
-            <a:r>
-              <a:rPr lang="en-US" sz="2000" dirty="0" err="1">
-                <a:latin typeface="Consolas"/>
-                <a:cs typeface="Consolas"/>
-              </a:rPr>
-              <a:t>movq</a:t>
-            </a:r>
-            <a:r>
-              <a:rPr lang="en-US" sz="2000" dirty="0">
-                <a:latin typeface="Consolas"/>
-                <a:cs typeface="Consolas"/>
-              </a:rPr>
-              <a:t>    $0, 8(%</a:t>
-            </a:r>
-            <a:r>
-              <a:rPr lang="en-US" sz="2000" dirty="0" err="1">
-                <a:latin typeface="Consolas"/>
-                <a:cs typeface="Consolas"/>
-              </a:rPr>
-              <a:t>rdi</a:t>
-            </a:r>
-            <a:r>
-              <a:rPr lang="en-US" sz="2000" dirty="0">
-                <a:latin typeface="Consolas"/>
-                <a:cs typeface="Consolas"/>
-              </a:rPr>
-              <a:t>)</a:t>
-            </a:r>
-          </a:p>
-        </p:txBody>
-      </p:sp>
-      <p:sp>
-        <p:nvSpPr>
-          <p:cNvPr id="22" name="Rectangle 21">
-            <a:extLst>
-              <a:ext uri="{FF2B5EF4-FFF2-40B4-BE49-F238E27FC236}">
-                <a16:creationId xmlns:a16="http://schemas.microsoft.com/office/drawing/2014/main" id="{EA5DFA26-9324-4C6F-8C90-B75F921DAA93}"/>
-              </a:ext>
-            </a:extLst>
-          </p:cNvPr>
-          <p:cNvSpPr/>
-          <p:nvPr/>
-        </p:nvSpPr>
-        <p:spPr>
-          <a:xfrm>
-            <a:off x="5329635" y="6017704"/>
-            <a:ext cx="3180259" cy="400110"/>
-          </a:xfrm>
-          <a:prstGeom prst="rect">
-            <a:avLst/>
-          </a:prstGeom>
-          <a:solidFill>
-            <a:schemeClr val="tx2">
-              <a:lumMod val="40000"/>
-              <a:lumOff val="60000"/>
-            </a:schemeClr>
-          </a:solidFill>
-        </p:spPr>
-        <p:txBody>
-          <a:bodyPr wrap="square">
-            <a:spAutoFit/>
-          </a:bodyPr>
-          <a:lstStyle/>
-          <a:p>
-            <a:r>
-              <a:rPr lang="en-US" sz="2000" dirty="0" err="1"/>
-              <a:t>movq</a:t>
-            </a:r>
-            <a:r>
-              <a:rPr lang="en-US" sz="2000" dirty="0"/>
-              <a:t>         %</a:t>
-            </a:r>
-            <a:r>
-              <a:rPr lang="en-US" sz="2000" dirty="0" err="1"/>
-              <a:t>rdi</a:t>
-            </a:r>
-            <a:r>
-              <a:rPr lang="en-US" sz="2000" dirty="0"/>
-              <a:t>, 16(%</a:t>
-            </a:r>
-            <a:r>
-              <a:rPr lang="en-US" sz="2000" dirty="0" err="1"/>
-              <a:t>rdi</a:t>
-            </a:r>
-            <a:r>
-              <a:rPr lang="en-US" sz="2000" dirty="0"/>
-              <a:t>)</a:t>
-            </a:r>
-            <a:endParaRPr lang="en-US" sz="2000" dirty="0">
-              <a:latin typeface="Consolas"/>
-              <a:cs typeface="Consolas"/>
-            </a:endParaRPr>
-          </a:p>
-        </p:txBody>
-      </p:sp>
-    </p:spTree>
-    <p:extLst>
-      <p:ext uri="{BB962C8B-B14F-4D97-AF65-F5344CB8AC3E}">
-        <p14:creationId xmlns:p14="http://schemas.microsoft.com/office/powerpoint/2010/main" val="3728354591"/>
-      </p:ext>
-    </p:extLst>
-  </p:cSld>
-  <p:clrMapOvr>
-    <a:masterClrMapping/>
-  </p:clrMapOvr>
-  <p:timing>
-    <p:tnLst>
-      <p:par>
-        <p:cTn id="1" dur="indefinite" restart="never" nodeType="tmRoot">
-          <p:childTnLst>
-            <p:seq concurrent="1" nextAc="seek">
-              <p:cTn id="2" dur="indefinite" nodeType="mainSeq">
-                <p:childTnLst>
-                  <p:par>
-                    <p:cTn id="3" fill="hold">
-                      <p:stCondLst>
-                        <p:cond delay="indefinite"/>
-                      </p:stCondLst>
-                      <p:childTnLst>
-                        <p:par>
-                          <p:cTn id="4" fill="hold">
-                            <p:stCondLst>
-                              <p:cond delay="0"/>
-                            </p:stCondLst>
-                            <p:childTnLst>
-                              <p:par>
-                                <p:cTn id="5" presetID="1" presetClass="entr" presetSubtype="0" fill="hold" grpId="0" nodeType="clickEffect">
-                                  <p:stCondLst>
-                                    <p:cond delay="0"/>
-                                  </p:stCondLst>
-                                  <p:childTnLst>
-                                    <p:set>
-                                      <p:cBhvr>
-                                        <p:cTn id="6" dur="1" fill="hold">
-                                          <p:stCondLst>
-                                            <p:cond delay="0"/>
-                                          </p:stCondLst>
-                                        </p:cTn>
-                                        <p:tgtEl>
-                                          <p:spTgt spid="20"/>
-                                        </p:tgtEl>
-                                        <p:attrNameLst>
-                                          <p:attrName>style.visibility</p:attrName>
-                                        </p:attrNameLst>
-                                      </p:cBhvr>
-                                      <p:to>
-                                        <p:strVal val="visible"/>
-                                      </p:to>
-                                    </p:set>
-                                  </p:childTnLst>
-                                </p:cTn>
-                              </p:par>
-                            </p:childTnLst>
-                          </p:cTn>
-                        </p:par>
-                      </p:childTnLst>
-                    </p:cTn>
-                  </p:par>
-                  <p:par>
-                    <p:cTn id="7" fill="hold">
-                      <p:stCondLst>
-                        <p:cond delay="indefinite"/>
-                      </p:stCondLst>
-                      <p:childTnLst>
-                        <p:par>
-                          <p:cTn id="8" fill="hold">
-                            <p:stCondLst>
-                              <p:cond delay="0"/>
-                            </p:stCondLst>
-                            <p:childTnLst>
-                              <p:par>
-                                <p:cTn id="9" presetID="1" presetClass="entr" presetSubtype="0" fill="hold" grpId="0" nodeType="clickEffect">
-                                  <p:stCondLst>
-                                    <p:cond delay="0"/>
-                                  </p:stCondLst>
-                                  <p:childTnLst>
-                                    <p:set>
-                                      <p:cBhvr>
-                                        <p:cTn id="10" dur="1" fill="hold">
-                                          <p:stCondLst>
-                                            <p:cond delay="0"/>
-                                          </p:stCondLst>
-                                        </p:cTn>
-                                        <p:tgtEl>
-                                          <p:spTgt spid="21"/>
-                                        </p:tgtEl>
-                                        <p:attrNameLst>
-                                          <p:attrName>style.visibility</p:attrName>
-                                        </p:attrNameLst>
-                                      </p:cBhvr>
-                                      <p:to>
-                                        <p:strVal val="visible"/>
-                                      </p:to>
-                                    </p:set>
-                                  </p:childTnLst>
-                                </p:cTn>
-                              </p:par>
-                            </p:childTnLst>
-                          </p:cTn>
-                        </p:par>
-                      </p:childTnLst>
-                    </p:cTn>
-                  </p:par>
-                  <p:par>
-                    <p:cTn id="11" fill="hold">
-                      <p:stCondLst>
-                        <p:cond delay="indefinite"/>
-                      </p:stCondLst>
-                      <p:childTnLst>
-                        <p:par>
-                          <p:cTn id="12" fill="hold">
-                            <p:stCondLst>
-                              <p:cond delay="0"/>
-                            </p:stCondLst>
-                            <p:childTnLst>
-                              <p:par>
-                                <p:cTn id="13" presetID="1" presetClass="entr" presetSubtype="0" fill="hold" grpId="0" nodeType="clickEffect">
-                                  <p:stCondLst>
-                                    <p:cond delay="0"/>
-                                  </p:stCondLst>
-                                  <p:childTnLst>
-                                    <p:set>
-                                      <p:cBhvr>
-                                        <p:cTn id="14" dur="1" fill="hold">
-                                          <p:stCondLst>
-                                            <p:cond delay="0"/>
-                                          </p:stCondLst>
-                                        </p:cTn>
-                                        <p:tgtEl>
-                                          <p:spTgt spid="22"/>
-                                        </p:tgtEl>
-                                        <p:attrNameLst>
-                                          <p:attrName>style.visibility</p:attrName>
-                                        </p:attrNameLst>
-                                      </p:cBhvr>
-                                      <p:to>
-                                        <p:strVal val="visible"/>
-                                      </p:to>
-                                    </p:set>
-                                  </p:childTnLst>
-                                </p:cTn>
-                              </p:par>
-                            </p:childTnLst>
-                          </p:cTn>
-                        </p:par>
-                      </p:childTnLst>
-                    </p:cTn>
-                  </p:par>
-                </p:childTnLst>
-              </p:cTn>
-              <p:prevCondLst>
-                <p:cond evt="onPrev" delay="0">
-                  <p:tgtEl>
-                    <p:sldTgt/>
-                  </p:tgtEl>
-                </p:cond>
-              </p:prevCondLst>
-              <p:nextCondLst>
-                <p:cond evt="onNext" delay="0">
-                  <p:tgtEl>
-                    <p:sldTgt/>
-                  </p:tgtEl>
-                </p:cond>
-              </p:nextCondLst>
-            </p:seq>
-          </p:childTnLst>
-        </p:cTn>
-      </p:par>
-    </p:tnLst>
-    <p:bldLst>
-      <p:bldP spid="20" grpId="0" animBg="1"/>
-      <p:bldP spid="21" grpId="0" animBg="1"/>
-      <p:bldP spid="22" grpId="0" animBg="1"/>
-    </p:bldLst>
-  </p:timing>
 </p:sld>
 </file>
 
@@ -33225,7 +33217,7 @@
 </file>
 
 <file path=ppt/slides/slide4.xml><?xml version="1.0" encoding="utf-8"?>
-<p:sld xmlns:a="http://schemas.openxmlformats.org/drawingml/2006/main" xmlns:r="http://schemas.openxmlformats.org/officeDocument/2006/relationships" xmlns:p="http://schemas.openxmlformats.org/presentationml/2006/main">
+<p:sld xmlns:a="http://schemas.openxmlformats.org/drawingml/2006/main" xmlns:r="http://schemas.openxmlformats.org/officeDocument/2006/relationships" xmlns:p="http://schemas.openxmlformats.org/presentationml/2006/main" show="0">
   <p:cSld>
     <p:spTree>
       <p:nvGrpSpPr>
@@ -34666,7 +34658,7 @@
 </file>
 
 <file path=ppt/slides/slide5.xml><?xml version="1.0" encoding="utf-8"?>
-<p:sld xmlns:a="http://schemas.openxmlformats.org/drawingml/2006/main" xmlns:r="http://schemas.openxmlformats.org/officeDocument/2006/relationships" xmlns:p="http://schemas.openxmlformats.org/presentationml/2006/main">
+<p:sld xmlns:a="http://schemas.openxmlformats.org/drawingml/2006/main" xmlns:r="http://schemas.openxmlformats.org/officeDocument/2006/relationships" xmlns:p="http://schemas.openxmlformats.org/presentationml/2006/main" show="0">
   <p:cSld>
     <p:spTree>
       <p:nvGrpSpPr>
@@ -39344,6 +39336,12 @@
 </file>
 
 <file path=customXml/item1.xml><?xml version="1.0" encoding="utf-8"?>
+<p:properties xmlns:p="http://schemas.microsoft.com/office/2006/metadata/properties" xmlns:xsi="http://www.w3.org/2001/XMLSchema-instance" xmlns:pc="http://schemas.microsoft.com/office/infopath/2007/PartnerControls">
+  <documentManagement/>
+</p:properties>
+</file>
+
+<file path=customXml/item2.xml><?xml version="1.0" encoding="utf-8"?>
 <ct:contentTypeSchema xmlns:ct="http://schemas.microsoft.com/office/2006/metadata/contentType" xmlns:ma="http://schemas.microsoft.com/office/2006/metadata/properties/metaAttributes" ct:_="" ma:_="" ma:contentTypeName="Document" ma:contentTypeID="0x010100F230F55FC4E86843A38ABC983CBD33D2" ma:contentTypeVersion="2" ma:contentTypeDescription="Create a new document." ma:contentTypeScope="" ma:versionID="ea51d48ed41b66d32eb63de817eecbcd">
   <xsd:schema xmlns:xsd="http://www.w3.org/2001/XMLSchema" xmlns:xs="http://www.w3.org/2001/XMLSchema" xmlns:p="http://schemas.microsoft.com/office/2006/metadata/properties" xmlns:ns3="74d6482f-e53c-4fa7-ac87-951f9f66bd4c" targetNamespace="http://schemas.microsoft.com/office/2006/metadata/properties" ma:root="true" ma:fieldsID="128b5480a780b9585a060f8329b1fff7" ns3:_="">
     <xsd:import namespace="74d6482f-e53c-4fa7-ac87-951f9f66bd4c"/>
@@ -39475,7 +39473,7 @@
 </ct:contentTypeSchema>
 </file>
 
-<file path=customXml/item2.xml><?xml version="1.0" encoding="utf-8"?>
+<file path=customXml/item3.xml><?xml version="1.0" encoding="utf-8"?>
 <?mso-contentType ?>
 <FormTemplates xmlns="http://schemas.microsoft.com/sharepoint/v3/contenttype/forms">
   <Display>DocumentLibraryForm</Display>
@@ -39484,13 +39482,23 @@
 </FormTemplates>
 </file>
 
-<file path=customXml/item3.xml><?xml version="1.0" encoding="utf-8"?>
-<p:properties xmlns:p="http://schemas.microsoft.com/office/2006/metadata/properties" xmlns:xsi="http://www.w3.org/2001/XMLSchema-instance" xmlns:pc="http://schemas.microsoft.com/office/infopath/2007/PartnerControls">
-  <documentManagement/>
-</p:properties>
+<file path=customXml/itemProps1.xml><?xml version="1.0" encoding="utf-8"?>
+<ds:datastoreItem xmlns:ds="http://schemas.openxmlformats.org/officeDocument/2006/customXml" ds:itemID="{2FA590FC-E231-4FA0-82C6-18091F1EF7EA}">
+  <ds:schemaRefs>
+    <ds:schemaRef ds:uri="http://schemas.microsoft.com/office/2006/metadata/properties"/>
+    <ds:schemaRef ds:uri="74d6482f-e53c-4fa7-ac87-951f9f66bd4c"/>
+    <ds:schemaRef ds:uri="http://purl.org/dc/elements/1.1/"/>
+    <ds:schemaRef ds:uri="http://schemas.openxmlformats.org/package/2006/metadata/core-properties"/>
+    <ds:schemaRef ds:uri="http://www.w3.org/XML/1998/namespace"/>
+    <ds:schemaRef ds:uri="http://purl.org/dc/terms/"/>
+    <ds:schemaRef ds:uri="http://schemas.microsoft.com/office/2006/documentManagement/types"/>
+    <ds:schemaRef ds:uri="http://purl.org/dc/dcmitype/"/>
+    <ds:schemaRef ds:uri="http://schemas.microsoft.com/office/infopath/2007/PartnerControls"/>
+  </ds:schemaRefs>
+</ds:datastoreItem>
 </file>
 
-<file path=customXml/itemProps1.xml><?xml version="1.0" encoding="utf-8"?>
+<file path=customXml/itemProps2.xml><?xml version="1.0" encoding="utf-8"?>
 <ds:datastoreItem xmlns:ds="http://schemas.openxmlformats.org/officeDocument/2006/customXml" ds:itemID="{ABF43CC1-80B4-499D-B0B4-18A89F1EAE21}">
   <ds:schemaRefs>
     <ds:schemaRef ds:uri="http://schemas.microsoft.com/office/2006/metadata/contentType"/>
@@ -39508,26 +39516,10 @@
 </ds:datastoreItem>
 </file>
 
-<file path=customXml/itemProps2.xml><?xml version="1.0" encoding="utf-8"?>
+<file path=customXml/itemProps3.xml><?xml version="1.0" encoding="utf-8"?>
 <ds:datastoreItem xmlns:ds="http://schemas.openxmlformats.org/officeDocument/2006/customXml" ds:itemID="{AF5EFA88-A71A-4344-B91C-EC3518AE1190}">
   <ds:schemaRefs>
     <ds:schemaRef ds:uri="http://schemas.microsoft.com/sharepoint/v3/contenttype/forms"/>
   </ds:schemaRefs>
 </ds:datastoreItem>
-</file>
-
-<file path=customXml/itemProps3.xml><?xml version="1.0" encoding="utf-8"?>
-<ds:datastoreItem xmlns:ds="http://schemas.openxmlformats.org/officeDocument/2006/customXml" ds:itemID="{2FA590FC-E231-4FA0-82C6-18091F1EF7EA}">
-  <ds:schemaRefs>
-    <ds:schemaRef ds:uri="http://purl.org/dc/elements/1.1/"/>
-    <ds:schemaRef ds:uri="http://schemas.microsoft.com/office/2006/metadata/properties"/>
-    <ds:schemaRef ds:uri="http://purl.org/dc/terms/"/>
-    <ds:schemaRef ds:uri="http://schemas.openxmlformats.org/package/2006/metadata/core-properties"/>
-    <ds:schemaRef ds:uri="74d6482f-e53c-4fa7-ac87-951f9f66bd4c"/>
-    <ds:schemaRef ds:uri="http://schemas.microsoft.com/office/infopath/2007/PartnerControls"/>
-    <ds:schemaRef ds:uri="http://schemas.microsoft.com/office/2006/documentManagement/types"/>
-    <ds:schemaRef ds:uri="http://purl.org/dc/dcmitype/"/>
-    <ds:schemaRef ds:uri="http://www.w3.org/XML/1998/namespace"/>
-  </ds:schemaRefs>
-</ds:datastoreItem>
 </file>